--- a/output/wordlabs-therm-3day.pptx
+++ b/output/wordlabs-therm-3day.pptx
@@ -6071,7 +6071,7 @@
                 <a:ea typeface="Calibri" pitchFamily="34" charset="-122"/>
                 <a:cs typeface="Calibri" pitchFamily="34" charset="-120"/>
               </a:rPr>
-              <a:t> showed a very high temperature, so we turned down the </a:t>
+              <a:t> showed a high temperature, so Mia wrapped herself in her </a:t>
             </a:r>
             <a:pPr algn="l" indent="0" marL="0">
               <a:buNone/>
@@ -6088,7 +6088,7 @@
                 <a:ea typeface="Calibri" pitchFamily="34" charset="-122"/>
                 <a:cs typeface="Calibri" pitchFamily="34" charset="-120"/>
               </a:rPr>
-              <a:t>thermostat</a:t>
+              <a:t>thermal</a:t>
             </a:r>
             <a:pPr algn="l" indent="0" marL="0">
               <a:buNone/>
@@ -6102,7 +6102,7 @@
                 <a:ea typeface="Calibri" pitchFamily="34" charset="-122"/>
                 <a:cs typeface="Calibri" pitchFamily="34" charset="-120"/>
               </a:rPr>
-              <a:t>.</a:t>
+              <a:t> blanket.</a:t>
             </a:r>
             <a:endParaRPr lang="en-US" sz="1800" dirty="0"/>
           </a:p>
@@ -6385,7 +6385,7 @@
                 <a:ea typeface="Trebuchet MS" pitchFamily="34" charset="-122"/>
                 <a:cs typeface="Trebuchet MS" pitchFamily="34" charset="-120"/>
               </a:rPr>
-              <a:t>thermostat</a:t>
+              <a:t>thermal</a:t>
             </a:r>
             <a:endParaRPr lang="en-US" sz="1400" dirty="0"/>
           </a:p>
@@ -8011,7 +8011,7 @@
                 <a:ea typeface="Calibri" pitchFamily="34" charset="-122"/>
                 <a:cs typeface="Calibri" pitchFamily="34" charset="-120"/>
               </a:rPr>
-              <a:t>links base to suffix</a:t>
+              <a:t>links root to suffix</a:t>
             </a:r>
             <a:endParaRPr lang="en-US" sz="700" dirty="0"/>
           </a:p>
@@ -8123,7 +8123,7 @@
                 <a:ea typeface="Calibri" pitchFamily="34" charset="-122"/>
                 <a:cs typeface="Calibri" pitchFamily="34" charset="-120"/>
               </a:rPr>
-              <a:t>measuring tool</a:t>
+              <a:t>measuring instrument</a:t>
             </a:r>
             <a:endParaRPr lang="en-US" sz="850" dirty="0"/>
           </a:p>
@@ -9147,7 +9147,7 @@
                 <a:ea typeface="Calibri" pitchFamily="34" charset="-122"/>
                 <a:cs typeface="Calibri" pitchFamily="34" charset="-120"/>
               </a:rPr>
-              <a:t>links base to suffix</a:t>
+              <a:t>links root to suffix</a:t>
             </a:r>
             <a:endParaRPr lang="en-US" sz="700" dirty="0"/>
           </a:p>
@@ -9259,7 +9259,7 @@
                 <a:ea typeface="Calibri" pitchFamily="34" charset="-122"/>
                 <a:cs typeface="Calibri" pitchFamily="34" charset="-120"/>
               </a:rPr>
-              <a:t>measuring tool</a:t>
+              <a:t>measuring instrument</a:t>
             </a:r>
             <a:endParaRPr lang="en-US" sz="850" dirty="0"/>
           </a:p>
@@ -9523,7 +9523,7 @@
                 <a:ea typeface="Trebuchet MS" pitchFamily="34" charset="-122"/>
                 <a:cs typeface="Trebuchet MS" pitchFamily="34" charset="-120"/>
               </a:rPr>
-              <a:t>mo</a:t>
+              <a:t>mom</a:t>
             </a:r>
             <a:endParaRPr lang="en-US" sz="1400" dirty="0"/>
           </a:p>
@@ -9628,7 +9628,7 @@
                 <a:ea typeface="Trebuchet MS" pitchFamily="34" charset="-122"/>
                 <a:cs typeface="Trebuchet MS" pitchFamily="34" charset="-120"/>
               </a:rPr>
-              <a:t>me</a:t>
+              <a:t>e</a:t>
             </a:r>
             <a:endParaRPr lang="en-US" sz="1400" dirty="0"/>
           </a:p>
@@ -10625,7 +10625,7 @@
                 <a:ea typeface="Calibri" pitchFamily="34" charset="-122"/>
                 <a:cs typeface="Calibri" pitchFamily="34" charset="-120"/>
               </a:rPr>
-              <a:t>links base to suffix</a:t>
+              <a:t>links root to suffix</a:t>
             </a:r>
             <a:endParaRPr lang="en-US" sz="700" dirty="0"/>
           </a:p>
@@ -10737,7 +10737,7 @@
                 <a:ea typeface="Calibri" pitchFamily="34" charset="-122"/>
                 <a:cs typeface="Calibri" pitchFamily="34" charset="-120"/>
               </a:rPr>
-              <a:t>measuring tool</a:t>
+              <a:t>measuring instrument</a:t>
             </a:r>
             <a:endParaRPr lang="en-US" sz="850" dirty="0"/>
           </a:p>
@@ -11001,7 +11001,7 @@
                 <a:ea typeface="Trebuchet MS" pitchFamily="34" charset="-122"/>
                 <a:cs typeface="Trebuchet MS" pitchFamily="34" charset="-120"/>
               </a:rPr>
-              <a:t>mo</a:t>
+              <a:t>mom</a:t>
             </a:r>
             <a:endParaRPr lang="en-US" sz="1400" dirty="0"/>
           </a:p>
@@ -11106,7 +11106,7 @@
                 <a:ea typeface="Trebuchet MS" pitchFamily="34" charset="-122"/>
                 <a:cs typeface="Trebuchet MS" pitchFamily="34" charset="-120"/>
               </a:rPr>
-              <a:t>me</a:t>
+              <a:t>e</a:t>
             </a:r>
             <a:endParaRPr lang="en-US" sz="1400" dirty="0"/>
           </a:p>
@@ -12263,7 +12263,7 @@
                 <a:ea typeface="Trebuchet MS" pitchFamily="34" charset="-122"/>
                 <a:cs typeface="Trebuchet MS" pitchFamily="34" charset="-120"/>
               </a:rPr>
-              <a:t>thermostat</a:t>
+              <a:t>thermal</a:t>
             </a:r>
             <a:endParaRPr lang="en-US" sz="2800" dirty="0"/>
           </a:p>
@@ -13090,7 +13090,7 @@
                 <a:ea typeface="Trebuchet MS" pitchFamily="34" charset="-122"/>
                 <a:cs typeface="Trebuchet MS" pitchFamily="34" charset="-120"/>
               </a:rPr>
-              <a:t>thermostat</a:t>
+              <a:t>thermal</a:t>
             </a:r>
             <a:endParaRPr lang="en-US" sz="2800" dirty="0"/>
           </a:p>
@@ -13170,7 +13170,7 @@
         </p:nvSpPr>
         <p:spPr>
           <a:xfrm>
-            <a:off x="2221992" y="2258568"/>
+            <a:off x="2938272" y="2258568"/>
             <a:ext cx="1828800" cy="292608"/>
           </a:xfrm>
           <a:prstGeom prst="rect">
@@ -13204,7 +13204,7 @@
         </p:nvSpPr>
         <p:spPr>
           <a:xfrm>
-            <a:off x="2221992" y="2258568"/>
+            <a:off x="2938272" y="2258568"/>
             <a:ext cx="1828800" cy="292608"/>
           </a:xfrm>
           <a:prstGeom prst="rect">
@@ -13243,7 +13243,7 @@
         </p:nvSpPr>
         <p:spPr>
           <a:xfrm>
-            <a:off x="2221992" y="2569464"/>
+            <a:off x="2938272" y="2569464"/>
             <a:ext cx="1828800" cy="201168"/>
           </a:xfrm>
           <a:prstGeom prst="rect">
@@ -13282,7 +13282,7 @@
         </p:nvSpPr>
         <p:spPr>
           <a:xfrm>
-            <a:off x="4370832" y="2258568"/>
+            <a:off x="5803392" y="2258568"/>
             <a:ext cx="1828800" cy="292608"/>
           </a:xfrm>
           <a:prstGeom prst="rect">
@@ -13316,7 +13316,7 @@
         </p:nvSpPr>
         <p:spPr>
           <a:xfrm>
-            <a:off x="4370832" y="2258568"/>
+            <a:off x="5803392" y="2258568"/>
             <a:ext cx="1828800" cy="292608"/>
           </a:xfrm>
           <a:prstGeom prst="rect">
@@ -13341,7 +13341,7 @@
                 <a:ea typeface="Trebuchet MS" pitchFamily="34" charset="-122"/>
                 <a:cs typeface="Trebuchet MS" pitchFamily="34" charset="-120"/>
               </a:rPr>
-              <a:t>o</a:t>
+              <a:t>al</a:t>
             </a:r>
             <a:endParaRPr lang="en-US" sz="1300" dirty="0"/>
           </a:p>
@@ -13355,7 +13355,7 @@
         </p:nvSpPr>
         <p:spPr>
           <a:xfrm>
-            <a:off x="4370832" y="2569464"/>
+            <a:off x="5803392" y="2569464"/>
             <a:ext cx="1828800" cy="201168"/>
           </a:xfrm>
           <a:prstGeom prst="rect">
@@ -13380,7 +13380,7 @@
                 <a:ea typeface="Calibri" pitchFamily="34" charset="-122"/>
                 <a:cs typeface="Calibri" pitchFamily="34" charset="-120"/>
               </a:rPr>
-              <a:t>connecting vowel</a:t>
+              <a:t>relating to</a:t>
             </a:r>
             <a:endParaRPr lang="en-US" sz="850" dirty="0"/>
           </a:p>
@@ -13388,216 +13388,197 @@
       </p:sp>
       <p:sp>
         <p:nvSpPr>
-          <p:cNvPr id="22" name="Text 20"/>
-          <p:cNvSpPr/>
-          <p:nvPr/>
-        </p:nvSpPr>
-        <p:spPr>
-          <a:xfrm>
-            <a:off x="4370832" y="2752344"/>
-            <a:ext cx="1828800" cy="182880"/>
-          </a:xfrm>
-          <a:prstGeom prst="rect">
-            <a:avLst/>
-          </a:prstGeom>
-          <a:noFill/>
-          <a:ln/>
-        </p:spPr>
-        <p:txBody>
-          <a:bodyPr wrap="square" lIns="0" tIns="0" rIns="0" bIns="0" rtlCol="0" anchor="t"/>
-          <a:lstStyle/>
-          <a:p>
-            <a:pPr algn="ctr" indent="0" marL="0">
-              <a:buNone/>
-            </a:pPr>
-            <a:r>
-              <a:rPr lang="en-US" sz="700" i="1" dirty="0">
-                <a:solidFill>
-                  <a:srgbClr val="94A3B8"/>
+          <p:cNvPr id="22" name="Shape 20"/>
+          <p:cNvSpPr/>
+          <p:nvPr/>
+        </p:nvSpPr>
+        <p:spPr>
+          <a:xfrm>
+            <a:off x="365760" y="3273552"/>
+            <a:ext cx="1371600" cy="658368"/>
+          </a:xfrm>
+          <a:prstGeom prst="rect">
+            <a:avLst>
+              <a:gd name="adj" fmla="val 8333"/>
+            </a:avLst>
+          </a:prstGeom>
+          <a:solidFill>
+            <a:srgbClr val="E2E8F0"/>
+          </a:solidFill>
+          <a:ln w="12700">
+            <a:solidFill>
+              <a:srgbClr val="E2E8F0"/>
+            </a:solidFill>
+            <a:prstDash val="solid"/>
+          </a:ln>
+        </p:spPr>
+      </p:sp>
+      <p:sp>
+        <p:nvSpPr>
+          <p:cNvPr id="23" name="Text 21"/>
+          <p:cNvSpPr/>
+          <p:nvPr/>
+        </p:nvSpPr>
+        <p:spPr>
+          <a:xfrm>
+            <a:off x="365760" y="3273552"/>
+            <a:ext cx="1371600" cy="658368"/>
+          </a:xfrm>
+          <a:prstGeom prst="rect">
+            <a:avLst/>
+          </a:prstGeom>
+          <a:noFill/>
+          <a:ln/>
+        </p:spPr>
+        <p:txBody>
+          <a:bodyPr wrap="square" lIns="0" tIns="0" rIns="0" bIns="0" rtlCol="0" anchor="ctr"/>
+          <a:lstStyle/>
+          <a:p>
+            <a:pPr algn="ctr" indent="0" marL="0">
+              <a:buNone/>
+            </a:pPr>
+            <a:r>
+              <a:rPr lang="en-US" sz="1100" b="1" dirty="0">
+                <a:solidFill>
+                  <a:srgbClr val="475569"/>
+                </a:solidFill>
+                <a:latin typeface="Trebuchet MS" pitchFamily="34" charset="0"/>
+                <a:ea typeface="Trebuchet MS" pitchFamily="34" charset="-122"/>
+                <a:cs typeface="Trebuchet MS" pitchFamily="34" charset="-120"/>
+              </a:rPr>
+              <a:t>Syllables</a:t>
+            </a:r>
+            <a:endParaRPr lang="en-US" sz="1100" dirty="0"/>
+          </a:p>
+        </p:txBody>
+      </p:sp>
+      <p:sp>
+        <p:nvSpPr>
+          <p:cNvPr id="24" name="Shape 22"/>
+          <p:cNvSpPr/>
+          <p:nvPr/>
+        </p:nvSpPr>
+        <p:spPr>
+          <a:xfrm>
+            <a:off x="1874520" y="3273552"/>
+            <a:ext cx="6903720" cy="658368"/>
+          </a:xfrm>
+          <a:prstGeom prst="rect">
+            <a:avLst>
+              <a:gd name="adj" fmla="val 8333"/>
+            </a:avLst>
+          </a:prstGeom>
+          <a:solidFill>
+            <a:srgbClr val="F8FAFC"/>
+          </a:solidFill>
+          <a:ln w="12700">
+            <a:solidFill>
+              <a:srgbClr val="E2E8F0"/>
+            </a:solidFill>
+            <a:prstDash val="dash"/>
+          </a:ln>
+        </p:spPr>
+      </p:sp>
+      <p:sp>
+        <p:nvSpPr>
+          <p:cNvPr id="25" name="Text 23"/>
+          <p:cNvSpPr/>
+          <p:nvPr/>
+        </p:nvSpPr>
+        <p:spPr>
+          <a:xfrm>
+            <a:off x="1874520" y="3273552"/>
+            <a:ext cx="6903720" cy="658368"/>
+          </a:xfrm>
+          <a:prstGeom prst="rect">
+            <a:avLst/>
+          </a:prstGeom>
+          <a:noFill/>
+          <a:ln/>
+        </p:spPr>
+        <p:txBody>
+          <a:bodyPr wrap="square" rtlCol="0" anchor="ctr"/>
+          <a:lstStyle/>
+          <a:p>
+            <a:pPr algn="ctr" indent="0" marL="0">
+              <a:buNone/>
+            </a:pPr>
+            <a:r>
+              <a:rPr lang="en-US" sz="1100" i="1" dirty="0">
+                <a:solidFill>
+                  <a:srgbClr val="CBD5E1"/>
                 </a:solidFill>
                 <a:latin typeface="Calibri" pitchFamily="34" charset="0"/>
                 <a:ea typeface="Calibri" pitchFamily="34" charset="-122"/>
                 <a:cs typeface="Calibri" pitchFamily="34" charset="-120"/>
               </a:rPr>
-              <a:t>links base to suffix</a:t>
-            </a:r>
-            <a:endParaRPr lang="en-US" sz="700" dirty="0"/>
-          </a:p>
-        </p:txBody>
-      </p:sp>
-      <p:sp>
-        <p:nvSpPr>
-          <p:cNvPr id="23" name="Shape 21"/>
-          <p:cNvSpPr/>
-          <p:nvPr/>
-        </p:nvSpPr>
-        <p:spPr>
-          <a:xfrm>
-            <a:off x="6519672" y="2258568"/>
-            <a:ext cx="1828800" cy="292608"/>
+              <a:t>Write here...</a:t>
+            </a:r>
+            <a:endParaRPr lang="en-US" sz="1100" dirty="0"/>
+          </a:p>
+        </p:txBody>
+      </p:sp>
+      <p:sp>
+        <p:nvSpPr>
+          <p:cNvPr id="26" name="Shape 24"/>
+          <p:cNvSpPr/>
+          <p:nvPr/>
+        </p:nvSpPr>
+        <p:spPr>
+          <a:xfrm>
+            <a:off x="365760" y="4096512"/>
+            <a:ext cx="1371600" cy="804672"/>
           </a:xfrm>
           <a:prstGeom prst="rect">
             <a:avLst>
-              <a:gd name="adj" fmla="val 25000"/>
+              <a:gd name="adj" fmla="val 6818"/>
             </a:avLst>
           </a:prstGeom>
           <a:solidFill>
-            <a:srgbClr val="FCE7F3"/>
-          </a:solidFill>
-          <a:ln w="19050">
-            <a:solidFill>
-              <a:srgbClr val="DB2777"/>
-            </a:solidFill>
-            <a:prstDash val="solid"/>
-          </a:ln>
-          <a:effectLst>
-            <a:outerShdw sx="100000" sy="100000" kx="0" ky="0" algn="bl" rotWithShape="0" blurRad="101600" dist="38100" dir="8100000">
-              <a:srgbClr val="000000">
-                <a:alpha val="12000"/>
-              </a:srgbClr>
-            </a:outerShdw>
-          </a:effectLst>
-        </p:spPr>
-      </p:sp>
-      <p:sp>
-        <p:nvSpPr>
-          <p:cNvPr id="24" name="Text 22"/>
-          <p:cNvSpPr/>
-          <p:nvPr/>
-        </p:nvSpPr>
-        <p:spPr>
-          <a:xfrm>
-            <a:off x="6519672" y="2258568"/>
-            <a:ext cx="1828800" cy="292608"/>
-          </a:xfrm>
-          <a:prstGeom prst="rect">
-            <a:avLst/>
-          </a:prstGeom>
-          <a:noFill/>
-          <a:ln/>
-        </p:spPr>
-        <p:txBody>
-          <a:bodyPr wrap="square" lIns="0" tIns="0" rIns="0" bIns="0" rtlCol="0" anchor="ctr"/>
-          <a:lstStyle/>
-          <a:p>
-            <a:pPr algn="ctr" indent="0" marL="0">
-              <a:buNone/>
-            </a:pPr>
-            <a:r>
-              <a:rPr lang="en-US" sz="1300" b="1" dirty="0">
-                <a:solidFill>
-                  <a:srgbClr val="9D174D"/>
+            <a:srgbClr val="E2E8F0"/>
+          </a:solidFill>
+          <a:ln w="12700">
+            <a:solidFill>
+              <a:srgbClr val="E2E8F0"/>
+            </a:solidFill>
+            <a:prstDash val="solid"/>
+          </a:ln>
+        </p:spPr>
+      </p:sp>
+      <p:sp>
+        <p:nvSpPr>
+          <p:cNvPr id="27" name="Text 25"/>
+          <p:cNvSpPr/>
+          <p:nvPr/>
+        </p:nvSpPr>
+        <p:spPr>
+          <a:xfrm>
+            <a:off x="365760" y="4096512"/>
+            <a:ext cx="1371600" cy="804672"/>
+          </a:xfrm>
+          <a:prstGeom prst="rect">
+            <a:avLst/>
+          </a:prstGeom>
+          <a:noFill/>
+          <a:ln/>
+        </p:spPr>
+        <p:txBody>
+          <a:bodyPr wrap="square" lIns="0" tIns="0" rIns="0" bIns="0" rtlCol="0" anchor="ctr"/>
+          <a:lstStyle/>
+          <a:p>
+            <a:pPr algn="ctr" indent="0" marL="0">
+              <a:buNone/>
+            </a:pPr>
+            <a:r>
+              <a:rPr lang="en-US" sz="1100" b="1" dirty="0">
+                <a:solidFill>
+                  <a:srgbClr val="475569"/>
                 </a:solidFill>
                 <a:latin typeface="Trebuchet MS" pitchFamily="34" charset="0"/>
                 <a:ea typeface="Trebuchet MS" pitchFamily="34" charset="-122"/>
                 <a:cs typeface="Trebuchet MS" pitchFamily="34" charset="-120"/>
               </a:rPr>
-              <a:t>stat</a:t>
-            </a:r>
-            <a:endParaRPr lang="en-US" sz="1300" dirty="0"/>
-          </a:p>
-        </p:txBody>
-      </p:sp>
-      <p:sp>
-        <p:nvSpPr>
-          <p:cNvPr id="25" name="Text 23"/>
-          <p:cNvSpPr/>
-          <p:nvPr/>
-        </p:nvSpPr>
-        <p:spPr>
-          <a:xfrm>
-            <a:off x="6519672" y="2569464"/>
-            <a:ext cx="1828800" cy="201168"/>
-          </a:xfrm>
-          <a:prstGeom prst="rect">
-            <a:avLst/>
-          </a:prstGeom>
-          <a:noFill/>
-          <a:ln/>
-        </p:spPr>
-        <p:txBody>
-          <a:bodyPr wrap="square" lIns="0" tIns="0" rIns="0" bIns="0" rtlCol="0" anchor="t"/>
-          <a:lstStyle/>
-          <a:p>
-            <a:pPr algn="ctr" indent="0" marL="0">
-              <a:buNone/>
-            </a:pPr>
-            <a:r>
-              <a:rPr lang="en-US" sz="850" dirty="0">
-                <a:solidFill>
-                  <a:srgbClr val="475569"/>
-                </a:solidFill>
-                <a:latin typeface="Calibri" pitchFamily="34" charset="0"/>
-                <a:ea typeface="Calibri" pitchFamily="34" charset="-122"/>
-                <a:cs typeface="Calibri" pitchFamily="34" charset="-120"/>
-              </a:rPr>
-              <a:t>keeping steady or still</a:t>
-            </a:r>
-            <a:endParaRPr lang="en-US" sz="850" dirty="0"/>
-          </a:p>
-        </p:txBody>
-      </p:sp>
-      <p:sp>
-        <p:nvSpPr>
-          <p:cNvPr id="26" name="Shape 24"/>
-          <p:cNvSpPr/>
-          <p:nvPr/>
-        </p:nvSpPr>
-        <p:spPr>
-          <a:xfrm>
-            <a:off x="365760" y="3273552"/>
-            <a:ext cx="1371600" cy="658368"/>
-          </a:xfrm>
-          <a:prstGeom prst="rect">
-            <a:avLst>
-              <a:gd name="adj" fmla="val 8333"/>
-            </a:avLst>
-          </a:prstGeom>
-          <a:solidFill>
-            <a:srgbClr val="E2E8F0"/>
-          </a:solidFill>
-          <a:ln w="12700">
-            <a:solidFill>
-              <a:srgbClr val="E2E8F0"/>
-            </a:solidFill>
-            <a:prstDash val="solid"/>
-          </a:ln>
-        </p:spPr>
-      </p:sp>
-      <p:sp>
-        <p:nvSpPr>
-          <p:cNvPr id="27" name="Text 25"/>
-          <p:cNvSpPr/>
-          <p:nvPr/>
-        </p:nvSpPr>
-        <p:spPr>
-          <a:xfrm>
-            <a:off x="365760" y="3273552"/>
-            <a:ext cx="1371600" cy="658368"/>
-          </a:xfrm>
-          <a:prstGeom prst="rect">
-            <a:avLst/>
-          </a:prstGeom>
-          <a:noFill/>
-          <a:ln/>
-        </p:spPr>
-        <p:txBody>
-          <a:bodyPr wrap="square" lIns="0" tIns="0" rIns="0" bIns="0" rtlCol="0" anchor="ctr"/>
-          <a:lstStyle/>
-          <a:p>
-            <a:pPr algn="ctr" indent="0" marL="0">
-              <a:buNone/>
-            </a:pPr>
-            <a:r>
-              <a:rPr lang="en-US" sz="1100" b="1" dirty="0">
-                <a:solidFill>
-                  <a:srgbClr val="475569"/>
-                </a:solidFill>
-                <a:latin typeface="Trebuchet MS" pitchFamily="34" charset="0"/>
-                <a:ea typeface="Trebuchet MS" pitchFamily="34" charset="-122"/>
-                <a:cs typeface="Trebuchet MS" pitchFamily="34" charset="-120"/>
-              </a:rPr>
-              <a:t>Syllables</a:t>
+              <a:t>Phonemes</a:t>
             </a:r>
             <a:endParaRPr lang="en-US" sz="1100" dirty="0"/>
           </a:p>
@@ -13611,74 +13592,8 @@
         </p:nvSpPr>
         <p:spPr>
           <a:xfrm>
-            <a:off x="1874520" y="3273552"/>
-            <a:ext cx="6903720" cy="658368"/>
-          </a:xfrm>
-          <a:prstGeom prst="rect">
-            <a:avLst>
-              <a:gd name="adj" fmla="val 8333"/>
-            </a:avLst>
-          </a:prstGeom>
-          <a:solidFill>
-            <a:srgbClr val="F8FAFC"/>
-          </a:solidFill>
-          <a:ln w="12700">
-            <a:solidFill>
-              <a:srgbClr val="E2E8F0"/>
-            </a:solidFill>
-            <a:prstDash val="dash"/>
-          </a:ln>
-        </p:spPr>
-      </p:sp>
-      <p:sp>
-        <p:nvSpPr>
-          <p:cNvPr id="29" name="Text 27"/>
-          <p:cNvSpPr/>
-          <p:nvPr/>
-        </p:nvSpPr>
-        <p:spPr>
-          <a:xfrm>
-            <a:off x="1874520" y="3273552"/>
-            <a:ext cx="6903720" cy="658368"/>
-          </a:xfrm>
-          <a:prstGeom prst="rect">
-            <a:avLst/>
-          </a:prstGeom>
-          <a:noFill/>
-          <a:ln/>
-        </p:spPr>
-        <p:txBody>
-          <a:bodyPr wrap="square" rtlCol="0" anchor="ctr"/>
-          <a:lstStyle/>
-          <a:p>
-            <a:pPr algn="ctr" indent="0" marL="0">
-              <a:buNone/>
-            </a:pPr>
-            <a:r>
-              <a:rPr lang="en-US" sz="1100" i="1" dirty="0">
-                <a:solidFill>
-                  <a:srgbClr val="CBD5E1"/>
-                </a:solidFill>
-                <a:latin typeface="Calibri" pitchFamily="34" charset="0"/>
-                <a:ea typeface="Calibri" pitchFamily="34" charset="-122"/>
-                <a:cs typeface="Calibri" pitchFamily="34" charset="-120"/>
-              </a:rPr>
-              <a:t>Write here...</a:t>
-            </a:r>
-            <a:endParaRPr lang="en-US" sz="1100" dirty="0"/>
-          </a:p>
-        </p:txBody>
-      </p:sp>
-      <p:sp>
-        <p:nvSpPr>
-          <p:cNvPr id="30" name="Shape 28"/>
-          <p:cNvSpPr/>
-          <p:nvPr/>
-        </p:nvSpPr>
-        <p:spPr>
-          <a:xfrm>
-            <a:off x="365760" y="4096512"/>
-            <a:ext cx="1371600" cy="804672"/>
+            <a:off x="1874520" y="4096512"/>
+            <a:ext cx="6903720" cy="804672"/>
           </a:xfrm>
           <a:prstGeom prst="rect">
             <a:avLst>
@@ -13686,85 +13601,19 @@
             </a:avLst>
           </a:prstGeom>
           <a:solidFill>
-            <a:srgbClr val="E2E8F0"/>
+            <a:srgbClr val="F8FAFC"/>
           </a:solidFill>
           <a:ln w="12700">
             <a:solidFill>
               <a:srgbClr val="E2E8F0"/>
             </a:solidFill>
-            <a:prstDash val="solid"/>
-          </a:ln>
-        </p:spPr>
-      </p:sp>
-      <p:sp>
-        <p:nvSpPr>
-          <p:cNvPr id="31" name="Text 29"/>
-          <p:cNvSpPr/>
-          <p:nvPr/>
-        </p:nvSpPr>
-        <p:spPr>
-          <a:xfrm>
-            <a:off x="365760" y="4096512"/>
-            <a:ext cx="1371600" cy="804672"/>
-          </a:xfrm>
-          <a:prstGeom prst="rect">
-            <a:avLst/>
-          </a:prstGeom>
-          <a:noFill/>
-          <a:ln/>
-        </p:spPr>
-        <p:txBody>
-          <a:bodyPr wrap="square" lIns="0" tIns="0" rIns="0" bIns="0" rtlCol="0" anchor="ctr"/>
-          <a:lstStyle/>
-          <a:p>
-            <a:pPr algn="ctr" indent="0" marL="0">
-              <a:buNone/>
-            </a:pPr>
-            <a:r>
-              <a:rPr lang="en-US" sz="1100" b="1" dirty="0">
-                <a:solidFill>
-                  <a:srgbClr val="475569"/>
-                </a:solidFill>
-                <a:latin typeface="Trebuchet MS" pitchFamily="34" charset="0"/>
-                <a:ea typeface="Trebuchet MS" pitchFamily="34" charset="-122"/>
-                <a:cs typeface="Trebuchet MS" pitchFamily="34" charset="-120"/>
-              </a:rPr>
-              <a:t>Phonemes</a:t>
-            </a:r>
-            <a:endParaRPr lang="en-US" sz="1100" dirty="0"/>
-          </a:p>
-        </p:txBody>
-      </p:sp>
-      <p:sp>
-        <p:nvSpPr>
-          <p:cNvPr id="32" name="Shape 30"/>
-          <p:cNvSpPr/>
-          <p:nvPr/>
-        </p:nvSpPr>
-        <p:spPr>
-          <a:xfrm>
-            <a:off x="1874520" y="4096512"/>
-            <a:ext cx="6903720" cy="804672"/>
-          </a:xfrm>
-          <a:prstGeom prst="rect">
-            <a:avLst>
-              <a:gd name="adj" fmla="val 6818"/>
-            </a:avLst>
-          </a:prstGeom>
-          <a:solidFill>
-            <a:srgbClr val="F8FAFC"/>
-          </a:solidFill>
-          <a:ln w="12700">
-            <a:solidFill>
-              <a:srgbClr val="E2E8F0"/>
-            </a:solidFill>
             <a:prstDash val="dash"/>
           </a:ln>
         </p:spPr>
       </p:sp>
       <p:sp>
         <p:nvSpPr>
-          <p:cNvPr id="33" name="Text 31"/>
+          <p:cNvPr id="29" name="Text 27"/>
           <p:cNvSpPr/>
           <p:nvPr/>
         </p:nvSpPr>
@@ -14226,7 +14075,7 @@
                 <a:ea typeface="Trebuchet MS" pitchFamily="34" charset="-122"/>
                 <a:cs typeface="Trebuchet MS" pitchFamily="34" charset="-120"/>
               </a:rPr>
-              <a:t>thermostat</a:t>
+              <a:t>thermal</a:t>
             </a:r>
             <a:endParaRPr lang="en-US" sz="2800" dirty="0"/>
           </a:p>
@@ -14306,7 +14155,7 @@
         </p:nvSpPr>
         <p:spPr>
           <a:xfrm>
-            <a:off x="2221992" y="2258568"/>
+            <a:off x="2938272" y="2258568"/>
             <a:ext cx="1828800" cy="292608"/>
           </a:xfrm>
           <a:prstGeom prst="rect">
@@ -14340,7 +14189,7 @@
         </p:nvSpPr>
         <p:spPr>
           <a:xfrm>
-            <a:off x="2221992" y="2258568"/>
+            <a:off x="2938272" y="2258568"/>
             <a:ext cx="1828800" cy="292608"/>
           </a:xfrm>
           <a:prstGeom prst="rect">
@@ -14379,7 +14228,7 @@
         </p:nvSpPr>
         <p:spPr>
           <a:xfrm>
-            <a:off x="2221992" y="2569464"/>
+            <a:off x="2938272" y="2569464"/>
             <a:ext cx="1828800" cy="201168"/>
           </a:xfrm>
           <a:prstGeom prst="rect">
@@ -14418,7 +14267,7 @@
         </p:nvSpPr>
         <p:spPr>
           <a:xfrm>
-            <a:off x="4370832" y="2258568"/>
+            <a:off x="5803392" y="2258568"/>
             <a:ext cx="1828800" cy="292608"/>
           </a:xfrm>
           <a:prstGeom prst="rect">
@@ -14452,7 +14301,7 @@
         </p:nvSpPr>
         <p:spPr>
           <a:xfrm>
-            <a:off x="4370832" y="2258568"/>
+            <a:off x="5803392" y="2258568"/>
             <a:ext cx="1828800" cy="292608"/>
           </a:xfrm>
           <a:prstGeom prst="rect">
@@ -14477,7 +14326,7 @@
                 <a:ea typeface="Trebuchet MS" pitchFamily="34" charset="-122"/>
                 <a:cs typeface="Trebuchet MS" pitchFamily="34" charset="-120"/>
               </a:rPr>
-              <a:t>o</a:t>
+              <a:t>al</a:t>
             </a:r>
             <a:endParaRPr lang="en-US" sz="1300" dirty="0"/>
           </a:p>
@@ -14491,7 +14340,7 @@
         </p:nvSpPr>
         <p:spPr>
           <a:xfrm>
-            <a:off x="4370832" y="2569464"/>
+            <a:off x="5803392" y="2569464"/>
             <a:ext cx="1828800" cy="201168"/>
           </a:xfrm>
           <a:prstGeom prst="rect">
@@ -14516,7 +14365,7 @@
                 <a:ea typeface="Calibri" pitchFamily="34" charset="-122"/>
                 <a:cs typeface="Calibri" pitchFamily="34" charset="-120"/>
               </a:rPr>
-              <a:t>connecting vowel</a:t>
+              <a:t>relating to</a:t>
             </a:r>
             <a:endParaRPr lang="en-US" sz="850" dirty="0"/>
           </a:p>
@@ -14524,165 +14373,80 @@
       </p:sp>
       <p:sp>
         <p:nvSpPr>
-          <p:cNvPr id="22" name="Text 20"/>
-          <p:cNvSpPr/>
-          <p:nvPr/>
-        </p:nvSpPr>
-        <p:spPr>
-          <a:xfrm>
-            <a:off x="4370832" y="2752344"/>
-            <a:ext cx="1828800" cy="182880"/>
-          </a:xfrm>
-          <a:prstGeom prst="rect">
-            <a:avLst/>
-          </a:prstGeom>
-          <a:noFill/>
-          <a:ln/>
-        </p:spPr>
-        <p:txBody>
-          <a:bodyPr wrap="square" lIns="0" tIns="0" rIns="0" bIns="0" rtlCol="0" anchor="t"/>
-          <a:lstStyle/>
-          <a:p>
-            <a:pPr algn="ctr" indent="0" marL="0">
-              <a:buNone/>
-            </a:pPr>
-            <a:r>
-              <a:rPr lang="en-US" sz="700" i="1" dirty="0">
-                <a:solidFill>
-                  <a:srgbClr val="94A3B8"/>
-                </a:solidFill>
-                <a:latin typeface="Calibri" pitchFamily="34" charset="0"/>
-                <a:ea typeface="Calibri" pitchFamily="34" charset="-122"/>
-                <a:cs typeface="Calibri" pitchFamily="34" charset="-120"/>
-              </a:rPr>
-              <a:t>links base to suffix</a:t>
-            </a:r>
-            <a:endParaRPr lang="en-US" sz="700" dirty="0"/>
-          </a:p>
-        </p:txBody>
-      </p:sp>
-      <p:sp>
-        <p:nvSpPr>
-          <p:cNvPr id="23" name="Shape 21"/>
-          <p:cNvSpPr/>
-          <p:nvPr/>
-        </p:nvSpPr>
-        <p:spPr>
-          <a:xfrm>
-            <a:off x="6519672" y="2258568"/>
-            <a:ext cx="1828800" cy="292608"/>
+          <p:cNvPr id="22" name="Shape 20"/>
+          <p:cNvSpPr/>
+          <p:nvPr/>
+        </p:nvSpPr>
+        <p:spPr>
+          <a:xfrm>
+            <a:off x="365760" y="3273552"/>
+            <a:ext cx="1371600" cy="658368"/>
           </a:xfrm>
           <a:prstGeom prst="rect">
             <a:avLst>
-              <a:gd name="adj" fmla="val 25000"/>
+              <a:gd name="adj" fmla="val 8333"/>
             </a:avLst>
           </a:prstGeom>
           <a:solidFill>
-            <a:srgbClr val="FCE7F3"/>
-          </a:solidFill>
-          <a:ln w="19050">
-            <a:solidFill>
-              <a:srgbClr val="DB2777"/>
-            </a:solidFill>
-            <a:prstDash val="solid"/>
-          </a:ln>
-          <a:effectLst>
-            <a:outerShdw sx="100000" sy="100000" kx="0" ky="0" algn="bl" rotWithShape="0" blurRad="101600" dist="38100" dir="8100000">
-              <a:srgbClr val="000000">
-                <a:alpha val="12000"/>
-              </a:srgbClr>
-            </a:outerShdw>
-          </a:effectLst>
-        </p:spPr>
-      </p:sp>
-      <p:sp>
-        <p:nvSpPr>
-          <p:cNvPr id="24" name="Text 22"/>
-          <p:cNvSpPr/>
-          <p:nvPr/>
-        </p:nvSpPr>
-        <p:spPr>
-          <a:xfrm>
-            <a:off x="6519672" y="2258568"/>
-            <a:ext cx="1828800" cy="292608"/>
-          </a:xfrm>
-          <a:prstGeom prst="rect">
-            <a:avLst/>
-          </a:prstGeom>
-          <a:noFill/>
-          <a:ln/>
-        </p:spPr>
-        <p:txBody>
-          <a:bodyPr wrap="square" lIns="0" tIns="0" rIns="0" bIns="0" rtlCol="0" anchor="ctr"/>
-          <a:lstStyle/>
-          <a:p>
-            <a:pPr algn="ctr" indent="0" marL="0">
-              <a:buNone/>
-            </a:pPr>
-            <a:r>
-              <a:rPr lang="en-US" sz="1300" b="1" dirty="0">
-                <a:solidFill>
-                  <a:srgbClr val="9D174D"/>
+            <a:srgbClr val="E2E8F0"/>
+          </a:solidFill>
+          <a:ln w="12700">
+            <a:solidFill>
+              <a:srgbClr val="E2E8F0"/>
+            </a:solidFill>
+            <a:prstDash val="solid"/>
+          </a:ln>
+        </p:spPr>
+      </p:sp>
+      <p:sp>
+        <p:nvSpPr>
+          <p:cNvPr id="23" name="Text 21"/>
+          <p:cNvSpPr/>
+          <p:nvPr/>
+        </p:nvSpPr>
+        <p:spPr>
+          <a:xfrm>
+            <a:off x="365760" y="3273552"/>
+            <a:ext cx="1371600" cy="658368"/>
+          </a:xfrm>
+          <a:prstGeom prst="rect">
+            <a:avLst/>
+          </a:prstGeom>
+          <a:noFill/>
+          <a:ln/>
+        </p:spPr>
+        <p:txBody>
+          <a:bodyPr wrap="square" lIns="0" tIns="0" rIns="0" bIns="0" rtlCol="0" anchor="ctr"/>
+          <a:lstStyle/>
+          <a:p>
+            <a:pPr algn="ctr" indent="0" marL="0">
+              <a:buNone/>
+            </a:pPr>
+            <a:r>
+              <a:rPr lang="en-US" sz="1100" b="1" dirty="0">
+                <a:solidFill>
+                  <a:srgbClr val="475569"/>
                 </a:solidFill>
                 <a:latin typeface="Trebuchet MS" pitchFamily="34" charset="0"/>
                 <a:ea typeface="Trebuchet MS" pitchFamily="34" charset="-122"/>
                 <a:cs typeface="Trebuchet MS" pitchFamily="34" charset="-120"/>
               </a:rPr>
-              <a:t>stat</a:t>
-            </a:r>
-            <a:endParaRPr lang="en-US" sz="1300" dirty="0"/>
-          </a:p>
-        </p:txBody>
-      </p:sp>
-      <p:sp>
-        <p:nvSpPr>
-          <p:cNvPr id="25" name="Text 23"/>
-          <p:cNvSpPr/>
-          <p:nvPr/>
-        </p:nvSpPr>
-        <p:spPr>
-          <a:xfrm>
-            <a:off x="6519672" y="2569464"/>
-            <a:ext cx="1828800" cy="201168"/>
-          </a:xfrm>
-          <a:prstGeom prst="rect">
-            <a:avLst/>
-          </a:prstGeom>
-          <a:noFill/>
-          <a:ln/>
-        </p:spPr>
-        <p:txBody>
-          <a:bodyPr wrap="square" lIns="0" tIns="0" rIns="0" bIns="0" rtlCol="0" anchor="t"/>
-          <a:lstStyle/>
-          <a:p>
-            <a:pPr algn="ctr" indent="0" marL="0">
-              <a:buNone/>
-            </a:pPr>
-            <a:r>
-              <a:rPr lang="en-US" sz="850" dirty="0">
-                <a:solidFill>
-                  <a:srgbClr val="475569"/>
-                </a:solidFill>
-                <a:latin typeface="Calibri" pitchFamily="34" charset="0"/>
-                <a:ea typeface="Calibri" pitchFamily="34" charset="-122"/>
-                <a:cs typeface="Calibri" pitchFamily="34" charset="-120"/>
-              </a:rPr>
-              <a:t>keeping steady or still</a:t>
-            </a:r>
-            <a:endParaRPr lang="en-US" sz="850" dirty="0"/>
-          </a:p>
-        </p:txBody>
-      </p:sp>
-      <p:sp>
-        <p:nvSpPr>
-          <p:cNvPr id="26" name="Shape 24"/>
-          <p:cNvSpPr/>
-          <p:nvPr/>
-        </p:nvSpPr>
-        <p:spPr>
-          <a:xfrm>
-            <a:off x="365760" y="3273552"/>
-            <a:ext cx="1371600" cy="658368"/>
+              <a:t>Syllables</a:t>
+            </a:r>
+            <a:endParaRPr lang="en-US" sz="1100" dirty="0"/>
+          </a:p>
+        </p:txBody>
+      </p:sp>
+      <p:sp>
+        <p:nvSpPr>
+          <p:cNvPr id="24" name="Shape 22"/>
+          <p:cNvSpPr/>
+          <p:nvPr/>
+        </p:nvSpPr>
+        <p:spPr>
+          <a:xfrm>
+            <a:off x="1874520" y="3273552"/>
+            <a:ext cx="6903720" cy="658368"/>
           </a:xfrm>
           <a:prstGeom prst="rect">
             <a:avLst>
@@ -14690,52 +14454,118 @@
             </a:avLst>
           </a:prstGeom>
           <a:solidFill>
-            <a:srgbClr val="E2E8F0"/>
-          </a:solidFill>
-          <a:ln w="12700">
-            <a:solidFill>
-              <a:srgbClr val="E2E8F0"/>
-            </a:solidFill>
-            <a:prstDash val="solid"/>
-          </a:ln>
-        </p:spPr>
-      </p:sp>
-      <p:sp>
-        <p:nvSpPr>
-          <p:cNvPr id="27" name="Text 25"/>
-          <p:cNvSpPr/>
-          <p:nvPr/>
-        </p:nvSpPr>
-        <p:spPr>
-          <a:xfrm>
-            <a:off x="365760" y="3273552"/>
-            <a:ext cx="1371600" cy="658368"/>
-          </a:xfrm>
-          <a:prstGeom prst="rect">
-            <a:avLst/>
-          </a:prstGeom>
-          <a:noFill/>
-          <a:ln/>
-        </p:spPr>
-        <p:txBody>
-          <a:bodyPr wrap="square" lIns="0" tIns="0" rIns="0" bIns="0" rtlCol="0" anchor="ctr"/>
-          <a:lstStyle/>
-          <a:p>
-            <a:pPr algn="ctr" indent="0" marL="0">
-              <a:buNone/>
-            </a:pPr>
-            <a:r>
-              <a:rPr lang="en-US" sz="1100" b="1" dirty="0">
-                <a:solidFill>
-                  <a:srgbClr val="475569"/>
+            <a:srgbClr val="CCFBF1"/>
+          </a:solidFill>
+          <a:ln w="12700">
+            <a:solidFill>
+              <a:srgbClr val="0D9488"/>
+            </a:solidFill>
+            <a:prstDash val="solid"/>
+          </a:ln>
+        </p:spPr>
+      </p:sp>
+      <p:sp>
+        <p:nvSpPr>
+          <p:cNvPr id="25" name="Shape 23"/>
+          <p:cNvSpPr/>
+          <p:nvPr/>
+        </p:nvSpPr>
+        <p:spPr>
+          <a:xfrm>
+            <a:off x="2999232" y="3364992"/>
+            <a:ext cx="1645920" cy="475488"/>
+          </a:xfrm>
+          <a:prstGeom prst="rect">
+            <a:avLst>
+              <a:gd name="adj" fmla="val 9615"/>
+            </a:avLst>
+          </a:prstGeom>
+          <a:solidFill>
+            <a:srgbClr val="FFFFFF"/>
+          </a:solidFill>
+          <a:ln w="12700">
+            <a:solidFill>
+              <a:srgbClr val="0D9488"/>
+            </a:solidFill>
+            <a:prstDash val="solid"/>
+          </a:ln>
+        </p:spPr>
+      </p:sp>
+      <p:sp>
+        <p:nvSpPr>
+          <p:cNvPr id="26" name="Text 24"/>
+          <p:cNvSpPr/>
+          <p:nvPr/>
+        </p:nvSpPr>
+        <p:spPr>
+          <a:xfrm>
+            <a:off x="2999232" y="3364992"/>
+            <a:ext cx="1645920" cy="475488"/>
+          </a:xfrm>
+          <a:prstGeom prst="rect">
+            <a:avLst/>
+          </a:prstGeom>
+          <a:noFill/>
+          <a:ln/>
+        </p:spPr>
+        <p:txBody>
+          <a:bodyPr wrap="square" lIns="0" tIns="0" rIns="0" bIns="0" rtlCol="0" anchor="ctr"/>
+          <a:lstStyle/>
+          <a:p>
+            <a:pPr algn="ctr" indent="0" marL="0">
+              <a:buNone/>
+            </a:pPr>
+            <a:r>
+              <a:rPr lang="en-US" sz="1400" b="1" dirty="0">
+                <a:solidFill>
+                  <a:srgbClr val="0D9488"/>
                 </a:solidFill>
                 <a:latin typeface="Trebuchet MS" pitchFamily="34" charset="0"/>
                 <a:ea typeface="Trebuchet MS" pitchFamily="34" charset="-122"/>
                 <a:cs typeface="Trebuchet MS" pitchFamily="34" charset="-120"/>
               </a:rPr>
-              <a:t>Syllables</a:t>
-            </a:r>
-            <a:endParaRPr lang="en-US" sz="1100" dirty="0"/>
+              <a:t>ther</a:t>
+            </a:r>
+            <a:endParaRPr lang="en-US" sz="1400" dirty="0"/>
+          </a:p>
+        </p:txBody>
+      </p:sp>
+      <p:sp>
+        <p:nvSpPr>
+          <p:cNvPr id="27" name="Text 25"/>
+          <p:cNvSpPr/>
+          <p:nvPr/>
+        </p:nvSpPr>
+        <p:spPr>
+          <a:xfrm>
+            <a:off x="4645152" y="3364992"/>
+            <a:ext cx="1097280" cy="475488"/>
+          </a:xfrm>
+          <a:prstGeom prst="rect">
+            <a:avLst/>
+          </a:prstGeom>
+          <a:noFill/>
+          <a:ln/>
+        </p:spPr>
+        <p:txBody>
+          <a:bodyPr wrap="square" lIns="0" tIns="0" rIns="0" bIns="0" rtlCol="0" anchor="ctr"/>
+          <a:lstStyle/>
+          <a:p>
+            <a:pPr algn="ctr" indent="0" marL="0">
+              <a:buNone/>
+            </a:pPr>
+            <a:r>
+              <a:rPr lang="en-US" sz="1600" b="1" dirty="0">
+                <a:solidFill>
+                  <a:srgbClr val="0D9488"/>
+                </a:solidFill>
+                <a:latin typeface="Trebuchet MS" pitchFamily="34" charset="0"/>
+                <a:ea typeface="Trebuchet MS" pitchFamily="34" charset="-122"/>
+                <a:cs typeface="Trebuchet MS" pitchFamily="34" charset="-120"/>
+              </a:rPr>
+              <a:t>·</a:t>
+            </a:r>
+            <a:endParaRPr lang="en-US" sz="1600" dirty="0"/>
           </a:p>
         </p:txBody>
       </p:sp>
@@ -14747,34 +14577,7 @@
         </p:nvSpPr>
         <p:spPr>
           <a:xfrm>
-            <a:off x="1874520" y="3273552"/>
-            <a:ext cx="6903720" cy="658368"/>
-          </a:xfrm>
-          <a:prstGeom prst="rect">
-            <a:avLst>
-              <a:gd name="adj" fmla="val 8333"/>
-            </a:avLst>
-          </a:prstGeom>
-          <a:solidFill>
-            <a:srgbClr val="CCFBF1"/>
-          </a:solidFill>
-          <a:ln w="12700">
-            <a:solidFill>
-              <a:srgbClr val="0D9488"/>
-            </a:solidFill>
-            <a:prstDash val="solid"/>
-          </a:ln>
-        </p:spPr>
-      </p:sp>
-      <p:sp>
-        <p:nvSpPr>
-          <p:cNvPr id="29" name="Shape 27"/>
-          <p:cNvSpPr/>
-          <p:nvPr/>
-        </p:nvSpPr>
-        <p:spPr>
-          <a:xfrm>
-            <a:off x="2313432" y="3364992"/>
+            <a:off x="5742432" y="3364992"/>
             <a:ext cx="1645920" cy="475488"/>
           </a:xfrm>
           <a:prstGeom prst="rect">
@@ -14795,13 +14598,13 @@
       </p:sp>
       <p:sp>
         <p:nvSpPr>
-          <p:cNvPr id="30" name="Text 28"/>
-          <p:cNvSpPr/>
-          <p:nvPr/>
-        </p:nvSpPr>
-        <p:spPr>
-          <a:xfrm>
-            <a:off x="2313432" y="3364992"/>
+          <p:cNvPr id="29" name="Text 27"/>
+          <p:cNvSpPr/>
+          <p:nvPr/>
+        </p:nvSpPr>
+        <p:spPr>
+          <a:xfrm>
+            <a:off x="5742432" y="3364992"/>
             <a:ext cx="1645920" cy="475488"/>
           </a:xfrm>
           <a:prstGeom prst="rect">
@@ -14826,7 +14629,7 @@
                 <a:ea typeface="Trebuchet MS" pitchFamily="34" charset="-122"/>
                 <a:cs typeface="Trebuchet MS" pitchFamily="34" charset="-120"/>
               </a:rPr>
-              <a:t>ther</a:t>
+              <a:t>mal</a:t>
             </a:r>
             <a:endParaRPr lang="en-US" sz="1400" dirty="0"/>
           </a:p>
@@ -14834,40 +14637,67 @@
       </p:sp>
       <p:sp>
         <p:nvSpPr>
+          <p:cNvPr id="30" name="Shape 28"/>
+          <p:cNvSpPr/>
+          <p:nvPr/>
+        </p:nvSpPr>
+        <p:spPr>
+          <a:xfrm>
+            <a:off x="365760" y="4096512"/>
+            <a:ext cx="1371600" cy="804672"/>
+          </a:xfrm>
+          <a:prstGeom prst="rect">
+            <a:avLst>
+              <a:gd name="adj" fmla="val 6818"/>
+            </a:avLst>
+          </a:prstGeom>
+          <a:solidFill>
+            <a:srgbClr val="E2E8F0"/>
+          </a:solidFill>
+          <a:ln w="12700">
+            <a:solidFill>
+              <a:srgbClr val="E2E8F0"/>
+            </a:solidFill>
+            <a:prstDash val="solid"/>
+          </a:ln>
+        </p:spPr>
+      </p:sp>
+      <p:sp>
+        <p:nvSpPr>
           <p:cNvPr id="31" name="Text 29"/>
           <p:cNvSpPr/>
           <p:nvPr/>
         </p:nvSpPr>
         <p:spPr>
           <a:xfrm>
-            <a:off x="3959352" y="3364992"/>
-            <a:ext cx="411480" cy="475488"/>
-          </a:xfrm>
-          <a:prstGeom prst="rect">
-            <a:avLst/>
-          </a:prstGeom>
-          <a:noFill/>
-          <a:ln/>
-        </p:spPr>
-        <p:txBody>
-          <a:bodyPr wrap="square" lIns="0" tIns="0" rIns="0" bIns="0" rtlCol="0" anchor="ctr"/>
-          <a:lstStyle/>
-          <a:p>
-            <a:pPr algn="ctr" indent="0" marL="0">
-              <a:buNone/>
-            </a:pPr>
-            <a:r>
-              <a:rPr lang="en-US" sz="1600" b="1" dirty="0">
-                <a:solidFill>
-                  <a:srgbClr val="0D9488"/>
+            <a:off x="365760" y="4096512"/>
+            <a:ext cx="1371600" cy="804672"/>
+          </a:xfrm>
+          <a:prstGeom prst="rect">
+            <a:avLst/>
+          </a:prstGeom>
+          <a:noFill/>
+          <a:ln/>
+        </p:spPr>
+        <p:txBody>
+          <a:bodyPr wrap="square" lIns="0" tIns="0" rIns="0" bIns="0" rtlCol="0" anchor="ctr"/>
+          <a:lstStyle/>
+          <a:p>
+            <a:pPr algn="ctr" indent="0" marL="0">
+              <a:buNone/>
+            </a:pPr>
+            <a:r>
+              <a:rPr lang="en-US" sz="1100" b="1" dirty="0">
+                <a:solidFill>
+                  <a:srgbClr val="475569"/>
                 </a:solidFill>
                 <a:latin typeface="Trebuchet MS" pitchFamily="34" charset="0"/>
                 <a:ea typeface="Trebuchet MS" pitchFamily="34" charset="-122"/>
                 <a:cs typeface="Trebuchet MS" pitchFamily="34" charset="-120"/>
               </a:rPr>
-              <a:t>·</a:t>
-            </a:r>
-            <a:endParaRPr lang="en-US" sz="1600" dirty="0"/>
+              <a:t>Phonemes</a:t>
+            </a:r>
+            <a:endParaRPr lang="en-US" sz="1100" dirty="0"/>
           </a:p>
         </p:txBody>
       </p:sp>
@@ -14879,179 +14709,8 @@
         </p:nvSpPr>
         <p:spPr>
           <a:xfrm>
-            <a:off x="4370832" y="3364992"/>
-            <a:ext cx="1645920" cy="475488"/>
-          </a:xfrm>
-          <a:prstGeom prst="rect">
-            <a:avLst>
-              <a:gd name="adj" fmla="val 9615"/>
-            </a:avLst>
-          </a:prstGeom>
-          <a:solidFill>
-            <a:srgbClr val="FFFFFF"/>
-          </a:solidFill>
-          <a:ln w="12700">
-            <a:solidFill>
-              <a:srgbClr val="0D9488"/>
-            </a:solidFill>
-            <a:prstDash val="solid"/>
-          </a:ln>
-        </p:spPr>
-      </p:sp>
-      <p:sp>
-        <p:nvSpPr>
-          <p:cNvPr id="33" name="Text 31"/>
-          <p:cNvSpPr/>
-          <p:nvPr/>
-        </p:nvSpPr>
-        <p:spPr>
-          <a:xfrm>
-            <a:off x="4370832" y="3364992"/>
-            <a:ext cx="1645920" cy="475488"/>
-          </a:xfrm>
-          <a:prstGeom prst="rect">
-            <a:avLst/>
-          </a:prstGeom>
-          <a:noFill/>
-          <a:ln/>
-        </p:spPr>
-        <p:txBody>
-          <a:bodyPr wrap="square" lIns="0" tIns="0" rIns="0" bIns="0" rtlCol="0" anchor="ctr"/>
-          <a:lstStyle/>
-          <a:p>
-            <a:pPr algn="ctr" indent="0" marL="0">
-              <a:buNone/>
-            </a:pPr>
-            <a:r>
-              <a:rPr lang="en-US" sz="1400" b="1" dirty="0">
-                <a:solidFill>
-                  <a:srgbClr val="0D9488"/>
-                </a:solidFill>
-                <a:latin typeface="Trebuchet MS" pitchFamily="34" charset="0"/>
-                <a:ea typeface="Trebuchet MS" pitchFamily="34" charset="-122"/>
-                <a:cs typeface="Trebuchet MS" pitchFamily="34" charset="-120"/>
-              </a:rPr>
-              <a:t>mo</a:t>
-            </a:r>
-            <a:endParaRPr lang="en-US" sz="1400" dirty="0"/>
-          </a:p>
-        </p:txBody>
-      </p:sp>
-      <p:sp>
-        <p:nvSpPr>
-          <p:cNvPr id="34" name="Text 32"/>
-          <p:cNvSpPr/>
-          <p:nvPr/>
-        </p:nvSpPr>
-        <p:spPr>
-          <a:xfrm>
-            <a:off x="6016752" y="3364992"/>
-            <a:ext cx="411480" cy="475488"/>
-          </a:xfrm>
-          <a:prstGeom prst="rect">
-            <a:avLst/>
-          </a:prstGeom>
-          <a:noFill/>
-          <a:ln/>
-        </p:spPr>
-        <p:txBody>
-          <a:bodyPr wrap="square" lIns="0" tIns="0" rIns="0" bIns="0" rtlCol="0" anchor="ctr"/>
-          <a:lstStyle/>
-          <a:p>
-            <a:pPr algn="ctr" indent="0" marL="0">
-              <a:buNone/>
-            </a:pPr>
-            <a:r>
-              <a:rPr lang="en-US" sz="1600" b="1" dirty="0">
-                <a:solidFill>
-                  <a:srgbClr val="0D9488"/>
-                </a:solidFill>
-                <a:latin typeface="Trebuchet MS" pitchFamily="34" charset="0"/>
-                <a:ea typeface="Trebuchet MS" pitchFamily="34" charset="-122"/>
-                <a:cs typeface="Trebuchet MS" pitchFamily="34" charset="-120"/>
-              </a:rPr>
-              <a:t>·</a:t>
-            </a:r>
-            <a:endParaRPr lang="en-US" sz="1600" dirty="0"/>
-          </a:p>
-        </p:txBody>
-      </p:sp>
-      <p:sp>
-        <p:nvSpPr>
-          <p:cNvPr id="35" name="Shape 33"/>
-          <p:cNvSpPr/>
-          <p:nvPr/>
-        </p:nvSpPr>
-        <p:spPr>
-          <a:xfrm>
-            <a:off x="6428232" y="3364992"/>
-            <a:ext cx="1645920" cy="475488"/>
-          </a:xfrm>
-          <a:prstGeom prst="rect">
-            <a:avLst>
-              <a:gd name="adj" fmla="val 9615"/>
-            </a:avLst>
-          </a:prstGeom>
-          <a:solidFill>
-            <a:srgbClr val="FFFFFF"/>
-          </a:solidFill>
-          <a:ln w="12700">
-            <a:solidFill>
-              <a:srgbClr val="0D9488"/>
-            </a:solidFill>
-            <a:prstDash val="solid"/>
-          </a:ln>
-        </p:spPr>
-      </p:sp>
-      <p:sp>
-        <p:nvSpPr>
-          <p:cNvPr id="36" name="Text 34"/>
-          <p:cNvSpPr/>
-          <p:nvPr/>
-        </p:nvSpPr>
-        <p:spPr>
-          <a:xfrm>
-            <a:off x="6428232" y="3364992"/>
-            <a:ext cx="1645920" cy="475488"/>
-          </a:xfrm>
-          <a:prstGeom prst="rect">
-            <a:avLst/>
-          </a:prstGeom>
-          <a:noFill/>
-          <a:ln/>
-        </p:spPr>
-        <p:txBody>
-          <a:bodyPr wrap="square" lIns="0" tIns="0" rIns="0" bIns="0" rtlCol="0" anchor="ctr"/>
-          <a:lstStyle/>
-          <a:p>
-            <a:pPr algn="ctr" indent="0" marL="0">
-              <a:buNone/>
-            </a:pPr>
-            <a:r>
-              <a:rPr lang="en-US" sz="1400" b="1" dirty="0">
-                <a:solidFill>
-                  <a:srgbClr val="0D9488"/>
-                </a:solidFill>
-                <a:latin typeface="Trebuchet MS" pitchFamily="34" charset="0"/>
-                <a:ea typeface="Trebuchet MS" pitchFamily="34" charset="-122"/>
-                <a:cs typeface="Trebuchet MS" pitchFamily="34" charset="-120"/>
-              </a:rPr>
-              <a:t>stat</a:t>
-            </a:r>
-            <a:endParaRPr lang="en-US" sz="1400" dirty="0"/>
-          </a:p>
-        </p:txBody>
-      </p:sp>
-      <p:sp>
-        <p:nvSpPr>
-          <p:cNvPr id="37" name="Shape 35"/>
-          <p:cNvSpPr/>
-          <p:nvPr/>
-        </p:nvSpPr>
-        <p:spPr>
-          <a:xfrm>
-            <a:off x="365760" y="4096512"/>
-            <a:ext cx="1371600" cy="804672"/>
+            <a:off x="1874520" y="4096512"/>
+            <a:ext cx="6903720" cy="804672"/>
           </a:xfrm>
           <a:prstGeom prst="rect">
             <a:avLst>
@@ -15059,85 +14718,19 @@
             </a:avLst>
           </a:prstGeom>
           <a:solidFill>
-            <a:srgbClr val="E2E8F0"/>
+            <a:srgbClr val="F8FAFC"/>
           </a:solidFill>
           <a:ln w="12700">
             <a:solidFill>
               <a:srgbClr val="E2E8F0"/>
             </a:solidFill>
-            <a:prstDash val="solid"/>
-          </a:ln>
-        </p:spPr>
-      </p:sp>
-      <p:sp>
-        <p:nvSpPr>
-          <p:cNvPr id="38" name="Text 36"/>
-          <p:cNvSpPr/>
-          <p:nvPr/>
-        </p:nvSpPr>
-        <p:spPr>
-          <a:xfrm>
-            <a:off x="365760" y="4096512"/>
-            <a:ext cx="1371600" cy="804672"/>
-          </a:xfrm>
-          <a:prstGeom prst="rect">
-            <a:avLst/>
-          </a:prstGeom>
-          <a:noFill/>
-          <a:ln/>
-        </p:spPr>
-        <p:txBody>
-          <a:bodyPr wrap="square" lIns="0" tIns="0" rIns="0" bIns="0" rtlCol="0" anchor="ctr"/>
-          <a:lstStyle/>
-          <a:p>
-            <a:pPr algn="ctr" indent="0" marL="0">
-              <a:buNone/>
-            </a:pPr>
-            <a:r>
-              <a:rPr lang="en-US" sz="1100" b="1" dirty="0">
-                <a:solidFill>
-                  <a:srgbClr val="475569"/>
-                </a:solidFill>
-                <a:latin typeface="Trebuchet MS" pitchFamily="34" charset="0"/>
-                <a:ea typeface="Trebuchet MS" pitchFamily="34" charset="-122"/>
-                <a:cs typeface="Trebuchet MS" pitchFamily="34" charset="-120"/>
-              </a:rPr>
-              <a:t>Phonemes</a:t>
-            </a:r>
-            <a:endParaRPr lang="en-US" sz="1100" dirty="0"/>
-          </a:p>
-        </p:txBody>
-      </p:sp>
-      <p:sp>
-        <p:nvSpPr>
-          <p:cNvPr id="39" name="Shape 37"/>
-          <p:cNvSpPr/>
-          <p:nvPr/>
-        </p:nvSpPr>
-        <p:spPr>
-          <a:xfrm>
-            <a:off x="1874520" y="4096512"/>
-            <a:ext cx="6903720" cy="804672"/>
-          </a:xfrm>
-          <a:prstGeom prst="rect">
-            <a:avLst>
-              <a:gd name="adj" fmla="val 6818"/>
-            </a:avLst>
-          </a:prstGeom>
-          <a:solidFill>
-            <a:srgbClr val="F8FAFC"/>
-          </a:solidFill>
-          <a:ln w="12700">
-            <a:solidFill>
-              <a:srgbClr val="E2E8F0"/>
-            </a:solidFill>
             <a:prstDash val="dash"/>
           </a:ln>
         </p:spPr>
       </p:sp>
       <p:sp>
         <p:nvSpPr>
-          <p:cNvPr id="40" name="Text 38"/>
+          <p:cNvPr id="33" name="Text 31"/>
           <p:cNvSpPr/>
           <p:nvPr/>
         </p:nvSpPr>
@@ -15864,7 +15457,7 @@
                 <a:ea typeface="Trebuchet MS" pitchFamily="34" charset="-122"/>
                 <a:cs typeface="Trebuchet MS" pitchFamily="34" charset="-120"/>
               </a:rPr>
-              <a:t>thermostat</a:t>
+              <a:t>thermal</a:t>
             </a:r>
             <a:endParaRPr lang="en-US" sz="2800" dirty="0"/>
           </a:p>
@@ -15944,7 +15537,7 @@
         </p:nvSpPr>
         <p:spPr>
           <a:xfrm>
-            <a:off x="2221992" y="2258568"/>
+            <a:off x="2938272" y="2258568"/>
             <a:ext cx="1828800" cy="292608"/>
           </a:xfrm>
           <a:prstGeom prst="rect">
@@ -15978,7 +15571,7 @@
         </p:nvSpPr>
         <p:spPr>
           <a:xfrm>
-            <a:off x="2221992" y="2258568"/>
+            <a:off x="2938272" y="2258568"/>
             <a:ext cx="1828800" cy="292608"/>
           </a:xfrm>
           <a:prstGeom prst="rect">
@@ -16017,7 +15610,7 @@
         </p:nvSpPr>
         <p:spPr>
           <a:xfrm>
-            <a:off x="2221992" y="2569464"/>
+            <a:off x="2938272" y="2569464"/>
             <a:ext cx="1828800" cy="201168"/>
           </a:xfrm>
           <a:prstGeom prst="rect">
@@ -16056,7 +15649,7 @@
         </p:nvSpPr>
         <p:spPr>
           <a:xfrm>
-            <a:off x="4370832" y="2258568"/>
+            <a:off x="5803392" y="2258568"/>
             <a:ext cx="1828800" cy="292608"/>
           </a:xfrm>
           <a:prstGeom prst="rect">
@@ -16090,7 +15683,7 @@
         </p:nvSpPr>
         <p:spPr>
           <a:xfrm>
-            <a:off x="4370832" y="2258568"/>
+            <a:off x="5803392" y="2258568"/>
             <a:ext cx="1828800" cy="292608"/>
           </a:xfrm>
           <a:prstGeom prst="rect">
@@ -16115,7 +15708,7 @@
                 <a:ea typeface="Trebuchet MS" pitchFamily="34" charset="-122"/>
                 <a:cs typeface="Trebuchet MS" pitchFamily="34" charset="-120"/>
               </a:rPr>
-              <a:t>o</a:t>
+              <a:t>al</a:t>
             </a:r>
             <a:endParaRPr lang="en-US" sz="1300" dirty="0"/>
           </a:p>
@@ -16129,7 +15722,7 @@
         </p:nvSpPr>
         <p:spPr>
           <a:xfrm>
-            <a:off x="4370832" y="2569464"/>
+            <a:off x="5803392" y="2569464"/>
             <a:ext cx="1828800" cy="201168"/>
           </a:xfrm>
           <a:prstGeom prst="rect">
@@ -16154,7 +15747,7 @@
                 <a:ea typeface="Calibri" pitchFamily="34" charset="-122"/>
                 <a:cs typeface="Calibri" pitchFamily="34" charset="-120"/>
               </a:rPr>
-              <a:t>connecting vowel</a:t>
+              <a:t>relating to</a:t>
             </a:r>
             <a:endParaRPr lang="en-US" sz="850" dirty="0"/>
           </a:p>
@@ -16162,165 +15755,80 @@
       </p:sp>
       <p:sp>
         <p:nvSpPr>
-          <p:cNvPr id="22" name="Text 20"/>
-          <p:cNvSpPr/>
-          <p:nvPr/>
-        </p:nvSpPr>
-        <p:spPr>
-          <a:xfrm>
-            <a:off x="4370832" y="2752344"/>
-            <a:ext cx="1828800" cy="182880"/>
-          </a:xfrm>
-          <a:prstGeom prst="rect">
-            <a:avLst/>
-          </a:prstGeom>
-          <a:noFill/>
-          <a:ln/>
-        </p:spPr>
-        <p:txBody>
-          <a:bodyPr wrap="square" lIns="0" tIns="0" rIns="0" bIns="0" rtlCol="0" anchor="t"/>
-          <a:lstStyle/>
-          <a:p>
-            <a:pPr algn="ctr" indent="0" marL="0">
-              <a:buNone/>
-            </a:pPr>
-            <a:r>
-              <a:rPr lang="en-US" sz="700" i="1" dirty="0">
-                <a:solidFill>
-                  <a:srgbClr val="94A3B8"/>
-                </a:solidFill>
-                <a:latin typeface="Calibri" pitchFamily="34" charset="0"/>
-                <a:ea typeface="Calibri" pitchFamily="34" charset="-122"/>
-                <a:cs typeface="Calibri" pitchFamily="34" charset="-120"/>
-              </a:rPr>
-              <a:t>links base to suffix</a:t>
-            </a:r>
-            <a:endParaRPr lang="en-US" sz="700" dirty="0"/>
-          </a:p>
-        </p:txBody>
-      </p:sp>
-      <p:sp>
-        <p:nvSpPr>
-          <p:cNvPr id="23" name="Shape 21"/>
-          <p:cNvSpPr/>
-          <p:nvPr/>
-        </p:nvSpPr>
-        <p:spPr>
-          <a:xfrm>
-            <a:off x="6519672" y="2258568"/>
-            <a:ext cx="1828800" cy="292608"/>
+          <p:cNvPr id="22" name="Shape 20"/>
+          <p:cNvSpPr/>
+          <p:nvPr/>
+        </p:nvSpPr>
+        <p:spPr>
+          <a:xfrm>
+            <a:off x="365760" y="3273552"/>
+            <a:ext cx="1371600" cy="658368"/>
           </a:xfrm>
           <a:prstGeom prst="rect">
             <a:avLst>
-              <a:gd name="adj" fmla="val 25000"/>
+              <a:gd name="adj" fmla="val 8333"/>
             </a:avLst>
           </a:prstGeom>
           <a:solidFill>
-            <a:srgbClr val="FCE7F3"/>
-          </a:solidFill>
-          <a:ln w="19050">
-            <a:solidFill>
-              <a:srgbClr val="DB2777"/>
-            </a:solidFill>
-            <a:prstDash val="solid"/>
-          </a:ln>
-          <a:effectLst>
-            <a:outerShdw sx="100000" sy="100000" kx="0" ky="0" algn="bl" rotWithShape="0" blurRad="101600" dist="38100" dir="8100000">
-              <a:srgbClr val="000000">
-                <a:alpha val="12000"/>
-              </a:srgbClr>
-            </a:outerShdw>
-          </a:effectLst>
-        </p:spPr>
-      </p:sp>
-      <p:sp>
-        <p:nvSpPr>
-          <p:cNvPr id="24" name="Text 22"/>
-          <p:cNvSpPr/>
-          <p:nvPr/>
-        </p:nvSpPr>
-        <p:spPr>
-          <a:xfrm>
-            <a:off x="6519672" y="2258568"/>
-            <a:ext cx="1828800" cy="292608"/>
-          </a:xfrm>
-          <a:prstGeom prst="rect">
-            <a:avLst/>
-          </a:prstGeom>
-          <a:noFill/>
-          <a:ln/>
-        </p:spPr>
-        <p:txBody>
-          <a:bodyPr wrap="square" lIns="0" tIns="0" rIns="0" bIns="0" rtlCol="0" anchor="ctr"/>
-          <a:lstStyle/>
-          <a:p>
-            <a:pPr algn="ctr" indent="0" marL="0">
-              <a:buNone/>
-            </a:pPr>
-            <a:r>
-              <a:rPr lang="en-US" sz="1300" b="1" dirty="0">
-                <a:solidFill>
-                  <a:srgbClr val="9D174D"/>
+            <a:srgbClr val="E2E8F0"/>
+          </a:solidFill>
+          <a:ln w="12700">
+            <a:solidFill>
+              <a:srgbClr val="E2E8F0"/>
+            </a:solidFill>
+            <a:prstDash val="solid"/>
+          </a:ln>
+        </p:spPr>
+      </p:sp>
+      <p:sp>
+        <p:nvSpPr>
+          <p:cNvPr id="23" name="Text 21"/>
+          <p:cNvSpPr/>
+          <p:nvPr/>
+        </p:nvSpPr>
+        <p:spPr>
+          <a:xfrm>
+            <a:off x="365760" y="3273552"/>
+            <a:ext cx="1371600" cy="658368"/>
+          </a:xfrm>
+          <a:prstGeom prst="rect">
+            <a:avLst/>
+          </a:prstGeom>
+          <a:noFill/>
+          <a:ln/>
+        </p:spPr>
+        <p:txBody>
+          <a:bodyPr wrap="square" lIns="0" tIns="0" rIns="0" bIns="0" rtlCol="0" anchor="ctr"/>
+          <a:lstStyle/>
+          <a:p>
+            <a:pPr algn="ctr" indent="0" marL="0">
+              <a:buNone/>
+            </a:pPr>
+            <a:r>
+              <a:rPr lang="en-US" sz="1100" b="1" dirty="0">
+                <a:solidFill>
+                  <a:srgbClr val="475569"/>
                 </a:solidFill>
                 <a:latin typeface="Trebuchet MS" pitchFamily="34" charset="0"/>
                 <a:ea typeface="Trebuchet MS" pitchFamily="34" charset="-122"/>
                 <a:cs typeface="Trebuchet MS" pitchFamily="34" charset="-120"/>
               </a:rPr>
-              <a:t>stat</a:t>
-            </a:r>
-            <a:endParaRPr lang="en-US" sz="1300" dirty="0"/>
-          </a:p>
-        </p:txBody>
-      </p:sp>
-      <p:sp>
-        <p:nvSpPr>
-          <p:cNvPr id="25" name="Text 23"/>
-          <p:cNvSpPr/>
-          <p:nvPr/>
-        </p:nvSpPr>
-        <p:spPr>
-          <a:xfrm>
-            <a:off x="6519672" y="2569464"/>
-            <a:ext cx="1828800" cy="201168"/>
-          </a:xfrm>
-          <a:prstGeom prst="rect">
-            <a:avLst/>
-          </a:prstGeom>
-          <a:noFill/>
-          <a:ln/>
-        </p:spPr>
-        <p:txBody>
-          <a:bodyPr wrap="square" lIns="0" tIns="0" rIns="0" bIns="0" rtlCol="0" anchor="t"/>
-          <a:lstStyle/>
-          <a:p>
-            <a:pPr algn="ctr" indent="0" marL="0">
-              <a:buNone/>
-            </a:pPr>
-            <a:r>
-              <a:rPr lang="en-US" sz="850" dirty="0">
-                <a:solidFill>
-                  <a:srgbClr val="475569"/>
-                </a:solidFill>
-                <a:latin typeface="Calibri" pitchFamily="34" charset="0"/>
-                <a:ea typeface="Calibri" pitchFamily="34" charset="-122"/>
-                <a:cs typeface="Calibri" pitchFamily="34" charset="-120"/>
-              </a:rPr>
-              <a:t>keeping steady or still</a:t>
-            </a:r>
-            <a:endParaRPr lang="en-US" sz="850" dirty="0"/>
-          </a:p>
-        </p:txBody>
-      </p:sp>
-      <p:sp>
-        <p:nvSpPr>
-          <p:cNvPr id="26" name="Shape 24"/>
-          <p:cNvSpPr/>
-          <p:nvPr/>
-        </p:nvSpPr>
-        <p:spPr>
-          <a:xfrm>
-            <a:off x="365760" y="3273552"/>
-            <a:ext cx="1371600" cy="658368"/>
+              <a:t>Syllables</a:t>
+            </a:r>
+            <a:endParaRPr lang="en-US" sz="1100" dirty="0"/>
+          </a:p>
+        </p:txBody>
+      </p:sp>
+      <p:sp>
+        <p:nvSpPr>
+          <p:cNvPr id="24" name="Shape 22"/>
+          <p:cNvSpPr/>
+          <p:nvPr/>
+        </p:nvSpPr>
+        <p:spPr>
+          <a:xfrm>
+            <a:off x="1874520" y="3273552"/>
+            <a:ext cx="6903720" cy="658368"/>
           </a:xfrm>
           <a:prstGeom prst="rect">
             <a:avLst>
@@ -16328,50 +15836,248 @@
             </a:avLst>
           </a:prstGeom>
           <a:solidFill>
-            <a:srgbClr val="E2E8F0"/>
-          </a:solidFill>
-          <a:ln w="12700">
-            <a:solidFill>
-              <a:srgbClr val="E2E8F0"/>
-            </a:solidFill>
-            <a:prstDash val="solid"/>
-          </a:ln>
-        </p:spPr>
-      </p:sp>
-      <p:sp>
-        <p:nvSpPr>
-          <p:cNvPr id="27" name="Text 25"/>
-          <p:cNvSpPr/>
-          <p:nvPr/>
-        </p:nvSpPr>
-        <p:spPr>
-          <a:xfrm>
-            <a:off x="365760" y="3273552"/>
-            <a:ext cx="1371600" cy="658368"/>
-          </a:xfrm>
-          <a:prstGeom prst="rect">
-            <a:avLst/>
-          </a:prstGeom>
-          <a:noFill/>
-          <a:ln/>
-        </p:spPr>
-        <p:txBody>
-          <a:bodyPr wrap="square" lIns="0" tIns="0" rIns="0" bIns="0" rtlCol="0" anchor="ctr"/>
-          <a:lstStyle/>
-          <a:p>
-            <a:pPr algn="ctr" indent="0" marL="0">
-              <a:buNone/>
-            </a:pPr>
-            <a:r>
-              <a:rPr lang="en-US" sz="1100" b="1" dirty="0">
-                <a:solidFill>
-                  <a:srgbClr val="475569"/>
+            <a:srgbClr val="CCFBF1"/>
+          </a:solidFill>
+          <a:ln w="12700">
+            <a:solidFill>
+              <a:srgbClr val="0D9488"/>
+            </a:solidFill>
+            <a:prstDash val="solid"/>
+          </a:ln>
+        </p:spPr>
+      </p:sp>
+      <p:sp>
+        <p:nvSpPr>
+          <p:cNvPr id="25" name="Shape 23"/>
+          <p:cNvSpPr/>
+          <p:nvPr/>
+        </p:nvSpPr>
+        <p:spPr>
+          <a:xfrm>
+            <a:off x="2999232" y="3364992"/>
+            <a:ext cx="1645920" cy="475488"/>
+          </a:xfrm>
+          <a:prstGeom prst="rect">
+            <a:avLst>
+              <a:gd name="adj" fmla="val 9615"/>
+            </a:avLst>
+          </a:prstGeom>
+          <a:solidFill>
+            <a:srgbClr val="FFFFFF"/>
+          </a:solidFill>
+          <a:ln w="12700">
+            <a:solidFill>
+              <a:srgbClr val="0D9488"/>
+            </a:solidFill>
+            <a:prstDash val="solid"/>
+          </a:ln>
+        </p:spPr>
+      </p:sp>
+      <p:sp>
+        <p:nvSpPr>
+          <p:cNvPr id="26" name="Text 24"/>
+          <p:cNvSpPr/>
+          <p:nvPr/>
+        </p:nvSpPr>
+        <p:spPr>
+          <a:xfrm>
+            <a:off x="2999232" y="3364992"/>
+            <a:ext cx="1645920" cy="475488"/>
+          </a:xfrm>
+          <a:prstGeom prst="rect">
+            <a:avLst/>
+          </a:prstGeom>
+          <a:noFill/>
+          <a:ln/>
+        </p:spPr>
+        <p:txBody>
+          <a:bodyPr wrap="square" lIns="0" tIns="0" rIns="0" bIns="0" rtlCol="0" anchor="ctr"/>
+          <a:lstStyle/>
+          <a:p>
+            <a:pPr algn="ctr" indent="0" marL="0">
+              <a:buNone/>
+            </a:pPr>
+            <a:r>
+              <a:rPr lang="en-US" sz="1400" b="1" dirty="0">
+                <a:solidFill>
+                  <a:srgbClr val="0D9488"/>
                 </a:solidFill>
                 <a:latin typeface="Trebuchet MS" pitchFamily="34" charset="0"/>
                 <a:ea typeface="Trebuchet MS" pitchFamily="34" charset="-122"/>
                 <a:cs typeface="Trebuchet MS" pitchFamily="34" charset="-120"/>
               </a:rPr>
-              <a:t>Syllables</a:t>
+              <a:t>ther</a:t>
+            </a:r>
+            <a:endParaRPr lang="en-US" sz="1400" dirty="0"/>
+          </a:p>
+        </p:txBody>
+      </p:sp>
+      <p:sp>
+        <p:nvSpPr>
+          <p:cNvPr id="27" name="Text 25"/>
+          <p:cNvSpPr/>
+          <p:nvPr/>
+        </p:nvSpPr>
+        <p:spPr>
+          <a:xfrm>
+            <a:off x="4645152" y="3364992"/>
+            <a:ext cx="1097280" cy="475488"/>
+          </a:xfrm>
+          <a:prstGeom prst="rect">
+            <a:avLst/>
+          </a:prstGeom>
+          <a:noFill/>
+          <a:ln/>
+        </p:spPr>
+        <p:txBody>
+          <a:bodyPr wrap="square" lIns="0" tIns="0" rIns="0" bIns="0" rtlCol="0" anchor="ctr"/>
+          <a:lstStyle/>
+          <a:p>
+            <a:pPr algn="ctr" indent="0" marL="0">
+              <a:buNone/>
+            </a:pPr>
+            <a:r>
+              <a:rPr lang="en-US" sz="1600" b="1" dirty="0">
+                <a:solidFill>
+                  <a:srgbClr val="0D9488"/>
+                </a:solidFill>
+                <a:latin typeface="Trebuchet MS" pitchFamily="34" charset="0"/>
+                <a:ea typeface="Trebuchet MS" pitchFamily="34" charset="-122"/>
+                <a:cs typeface="Trebuchet MS" pitchFamily="34" charset="-120"/>
+              </a:rPr>
+              <a:t>·</a:t>
+            </a:r>
+            <a:endParaRPr lang="en-US" sz="1600" dirty="0"/>
+          </a:p>
+        </p:txBody>
+      </p:sp>
+      <p:sp>
+        <p:nvSpPr>
+          <p:cNvPr id="28" name="Shape 26"/>
+          <p:cNvSpPr/>
+          <p:nvPr/>
+        </p:nvSpPr>
+        <p:spPr>
+          <a:xfrm>
+            <a:off x="5742432" y="3364992"/>
+            <a:ext cx="1645920" cy="475488"/>
+          </a:xfrm>
+          <a:prstGeom prst="rect">
+            <a:avLst>
+              <a:gd name="adj" fmla="val 9615"/>
+            </a:avLst>
+          </a:prstGeom>
+          <a:solidFill>
+            <a:srgbClr val="FFFFFF"/>
+          </a:solidFill>
+          <a:ln w="12700">
+            <a:solidFill>
+              <a:srgbClr val="0D9488"/>
+            </a:solidFill>
+            <a:prstDash val="solid"/>
+          </a:ln>
+        </p:spPr>
+      </p:sp>
+      <p:sp>
+        <p:nvSpPr>
+          <p:cNvPr id="29" name="Text 27"/>
+          <p:cNvSpPr/>
+          <p:nvPr/>
+        </p:nvSpPr>
+        <p:spPr>
+          <a:xfrm>
+            <a:off x="5742432" y="3364992"/>
+            <a:ext cx="1645920" cy="475488"/>
+          </a:xfrm>
+          <a:prstGeom prst="rect">
+            <a:avLst/>
+          </a:prstGeom>
+          <a:noFill/>
+          <a:ln/>
+        </p:spPr>
+        <p:txBody>
+          <a:bodyPr wrap="square" lIns="0" tIns="0" rIns="0" bIns="0" rtlCol="0" anchor="ctr"/>
+          <a:lstStyle/>
+          <a:p>
+            <a:pPr algn="ctr" indent="0" marL="0">
+              <a:buNone/>
+            </a:pPr>
+            <a:r>
+              <a:rPr lang="en-US" sz="1400" b="1" dirty="0">
+                <a:solidFill>
+                  <a:srgbClr val="0D9488"/>
+                </a:solidFill>
+                <a:latin typeface="Trebuchet MS" pitchFamily="34" charset="0"/>
+                <a:ea typeface="Trebuchet MS" pitchFamily="34" charset="-122"/>
+                <a:cs typeface="Trebuchet MS" pitchFamily="34" charset="-120"/>
+              </a:rPr>
+              <a:t>mal</a:t>
+            </a:r>
+            <a:endParaRPr lang="en-US" sz="1400" dirty="0"/>
+          </a:p>
+        </p:txBody>
+      </p:sp>
+      <p:sp>
+        <p:nvSpPr>
+          <p:cNvPr id="30" name="Shape 28"/>
+          <p:cNvSpPr/>
+          <p:nvPr/>
+        </p:nvSpPr>
+        <p:spPr>
+          <a:xfrm>
+            <a:off x="365760" y="4096512"/>
+            <a:ext cx="1371600" cy="804672"/>
+          </a:xfrm>
+          <a:prstGeom prst="rect">
+            <a:avLst>
+              <a:gd name="adj" fmla="val 6818"/>
+            </a:avLst>
+          </a:prstGeom>
+          <a:solidFill>
+            <a:srgbClr val="E2E8F0"/>
+          </a:solidFill>
+          <a:ln w="12700">
+            <a:solidFill>
+              <a:srgbClr val="E2E8F0"/>
+            </a:solidFill>
+            <a:prstDash val="solid"/>
+          </a:ln>
+        </p:spPr>
+      </p:sp>
+      <p:sp>
+        <p:nvSpPr>
+          <p:cNvPr id="31" name="Text 29"/>
+          <p:cNvSpPr/>
+          <p:nvPr/>
+        </p:nvSpPr>
+        <p:spPr>
+          <a:xfrm>
+            <a:off x="365760" y="4096512"/>
+            <a:ext cx="1371600" cy="804672"/>
+          </a:xfrm>
+          <a:prstGeom prst="rect">
+            <a:avLst/>
+          </a:prstGeom>
+          <a:noFill/>
+          <a:ln/>
+        </p:spPr>
+        <p:txBody>
+          <a:bodyPr wrap="square" lIns="0" tIns="0" rIns="0" bIns="0" rtlCol="0" anchor="ctr"/>
+          <a:lstStyle/>
+          <a:p>
+            <a:pPr algn="ctr" indent="0" marL="0">
+              <a:buNone/>
+            </a:pPr>
+            <a:r>
+              <a:rPr lang="en-US" sz="1100" b="1" dirty="0">
+                <a:solidFill>
+                  <a:srgbClr val="475569"/>
+                </a:solidFill>
+                <a:latin typeface="Trebuchet MS" pitchFamily="34" charset="0"/>
+                <a:ea typeface="Trebuchet MS" pitchFamily="34" charset="-122"/>
+                <a:cs typeface="Trebuchet MS" pitchFamily="34" charset="-120"/>
+              </a:rPr>
+              <a:t>Phonemes</a:t>
             </a:r>
             <a:endParaRPr lang="en-US" sz="1100" dirty="0"/>
           </a:p>
@@ -16379,13 +16085,13 @@
       </p:sp>
       <p:sp>
         <p:nvSpPr>
-          <p:cNvPr id="28" name="Shape 26"/>
-          <p:cNvSpPr/>
-          <p:nvPr/>
-        </p:nvSpPr>
-        <p:spPr>
-          <a:xfrm>
-            <a:off x="1874520" y="3273552"/>
+          <p:cNvPr id="32" name="Shape 30"/>
+          <p:cNvSpPr/>
+          <p:nvPr/>
+        </p:nvSpPr>
+        <p:spPr>
+          <a:xfrm>
+            <a:off x="1874520" y="4096512"/>
             <a:ext cx="6903720" cy="658368"/>
           </a:xfrm>
           <a:prstGeom prst="rect">
@@ -16394,30 +16100,30 @@
             </a:avLst>
           </a:prstGeom>
           <a:solidFill>
-            <a:srgbClr val="CCFBF1"/>
-          </a:solidFill>
-          <a:ln w="12700">
-            <a:solidFill>
-              <a:srgbClr val="0D9488"/>
-            </a:solidFill>
-            <a:prstDash val="solid"/>
-          </a:ln>
-        </p:spPr>
-      </p:sp>
-      <p:sp>
-        <p:nvSpPr>
-          <p:cNvPr id="29" name="Shape 27"/>
-          <p:cNvSpPr/>
-          <p:nvPr/>
-        </p:nvSpPr>
-        <p:spPr>
-          <a:xfrm>
-            <a:off x="2313432" y="3364992"/>
-            <a:ext cx="1645920" cy="475488"/>
+            <a:srgbClr val="FCE7F3"/>
+          </a:solidFill>
+          <a:ln w="12700">
+            <a:solidFill>
+              <a:srgbClr val="DB2777"/>
+            </a:solidFill>
+            <a:prstDash val="solid"/>
+          </a:ln>
+        </p:spPr>
+      </p:sp>
+      <p:sp>
+        <p:nvSpPr>
+          <p:cNvPr id="33" name="Shape 31"/>
+          <p:cNvSpPr/>
+          <p:nvPr/>
+        </p:nvSpPr>
+        <p:spPr>
+          <a:xfrm>
+            <a:off x="2670048" y="4169664"/>
+            <a:ext cx="685800" cy="475488"/>
           </a:xfrm>
           <a:prstGeom prst="rect">
             <a:avLst>
-              <a:gd name="adj" fmla="val 9615"/>
+              <a:gd name="adj" fmla="val 7692"/>
             </a:avLst>
           </a:prstGeom>
           <a:solidFill>
@@ -16425,104 +16131,131 @@
           </a:solidFill>
           <a:ln w="12700">
             <a:solidFill>
-              <a:srgbClr val="0D9488"/>
-            </a:solidFill>
-            <a:prstDash val="solid"/>
-          </a:ln>
-        </p:spPr>
-      </p:sp>
-      <p:sp>
-        <p:nvSpPr>
-          <p:cNvPr id="30" name="Text 28"/>
-          <p:cNvSpPr/>
-          <p:nvPr/>
-        </p:nvSpPr>
-        <p:spPr>
-          <a:xfrm>
-            <a:off x="2313432" y="3364992"/>
-            <a:ext cx="1645920" cy="475488"/>
-          </a:xfrm>
-          <a:prstGeom prst="rect">
-            <a:avLst/>
-          </a:prstGeom>
-          <a:noFill/>
-          <a:ln/>
-        </p:spPr>
-        <p:txBody>
-          <a:bodyPr wrap="square" lIns="0" tIns="0" rIns="0" bIns="0" rtlCol="0" anchor="ctr"/>
-          <a:lstStyle/>
-          <a:p>
-            <a:pPr algn="ctr" indent="0" marL="0">
-              <a:buNone/>
-            </a:pPr>
-            <a:r>
-              <a:rPr lang="en-US" sz="1400" b="1" dirty="0">
-                <a:solidFill>
-                  <a:srgbClr val="0D9488"/>
+              <a:srgbClr val="DB2777"/>
+            </a:solidFill>
+            <a:prstDash val="solid"/>
+          </a:ln>
+        </p:spPr>
+      </p:sp>
+      <p:sp>
+        <p:nvSpPr>
+          <p:cNvPr id="34" name="Text 32"/>
+          <p:cNvSpPr/>
+          <p:nvPr/>
+        </p:nvSpPr>
+        <p:spPr>
+          <a:xfrm>
+            <a:off x="2670048" y="4169664"/>
+            <a:ext cx="685800" cy="475488"/>
+          </a:xfrm>
+          <a:prstGeom prst="rect">
+            <a:avLst/>
+          </a:prstGeom>
+          <a:noFill/>
+          <a:ln/>
+        </p:spPr>
+        <p:txBody>
+          <a:bodyPr wrap="square" lIns="0" tIns="0" rIns="0" bIns="0" rtlCol="0" anchor="ctr"/>
+          <a:lstStyle/>
+          <a:p>
+            <a:pPr algn="ctr" indent="0" marL="0">
+              <a:buNone/>
+            </a:pPr>
+            <a:r>
+              <a:rPr lang="en-US" sz="900" b="1" dirty="0">
+                <a:solidFill>
+                  <a:srgbClr val="9D174D"/>
                 </a:solidFill>
                 <a:latin typeface="Trebuchet MS" pitchFamily="34" charset="0"/>
                 <a:ea typeface="Trebuchet MS" pitchFamily="34" charset="-122"/>
                 <a:cs typeface="Trebuchet MS" pitchFamily="34" charset="-120"/>
               </a:rPr>
-              <a:t>ther</a:t>
-            </a:r>
-            <a:endParaRPr lang="en-US" sz="1400" dirty="0"/>
-          </a:p>
-        </p:txBody>
-      </p:sp>
-      <p:sp>
-        <p:nvSpPr>
-          <p:cNvPr id="31" name="Text 29"/>
-          <p:cNvSpPr/>
-          <p:nvPr/>
-        </p:nvSpPr>
-        <p:spPr>
-          <a:xfrm>
-            <a:off x="3959352" y="3364992"/>
-            <a:ext cx="411480" cy="475488"/>
-          </a:xfrm>
-          <a:prstGeom prst="rect">
-            <a:avLst/>
-          </a:prstGeom>
-          <a:noFill/>
-          <a:ln/>
-        </p:spPr>
-        <p:txBody>
-          <a:bodyPr wrap="square" lIns="0" tIns="0" rIns="0" bIns="0" rtlCol="0" anchor="ctr"/>
-          <a:lstStyle/>
-          <a:p>
-            <a:pPr algn="ctr" indent="0" marL="0">
-              <a:buNone/>
-            </a:pPr>
-            <a:r>
-              <a:rPr lang="en-US" sz="1600" b="1" dirty="0">
-                <a:solidFill>
-                  <a:srgbClr val="0D9488"/>
+              <a:t>th</a:t>
+            </a:r>
+            <a:endParaRPr lang="en-US" sz="900" dirty="0"/>
+          </a:p>
+        </p:txBody>
+      </p:sp>
+      <p:sp>
+        <p:nvSpPr>
+          <p:cNvPr id="35" name="Shape 33"/>
+          <p:cNvSpPr/>
+          <p:nvPr/>
+        </p:nvSpPr>
+        <p:spPr>
+          <a:xfrm>
+            <a:off x="4123944" y="4169664"/>
+            <a:ext cx="685800" cy="475488"/>
+          </a:xfrm>
+          <a:prstGeom prst="rect">
+            <a:avLst>
+              <a:gd name="adj" fmla="val 7692"/>
+            </a:avLst>
+          </a:prstGeom>
+          <a:solidFill>
+            <a:srgbClr val="FFFFFF"/>
+          </a:solidFill>
+          <a:ln w="12700">
+            <a:solidFill>
+              <a:srgbClr val="DB2777"/>
+            </a:solidFill>
+            <a:prstDash val="solid"/>
+          </a:ln>
+        </p:spPr>
+      </p:sp>
+      <p:sp>
+        <p:nvSpPr>
+          <p:cNvPr id="36" name="Text 34"/>
+          <p:cNvSpPr/>
+          <p:nvPr/>
+        </p:nvSpPr>
+        <p:spPr>
+          <a:xfrm>
+            <a:off x="4123944" y="4169664"/>
+            <a:ext cx="685800" cy="475488"/>
+          </a:xfrm>
+          <a:prstGeom prst="rect">
+            <a:avLst/>
+          </a:prstGeom>
+          <a:noFill/>
+          <a:ln/>
+        </p:spPr>
+        <p:txBody>
+          <a:bodyPr wrap="square" lIns="0" tIns="0" rIns="0" bIns="0" rtlCol="0" anchor="ctr"/>
+          <a:lstStyle/>
+          <a:p>
+            <a:pPr algn="ctr" indent="0" marL="0">
+              <a:buNone/>
+            </a:pPr>
+            <a:r>
+              <a:rPr lang="en-US" sz="900" b="1" dirty="0">
+                <a:solidFill>
+                  <a:srgbClr val="9D174D"/>
                 </a:solidFill>
                 <a:latin typeface="Trebuchet MS" pitchFamily="34" charset="0"/>
                 <a:ea typeface="Trebuchet MS" pitchFamily="34" charset="-122"/>
                 <a:cs typeface="Trebuchet MS" pitchFamily="34" charset="-120"/>
               </a:rPr>
-              <a:t>·</a:t>
-            </a:r>
-            <a:endParaRPr lang="en-US" sz="1600" dirty="0"/>
-          </a:p>
-        </p:txBody>
-      </p:sp>
-      <p:sp>
-        <p:nvSpPr>
-          <p:cNvPr id="32" name="Shape 30"/>
-          <p:cNvSpPr/>
-          <p:nvPr/>
-        </p:nvSpPr>
-        <p:spPr>
-          <a:xfrm>
-            <a:off x="4370832" y="3364992"/>
-            <a:ext cx="1645920" cy="475488"/>
+              <a:t>er</a:t>
+            </a:r>
+            <a:endParaRPr lang="en-US" sz="900" dirty="0"/>
+          </a:p>
+        </p:txBody>
+      </p:sp>
+      <p:sp>
+        <p:nvSpPr>
+          <p:cNvPr id="37" name="Shape 35"/>
+          <p:cNvSpPr/>
+          <p:nvPr/>
+        </p:nvSpPr>
+        <p:spPr>
+          <a:xfrm>
+            <a:off x="5577840" y="4169664"/>
+            <a:ext cx="685800" cy="475488"/>
           </a:xfrm>
           <a:prstGeom prst="rect">
             <a:avLst>
-              <a:gd name="adj" fmla="val 9615"/>
+              <a:gd name="adj" fmla="val 7692"/>
             </a:avLst>
           </a:prstGeom>
           <a:solidFill>
@@ -16530,772 +16263,112 @@
           </a:solidFill>
           <a:ln w="12700">
             <a:solidFill>
-              <a:srgbClr val="0D9488"/>
-            </a:solidFill>
-            <a:prstDash val="solid"/>
-          </a:ln>
-        </p:spPr>
-      </p:sp>
-      <p:sp>
-        <p:nvSpPr>
-          <p:cNvPr id="33" name="Text 31"/>
-          <p:cNvSpPr/>
-          <p:nvPr/>
-        </p:nvSpPr>
-        <p:spPr>
-          <a:xfrm>
-            <a:off x="4370832" y="3364992"/>
-            <a:ext cx="1645920" cy="475488"/>
-          </a:xfrm>
-          <a:prstGeom prst="rect">
-            <a:avLst/>
-          </a:prstGeom>
-          <a:noFill/>
-          <a:ln/>
-        </p:spPr>
-        <p:txBody>
-          <a:bodyPr wrap="square" lIns="0" tIns="0" rIns="0" bIns="0" rtlCol="0" anchor="ctr"/>
-          <a:lstStyle/>
-          <a:p>
-            <a:pPr algn="ctr" indent="0" marL="0">
-              <a:buNone/>
-            </a:pPr>
-            <a:r>
-              <a:rPr lang="en-US" sz="1400" b="1" dirty="0">
-                <a:solidFill>
-                  <a:srgbClr val="0D9488"/>
+              <a:srgbClr val="DB2777"/>
+            </a:solidFill>
+            <a:prstDash val="solid"/>
+          </a:ln>
+        </p:spPr>
+      </p:sp>
+      <p:sp>
+        <p:nvSpPr>
+          <p:cNvPr id="38" name="Text 36"/>
+          <p:cNvSpPr/>
+          <p:nvPr/>
+        </p:nvSpPr>
+        <p:spPr>
+          <a:xfrm>
+            <a:off x="5577840" y="4169664"/>
+            <a:ext cx="685800" cy="475488"/>
+          </a:xfrm>
+          <a:prstGeom prst="rect">
+            <a:avLst/>
+          </a:prstGeom>
+          <a:noFill/>
+          <a:ln/>
+        </p:spPr>
+        <p:txBody>
+          <a:bodyPr wrap="square" lIns="0" tIns="0" rIns="0" bIns="0" rtlCol="0" anchor="ctr"/>
+          <a:lstStyle/>
+          <a:p>
+            <a:pPr algn="ctr" indent="0" marL="0">
+              <a:buNone/>
+            </a:pPr>
+            <a:r>
+              <a:rPr lang="en-US" sz="900" b="1" dirty="0">
+                <a:solidFill>
+                  <a:srgbClr val="9D174D"/>
                 </a:solidFill>
                 <a:latin typeface="Trebuchet MS" pitchFamily="34" charset="0"/>
                 <a:ea typeface="Trebuchet MS" pitchFamily="34" charset="-122"/>
                 <a:cs typeface="Trebuchet MS" pitchFamily="34" charset="-120"/>
               </a:rPr>
-              <a:t>mo</a:t>
-            </a:r>
-            <a:endParaRPr lang="en-US" sz="1400" dirty="0"/>
-          </a:p>
-        </p:txBody>
-      </p:sp>
-      <p:sp>
-        <p:nvSpPr>
-          <p:cNvPr id="34" name="Text 32"/>
-          <p:cNvSpPr/>
-          <p:nvPr/>
-        </p:nvSpPr>
-        <p:spPr>
-          <a:xfrm>
-            <a:off x="6016752" y="3364992"/>
-            <a:ext cx="411480" cy="475488"/>
-          </a:xfrm>
-          <a:prstGeom prst="rect">
-            <a:avLst/>
-          </a:prstGeom>
-          <a:noFill/>
-          <a:ln/>
-        </p:spPr>
-        <p:txBody>
-          <a:bodyPr wrap="square" lIns="0" tIns="0" rIns="0" bIns="0" rtlCol="0" anchor="ctr"/>
-          <a:lstStyle/>
-          <a:p>
-            <a:pPr algn="ctr" indent="0" marL="0">
-              <a:buNone/>
-            </a:pPr>
-            <a:r>
-              <a:rPr lang="en-US" sz="1600" b="1" dirty="0">
-                <a:solidFill>
-                  <a:srgbClr val="0D9488"/>
+              <a:t>m</a:t>
+            </a:r>
+            <a:endParaRPr lang="en-US" sz="900" dirty="0"/>
+          </a:p>
+        </p:txBody>
+      </p:sp>
+      <p:sp>
+        <p:nvSpPr>
+          <p:cNvPr id="39" name="Shape 37"/>
+          <p:cNvSpPr/>
+          <p:nvPr/>
+        </p:nvSpPr>
+        <p:spPr>
+          <a:xfrm>
+            <a:off x="7031736" y="4169664"/>
+            <a:ext cx="685800" cy="475488"/>
+          </a:xfrm>
+          <a:prstGeom prst="rect">
+            <a:avLst>
+              <a:gd name="adj" fmla="val 7692"/>
+            </a:avLst>
+          </a:prstGeom>
+          <a:solidFill>
+            <a:srgbClr val="FFFFFF"/>
+          </a:solidFill>
+          <a:ln w="12700">
+            <a:solidFill>
+              <a:srgbClr val="DB2777"/>
+            </a:solidFill>
+            <a:prstDash val="solid"/>
+          </a:ln>
+        </p:spPr>
+      </p:sp>
+      <p:sp>
+        <p:nvSpPr>
+          <p:cNvPr id="40" name="Text 38"/>
+          <p:cNvSpPr/>
+          <p:nvPr/>
+        </p:nvSpPr>
+        <p:spPr>
+          <a:xfrm>
+            <a:off x="7031736" y="4169664"/>
+            <a:ext cx="685800" cy="475488"/>
+          </a:xfrm>
+          <a:prstGeom prst="rect">
+            <a:avLst/>
+          </a:prstGeom>
+          <a:noFill/>
+          <a:ln/>
+        </p:spPr>
+        <p:txBody>
+          <a:bodyPr wrap="square" lIns="0" tIns="0" rIns="0" bIns="0" rtlCol="0" anchor="ctr"/>
+          <a:lstStyle/>
+          <a:p>
+            <a:pPr algn="ctr" indent="0" marL="0">
+              <a:buNone/>
+            </a:pPr>
+            <a:r>
+              <a:rPr lang="en-US" sz="900" b="1" dirty="0">
+                <a:solidFill>
+                  <a:srgbClr val="9D174D"/>
                 </a:solidFill>
                 <a:latin typeface="Trebuchet MS" pitchFamily="34" charset="0"/>
                 <a:ea typeface="Trebuchet MS" pitchFamily="34" charset="-122"/>
                 <a:cs typeface="Trebuchet MS" pitchFamily="34" charset="-120"/>
               </a:rPr>
-              <a:t>·</a:t>
-            </a:r>
-            <a:endParaRPr lang="en-US" sz="1600" dirty="0"/>
-          </a:p>
-        </p:txBody>
-      </p:sp>
-      <p:sp>
-        <p:nvSpPr>
-          <p:cNvPr id="35" name="Shape 33"/>
-          <p:cNvSpPr/>
-          <p:nvPr/>
-        </p:nvSpPr>
-        <p:spPr>
-          <a:xfrm>
-            <a:off x="6428232" y="3364992"/>
-            <a:ext cx="1645920" cy="475488"/>
-          </a:xfrm>
-          <a:prstGeom prst="rect">
-            <a:avLst>
-              <a:gd name="adj" fmla="val 9615"/>
-            </a:avLst>
-          </a:prstGeom>
-          <a:solidFill>
-            <a:srgbClr val="FFFFFF"/>
-          </a:solidFill>
-          <a:ln w="12700">
-            <a:solidFill>
-              <a:srgbClr val="0D9488"/>
-            </a:solidFill>
-            <a:prstDash val="solid"/>
-          </a:ln>
-        </p:spPr>
-      </p:sp>
-      <p:sp>
-        <p:nvSpPr>
-          <p:cNvPr id="36" name="Text 34"/>
-          <p:cNvSpPr/>
-          <p:nvPr/>
-        </p:nvSpPr>
-        <p:spPr>
-          <a:xfrm>
-            <a:off x="6428232" y="3364992"/>
-            <a:ext cx="1645920" cy="475488"/>
-          </a:xfrm>
-          <a:prstGeom prst="rect">
-            <a:avLst/>
-          </a:prstGeom>
-          <a:noFill/>
-          <a:ln/>
-        </p:spPr>
-        <p:txBody>
-          <a:bodyPr wrap="square" lIns="0" tIns="0" rIns="0" bIns="0" rtlCol="0" anchor="ctr"/>
-          <a:lstStyle/>
-          <a:p>
-            <a:pPr algn="ctr" indent="0" marL="0">
-              <a:buNone/>
-            </a:pPr>
-            <a:r>
-              <a:rPr lang="en-US" sz="1400" b="1" dirty="0">
-                <a:solidFill>
-                  <a:srgbClr val="0D9488"/>
-                </a:solidFill>
-                <a:latin typeface="Trebuchet MS" pitchFamily="34" charset="0"/>
-                <a:ea typeface="Trebuchet MS" pitchFamily="34" charset="-122"/>
-                <a:cs typeface="Trebuchet MS" pitchFamily="34" charset="-120"/>
-              </a:rPr>
-              <a:t>stat</a:t>
-            </a:r>
-            <a:endParaRPr lang="en-US" sz="1400" dirty="0"/>
-          </a:p>
-        </p:txBody>
-      </p:sp>
-      <p:sp>
-        <p:nvSpPr>
-          <p:cNvPr id="37" name="Shape 35"/>
-          <p:cNvSpPr/>
-          <p:nvPr/>
-        </p:nvSpPr>
-        <p:spPr>
-          <a:xfrm>
-            <a:off x="365760" y="4096512"/>
-            <a:ext cx="1371600" cy="804672"/>
-          </a:xfrm>
-          <a:prstGeom prst="rect">
-            <a:avLst>
-              <a:gd name="adj" fmla="val 6818"/>
-            </a:avLst>
-          </a:prstGeom>
-          <a:solidFill>
-            <a:srgbClr val="E2E8F0"/>
-          </a:solidFill>
-          <a:ln w="12700">
-            <a:solidFill>
-              <a:srgbClr val="E2E8F0"/>
-            </a:solidFill>
-            <a:prstDash val="solid"/>
-          </a:ln>
-        </p:spPr>
-      </p:sp>
-      <p:sp>
-        <p:nvSpPr>
-          <p:cNvPr id="38" name="Text 36"/>
-          <p:cNvSpPr/>
-          <p:nvPr/>
-        </p:nvSpPr>
-        <p:spPr>
-          <a:xfrm>
-            <a:off x="365760" y="4096512"/>
-            <a:ext cx="1371600" cy="804672"/>
-          </a:xfrm>
-          <a:prstGeom prst="rect">
-            <a:avLst/>
-          </a:prstGeom>
-          <a:noFill/>
-          <a:ln/>
-        </p:spPr>
-        <p:txBody>
-          <a:bodyPr wrap="square" lIns="0" tIns="0" rIns="0" bIns="0" rtlCol="0" anchor="ctr"/>
-          <a:lstStyle/>
-          <a:p>
-            <a:pPr algn="ctr" indent="0" marL="0">
-              <a:buNone/>
-            </a:pPr>
-            <a:r>
-              <a:rPr lang="en-US" sz="1100" b="1" dirty="0">
-                <a:solidFill>
-                  <a:srgbClr val="475569"/>
-                </a:solidFill>
-                <a:latin typeface="Trebuchet MS" pitchFamily="34" charset="0"/>
-                <a:ea typeface="Trebuchet MS" pitchFamily="34" charset="-122"/>
-                <a:cs typeface="Trebuchet MS" pitchFamily="34" charset="-120"/>
-              </a:rPr>
-              <a:t>Phonemes</a:t>
-            </a:r>
-            <a:endParaRPr lang="en-US" sz="1100" dirty="0"/>
-          </a:p>
-        </p:txBody>
-      </p:sp>
-      <p:sp>
-        <p:nvSpPr>
-          <p:cNvPr id="39" name="Shape 37"/>
-          <p:cNvSpPr/>
-          <p:nvPr/>
-        </p:nvSpPr>
-        <p:spPr>
-          <a:xfrm>
-            <a:off x="1874520" y="4096512"/>
-            <a:ext cx="6903720" cy="658368"/>
-          </a:xfrm>
-          <a:prstGeom prst="rect">
-            <a:avLst>
-              <a:gd name="adj" fmla="val 8333"/>
-            </a:avLst>
-          </a:prstGeom>
-          <a:solidFill>
-            <a:srgbClr val="FCE7F3"/>
-          </a:solidFill>
-          <a:ln w="12700">
-            <a:solidFill>
-              <a:srgbClr val="DB2777"/>
-            </a:solidFill>
-            <a:prstDash val="solid"/>
-          </a:ln>
-        </p:spPr>
-      </p:sp>
-      <p:sp>
-        <p:nvSpPr>
-          <p:cNvPr id="40" name="Shape 38"/>
-          <p:cNvSpPr/>
-          <p:nvPr/>
-        </p:nvSpPr>
-        <p:spPr>
-          <a:xfrm>
-            <a:off x="2023872" y="4169664"/>
-            <a:ext cx="685800" cy="475488"/>
-          </a:xfrm>
-          <a:prstGeom prst="rect">
-            <a:avLst>
-              <a:gd name="adj" fmla="val 7692"/>
-            </a:avLst>
-          </a:prstGeom>
-          <a:solidFill>
-            <a:srgbClr val="FFFFFF"/>
-          </a:solidFill>
-          <a:ln w="12700">
-            <a:solidFill>
-              <a:srgbClr val="DB2777"/>
-            </a:solidFill>
-            <a:prstDash val="solid"/>
-          </a:ln>
-        </p:spPr>
-      </p:sp>
-      <p:sp>
-        <p:nvSpPr>
-          <p:cNvPr id="41" name="Text 39"/>
-          <p:cNvSpPr/>
-          <p:nvPr/>
-        </p:nvSpPr>
-        <p:spPr>
-          <a:xfrm>
-            <a:off x="2023872" y="4169664"/>
-            <a:ext cx="685800" cy="475488"/>
-          </a:xfrm>
-          <a:prstGeom prst="rect">
-            <a:avLst/>
-          </a:prstGeom>
-          <a:noFill/>
-          <a:ln/>
-        </p:spPr>
-        <p:txBody>
-          <a:bodyPr wrap="square" lIns="0" tIns="0" rIns="0" bIns="0" rtlCol="0" anchor="ctr"/>
-          <a:lstStyle/>
-          <a:p>
-            <a:pPr algn="ctr" indent="0" marL="0">
-              <a:buNone/>
-            </a:pPr>
-            <a:r>
-              <a:rPr lang="en-US" sz="900" b="1" dirty="0">
-                <a:solidFill>
-                  <a:srgbClr val="9D174D"/>
-                </a:solidFill>
-                <a:latin typeface="Trebuchet MS" pitchFamily="34" charset="0"/>
-                <a:ea typeface="Trebuchet MS" pitchFamily="34" charset="-122"/>
-                <a:cs typeface="Trebuchet MS" pitchFamily="34" charset="-120"/>
-              </a:rPr>
-              <a:t>th</a:t>
-            </a:r>
-            <a:endParaRPr lang="en-US" sz="900" dirty="0"/>
-          </a:p>
-        </p:txBody>
-      </p:sp>
-      <p:sp>
-        <p:nvSpPr>
-          <p:cNvPr id="42" name="Shape 40"/>
-          <p:cNvSpPr/>
-          <p:nvPr/>
-        </p:nvSpPr>
-        <p:spPr>
-          <a:xfrm>
-            <a:off x="2831592" y="4169664"/>
-            <a:ext cx="685800" cy="475488"/>
-          </a:xfrm>
-          <a:prstGeom prst="rect">
-            <a:avLst>
-              <a:gd name="adj" fmla="val 7692"/>
-            </a:avLst>
-          </a:prstGeom>
-          <a:solidFill>
-            <a:srgbClr val="FFFFFF"/>
-          </a:solidFill>
-          <a:ln w="12700">
-            <a:solidFill>
-              <a:srgbClr val="DB2777"/>
-            </a:solidFill>
-            <a:prstDash val="solid"/>
-          </a:ln>
-        </p:spPr>
-      </p:sp>
-      <p:sp>
-        <p:nvSpPr>
-          <p:cNvPr id="43" name="Text 41"/>
-          <p:cNvSpPr/>
-          <p:nvPr/>
-        </p:nvSpPr>
-        <p:spPr>
-          <a:xfrm>
-            <a:off x="2831592" y="4169664"/>
-            <a:ext cx="685800" cy="475488"/>
-          </a:xfrm>
-          <a:prstGeom prst="rect">
-            <a:avLst/>
-          </a:prstGeom>
-          <a:noFill/>
-          <a:ln/>
-        </p:spPr>
-        <p:txBody>
-          <a:bodyPr wrap="square" lIns="0" tIns="0" rIns="0" bIns="0" rtlCol="0" anchor="ctr"/>
-          <a:lstStyle/>
-          <a:p>
-            <a:pPr algn="ctr" indent="0" marL="0">
-              <a:buNone/>
-            </a:pPr>
-            <a:r>
-              <a:rPr lang="en-US" sz="900" b="1" dirty="0">
-                <a:solidFill>
-                  <a:srgbClr val="9D174D"/>
-                </a:solidFill>
-                <a:latin typeface="Trebuchet MS" pitchFamily="34" charset="0"/>
-                <a:ea typeface="Trebuchet MS" pitchFamily="34" charset="-122"/>
-                <a:cs typeface="Trebuchet MS" pitchFamily="34" charset="-120"/>
-              </a:rPr>
-              <a:t>er</a:t>
-            </a:r>
-            <a:endParaRPr lang="en-US" sz="900" dirty="0"/>
-          </a:p>
-        </p:txBody>
-      </p:sp>
-      <p:sp>
-        <p:nvSpPr>
-          <p:cNvPr id="44" name="Shape 42"/>
-          <p:cNvSpPr/>
-          <p:nvPr/>
-        </p:nvSpPr>
-        <p:spPr>
-          <a:xfrm>
-            <a:off x="3639312" y="4169664"/>
-            <a:ext cx="685800" cy="475488"/>
-          </a:xfrm>
-          <a:prstGeom prst="rect">
-            <a:avLst>
-              <a:gd name="adj" fmla="val 7692"/>
-            </a:avLst>
-          </a:prstGeom>
-          <a:solidFill>
-            <a:srgbClr val="FFFFFF"/>
-          </a:solidFill>
-          <a:ln w="12700">
-            <a:solidFill>
-              <a:srgbClr val="DB2777"/>
-            </a:solidFill>
-            <a:prstDash val="solid"/>
-          </a:ln>
-        </p:spPr>
-      </p:sp>
-      <p:sp>
-        <p:nvSpPr>
-          <p:cNvPr id="45" name="Text 43"/>
-          <p:cNvSpPr/>
-          <p:nvPr/>
-        </p:nvSpPr>
-        <p:spPr>
-          <a:xfrm>
-            <a:off x="3639312" y="4169664"/>
-            <a:ext cx="685800" cy="475488"/>
-          </a:xfrm>
-          <a:prstGeom prst="rect">
-            <a:avLst/>
-          </a:prstGeom>
-          <a:noFill/>
-          <a:ln/>
-        </p:spPr>
-        <p:txBody>
-          <a:bodyPr wrap="square" lIns="0" tIns="0" rIns="0" bIns="0" rtlCol="0" anchor="ctr"/>
-          <a:lstStyle/>
-          <a:p>
-            <a:pPr algn="ctr" indent="0" marL="0">
-              <a:buNone/>
-            </a:pPr>
-            <a:r>
-              <a:rPr lang="en-US" sz="900" b="1" dirty="0">
-                <a:solidFill>
-                  <a:srgbClr val="9D174D"/>
-                </a:solidFill>
-                <a:latin typeface="Trebuchet MS" pitchFamily="34" charset="0"/>
-                <a:ea typeface="Trebuchet MS" pitchFamily="34" charset="-122"/>
-                <a:cs typeface="Trebuchet MS" pitchFamily="34" charset="-120"/>
-              </a:rPr>
-              <a:t>m</a:t>
-            </a:r>
-            <a:endParaRPr lang="en-US" sz="900" dirty="0"/>
-          </a:p>
-        </p:txBody>
-      </p:sp>
-      <p:sp>
-        <p:nvSpPr>
-          <p:cNvPr id="46" name="Shape 44"/>
-          <p:cNvSpPr/>
-          <p:nvPr/>
-        </p:nvSpPr>
-        <p:spPr>
-          <a:xfrm>
-            <a:off x="4447032" y="4169664"/>
-            <a:ext cx="685800" cy="475488"/>
-          </a:xfrm>
-          <a:prstGeom prst="rect">
-            <a:avLst>
-              <a:gd name="adj" fmla="val 7692"/>
-            </a:avLst>
-          </a:prstGeom>
-          <a:solidFill>
-            <a:srgbClr val="FFFFFF"/>
-          </a:solidFill>
-          <a:ln w="12700">
-            <a:solidFill>
-              <a:srgbClr val="DB2777"/>
-            </a:solidFill>
-            <a:prstDash val="solid"/>
-          </a:ln>
-        </p:spPr>
-      </p:sp>
-      <p:sp>
-        <p:nvSpPr>
-          <p:cNvPr id="47" name="Text 45"/>
-          <p:cNvSpPr/>
-          <p:nvPr/>
-        </p:nvSpPr>
-        <p:spPr>
-          <a:xfrm>
-            <a:off x="4447032" y="4169664"/>
-            <a:ext cx="685800" cy="475488"/>
-          </a:xfrm>
-          <a:prstGeom prst="rect">
-            <a:avLst/>
-          </a:prstGeom>
-          <a:noFill/>
-          <a:ln/>
-        </p:spPr>
-        <p:txBody>
-          <a:bodyPr wrap="square" lIns="0" tIns="0" rIns="0" bIns="0" rtlCol="0" anchor="ctr"/>
-          <a:lstStyle/>
-          <a:p>
-            <a:pPr algn="ctr" indent="0" marL="0">
-              <a:buNone/>
-            </a:pPr>
-            <a:r>
-              <a:rPr lang="en-US" sz="900" b="1" dirty="0">
-                <a:solidFill>
-                  <a:srgbClr val="9D174D"/>
-                </a:solidFill>
-                <a:latin typeface="Trebuchet MS" pitchFamily="34" charset="0"/>
-                <a:ea typeface="Trebuchet MS" pitchFamily="34" charset="-122"/>
-                <a:cs typeface="Trebuchet MS" pitchFamily="34" charset="-120"/>
-              </a:rPr>
-              <a:t>o</a:t>
-            </a:r>
-            <a:endParaRPr lang="en-US" sz="900" dirty="0"/>
-          </a:p>
-        </p:txBody>
-      </p:sp>
-      <p:sp>
-        <p:nvSpPr>
-          <p:cNvPr id="48" name="Shape 46"/>
-          <p:cNvSpPr/>
-          <p:nvPr/>
-        </p:nvSpPr>
-        <p:spPr>
-          <a:xfrm>
-            <a:off x="5254752" y="4169664"/>
-            <a:ext cx="685800" cy="475488"/>
-          </a:xfrm>
-          <a:prstGeom prst="rect">
-            <a:avLst>
-              <a:gd name="adj" fmla="val 7692"/>
-            </a:avLst>
-          </a:prstGeom>
-          <a:solidFill>
-            <a:srgbClr val="FFFFFF"/>
-          </a:solidFill>
-          <a:ln w="12700">
-            <a:solidFill>
-              <a:srgbClr val="DB2777"/>
-            </a:solidFill>
-            <a:prstDash val="solid"/>
-          </a:ln>
-        </p:spPr>
-      </p:sp>
-      <p:sp>
-        <p:nvSpPr>
-          <p:cNvPr id="49" name="Text 47"/>
-          <p:cNvSpPr/>
-          <p:nvPr/>
-        </p:nvSpPr>
-        <p:spPr>
-          <a:xfrm>
-            <a:off x="5254752" y="4169664"/>
-            <a:ext cx="685800" cy="475488"/>
-          </a:xfrm>
-          <a:prstGeom prst="rect">
-            <a:avLst/>
-          </a:prstGeom>
-          <a:noFill/>
-          <a:ln/>
-        </p:spPr>
-        <p:txBody>
-          <a:bodyPr wrap="square" lIns="0" tIns="0" rIns="0" bIns="0" rtlCol="0" anchor="ctr"/>
-          <a:lstStyle/>
-          <a:p>
-            <a:pPr algn="ctr" indent="0" marL="0">
-              <a:buNone/>
-            </a:pPr>
-            <a:r>
-              <a:rPr lang="en-US" sz="900" b="1" dirty="0">
-                <a:solidFill>
-                  <a:srgbClr val="9D174D"/>
-                </a:solidFill>
-                <a:latin typeface="Trebuchet MS" pitchFamily="34" charset="0"/>
-                <a:ea typeface="Trebuchet MS" pitchFamily="34" charset="-122"/>
-                <a:cs typeface="Trebuchet MS" pitchFamily="34" charset="-120"/>
-              </a:rPr>
-              <a:t>s</a:t>
-            </a:r>
-            <a:endParaRPr lang="en-US" sz="900" dirty="0"/>
-          </a:p>
-        </p:txBody>
-      </p:sp>
-      <p:sp>
-        <p:nvSpPr>
-          <p:cNvPr id="50" name="Shape 48"/>
-          <p:cNvSpPr/>
-          <p:nvPr/>
-        </p:nvSpPr>
-        <p:spPr>
-          <a:xfrm>
-            <a:off x="6062472" y="4169664"/>
-            <a:ext cx="685800" cy="475488"/>
-          </a:xfrm>
-          <a:prstGeom prst="rect">
-            <a:avLst>
-              <a:gd name="adj" fmla="val 7692"/>
-            </a:avLst>
-          </a:prstGeom>
-          <a:solidFill>
-            <a:srgbClr val="FFFFFF"/>
-          </a:solidFill>
-          <a:ln w="12700">
-            <a:solidFill>
-              <a:srgbClr val="DB2777"/>
-            </a:solidFill>
-            <a:prstDash val="solid"/>
-          </a:ln>
-        </p:spPr>
-      </p:sp>
-      <p:sp>
-        <p:nvSpPr>
-          <p:cNvPr id="51" name="Text 49"/>
-          <p:cNvSpPr/>
-          <p:nvPr/>
-        </p:nvSpPr>
-        <p:spPr>
-          <a:xfrm>
-            <a:off x="6062472" y="4169664"/>
-            <a:ext cx="685800" cy="475488"/>
-          </a:xfrm>
-          <a:prstGeom prst="rect">
-            <a:avLst/>
-          </a:prstGeom>
-          <a:noFill/>
-          <a:ln/>
-        </p:spPr>
-        <p:txBody>
-          <a:bodyPr wrap="square" lIns="0" tIns="0" rIns="0" bIns="0" rtlCol="0" anchor="ctr"/>
-          <a:lstStyle/>
-          <a:p>
-            <a:pPr algn="ctr" indent="0" marL="0">
-              <a:buNone/>
-            </a:pPr>
-            <a:r>
-              <a:rPr lang="en-US" sz="900" b="1" dirty="0">
-                <a:solidFill>
-                  <a:srgbClr val="9D174D"/>
-                </a:solidFill>
-                <a:latin typeface="Trebuchet MS" pitchFamily="34" charset="0"/>
-                <a:ea typeface="Trebuchet MS" pitchFamily="34" charset="-122"/>
-                <a:cs typeface="Trebuchet MS" pitchFamily="34" charset="-120"/>
-              </a:rPr>
-              <a:t>t</a:t>
-            </a:r>
-            <a:endParaRPr lang="en-US" sz="900" dirty="0"/>
-          </a:p>
-        </p:txBody>
-      </p:sp>
-      <p:sp>
-        <p:nvSpPr>
-          <p:cNvPr id="52" name="Shape 50"/>
-          <p:cNvSpPr/>
-          <p:nvPr/>
-        </p:nvSpPr>
-        <p:spPr>
-          <a:xfrm>
-            <a:off x="6870192" y="4169664"/>
-            <a:ext cx="685800" cy="475488"/>
-          </a:xfrm>
-          <a:prstGeom prst="rect">
-            <a:avLst>
-              <a:gd name="adj" fmla="val 7692"/>
-            </a:avLst>
-          </a:prstGeom>
-          <a:solidFill>
-            <a:srgbClr val="FFFFFF"/>
-          </a:solidFill>
-          <a:ln w="12700">
-            <a:solidFill>
-              <a:srgbClr val="DB2777"/>
-            </a:solidFill>
-            <a:prstDash val="solid"/>
-          </a:ln>
-        </p:spPr>
-      </p:sp>
-      <p:sp>
-        <p:nvSpPr>
-          <p:cNvPr id="53" name="Text 51"/>
-          <p:cNvSpPr/>
-          <p:nvPr/>
-        </p:nvSpPr>
-        <p:spPr>
-          <a:xfrm>
-            <a:off x="6870192" y="4169664"/>
-            <a:ext cx="685800" cy="475488"/>
-          </a:xfrm>
-          <a:prstGeom prst="rect">
-            <a:avLst/>
-          </a:prstGeom>
-          <a:noFill/>
-          <a:ln/>
-        </p:spPr>
-        <p:txBody>
-          <a:bodyPr wrap="square" lIns="0" tIns="0" rIns="0" bIns="0" rtlCol="0" anchor="ctr"/>
-          <a:lstStyle/>
-          <a:p>
-            <a:pPr algn="ctr" indent="0" marL="0">
-              <a:buNone/>
-            </a:pPr>
-            <a:r>
-              <a:rPr lang="en-US" sz="900" b="1" dirty="0">
-                <a:solidFill>
-                  <a:srgbClr val="9D174D"/>
-                </a:solidFill>
-                <a:latin typeface="Trebuchet MS" pitchFamily="34" charset="0"/>
-                <a:ea typeface="Trebuchet MS" pitchFamily="34" charset="-122"/>
-                <a:cs typeface="Trebuchet MS" pitchFamily="34" charset="-120"/>
-              </a:rPr>
-              <a:t>a</a:t>
-            </a:r>
-            <a:endParaRPr lang="en-US" sz="900" dirty="0"/>
-          </a:p>
-        </p:txBody>
-      </p:sp>
-      <p:sp>
-        <p:nvSpPr>
-          <p:cNvPr id="54" name="Shape 52"/>
-          <p:cNvSpPr/>
-          <p:nvPr/>
-        </p:nvSpPr>
-        <p:spPr>
-          <a:xfrm>
-            <a:off x="7677912" y="4169664"/>
-            <a:ext cx="685800" cy="475488"/>
-          </a:xfrm>
-          <a:prstGeom prst="rect">
-            <a:avLst>
-              <a:gd name="adj" fmla="val 7692"/>
-            </a:avLst>
-          </a:prstGeom>
-          <a:solidFill>
-            <a:srgbClr val="FFFFFF"/>
-          </a:solidFill>
-          <a:ln w="12700">
-            <a:solidFill>
-              <a:srgbClr val="DB2777"/>
-            </a:solidFill>
-            <a:prstDash val="solid"/>
-          </a:ln>
-        </p:spPr>
-      </p:sp>
-      <p:sp>
-        <p:nvSpPr>
-          <p:cNvPr id="55" name="Text 53"/>
-          <p:cNvSpPr/>
-          <p:nvPr/>
-        </p:nvSpPr>
-        <p:spPr>
-          <a:xfrm>
-            <a:off x="7677912" y="4169664"/>
-            <a:ext cx="685800" cy="475488"/>
-          </a:xfrm>
-          <a:prstGeom prst="rect">
-            <a:avLst/>
-          </a:prstGeom>
-          <a:noFill/>
-          <a:ln/>
-        </p:spPr>
-        <p:txBody>
-          <a:bodyPr wrap="square" lIns="0" tIns="0" rIns="0" bIns="0" rtlCol="0" anchor="ctr"/>
-          <a:lstStyle/>
-          <a:p>
-            <a:pPr algn="ctr" indent="0" marL="0">
-              <a:buNone/>
-            </a:pPr>
-            <a:r>
-              <a:rPr lang="en-US" sz="900" b="1" dirty="0">
-                <a:solidFill>
-                  <a:srgbClr val="9D174D"/>
-                </a:solidFill>
-                <a:latin typeface="Trebuchet MS" pitchFamily="34" charset="0"/>
-                <a:ea typeface="Trebuchet MS" pitchFamily="34" charset="-122"/>
-                <a:cs typeface="Trebuchet MS" pitchFamily="34" charset="-120"/>
-              </a:rPr>
-              <a:t>t</a:t>
+              <a:t>al</a:t>
             </a:r>
             <a:endParaRPr lang="en-US" sz="900" dirty="0"/>
           </a:p>
@@ -18621,7 +17694,7 @@
                 <a:ea typeface="Calibri" pitchFamily="34" charset="-122"/>
                 <a:cs typeface="Calibri" pitchFamily="34" charset="-120"/>
               </a:rPr>
-              <a:t>During our science lesson, we learned that </a:t>
+              <a:t>The scientist explained that </a:t>
             </a:r>
             <a:pPr algn="l" indent="0" marL="0">
               <a:buNone/>
@@ -18652,7 +17725,7 @@
                 <a:ea typeface="Calibri" pitchFamily="34" charset="-122"/>
                 <a:cs typeface="Calibri" pitchFamily="34" charset="-120"/>
               </a:rPr>
-              <a:t> energy uses Earth's heat, a </a:t>
+              <a:t> energy is </a:t>
             </a:r>
             <a:pPr algn="l" indent="0" marL="0">
               <a:buNone/>
@@ -18669,7 +17742,7 @@
                 <a:ea typeface="Calibri" pitchFamily="34" charset="-122"/>
                 <a:cs typeface="Calibri" pitchFamily="34" charset="-120"/>
               </a:rPr>
-              <a:t>thermometer</a:t>
+              <a:t>endothermic</a:t>
             </a:r>
             <a:pPr algn="l" indent="0" marL="0">
               <a:buNone/>
@@ -18683,7 +17756,7 @@
                 <a:ea typeface="Calibri" pitchFamily="34" charset="-122"/>
                 <a:cs typeface="Calibri" pitchFamily="34" charset="-120"/>
               </a:rPr>
-              <a:t> measures temperature, and </a:t>
+              <a:t>, and she set the </a:t>
             </a:r>
             <a:pPr algn="l" indent="0" marL="0">
               <a:buNone/>
@@ -18700,7 +17773,7 @@
                 <a:ea typeface="Calibri" pitchFamily="34" charset="-122"/>
                 <a:cs typeface="Calibri" pitchFamily="34" charset="-120"/>
               </a:rPr>
-              <a:t>thermal</a:t>
+              <a:t>thermostat</a:t>
             </a:r>
             <a:pPr algn="l" indent="0" marL="0">
               <a:buNone/>
@@ -18714,7 +17787,7 @@
                 <a:ea typeface="Calibri" pitchFamily="34" charset="-122"/>
                 <a:cs typeface="Calibri" pitchFamily="34" charset="-120"/>
               </a:rPr>
-              <a:t> clothing keeps us warm.</a:t>
+              <a:t> to keep the lab at a safe temperature.</a:t>
             </a:r>
             <a:endParaRPr lang="en-US" sz="1800" dirty="0"/>
           </a:p>
@@ -18997,7 +18070,7 @@
                 <a:ea typeface="Trebuchet MS" pitchFamily="34" charset="-122"/>
                 <a:cs typeface="Trebuchet MS" pitchFamily="34" charset="-120"/>
               </a:rPr>
-              <a:t>thermometer</a:t>
+              <a:t>endothermic</a:t>
             </a:r>
             <a:endParaRPr lang="en-US" sz="1400" dirty="0"/>
           </a:p>
@@ -19125,7 +18198,7 @@
                 <a:ea typeface="Trebuchet MS" pitchFamily="34" charset="-122"/>
                 <a:cs typeface="Trebuchet MS" pitchFamily="34" charset="-120"/>
               </a:rPr>
-              <a:t>thermal</a:t>
+              <a:t>thermostat</a:t>
             </a:r>
             <a:endParaRPr lang="en-US" sz="1400" dirty="0"/>
           </a:p>
@@ -24059,7 +23132,7 @@
                 <a:ea typeface="Trebuchet MS" pitchFamily="34" charset="-122"/>
                 <a:cs typeface="Trebuchet MS" pitchFamily="34" charset="-120"/>
               </a:rPr>
-              <a:t>e</a:t>
+              <a:t>ee</a:t>
             </a:r>
             <a:endParaRPr lang="en-US" sz="900" dirty="0"/>
           </a:p>
@@ -24820,7 +23893,7 @@
                 <a:ea typeface="Trebuchet MS" pitchFamily="34" charset="-122"/>
                 <a:cs typeface="Trebuchet MS" pitchFamily="34" charset="-120"/>
               </a:rPr>
-              <a:t>thermometer</a:t>
+              <a:t>endothermic</a:t>
             </a:r>
             <a:endParaRPr lang="en-US" sz="2800" dirty="0"/>
           </a:p>
@@ -25647,7 +24720,7 @@
                 <a:ea typeface="Trebuchet MS" pitchFamily="34" charset="-122"/>
                 <a:cs typeface="Trebuchet MS" pitchFamily="34" charset="-120"/>
               </a:rPr>
-              <a:t>thermometer</a:t>
+              <a:t>endothermic</a:t>
             </a:r>
             <a:endParaRPr lang="en-US" sz="2800" dirty="0"/>
           </a:p>
@@ -25736,11 +24809,11 @@
             </a:avLst>
           </a:prstGeom>
           <a:solidFill>
-            <a:srgbClr val="CCFBF1"/>
+            <a:srgbClr val="DDD6FE"/>
           </a:solidFill>
           <a:ln w="19050">
             <a:solidFill>
-              <a:srgbClr val="0D9488"/>
+              <a:srgbClr val="7C3AED"/>
             </a:solidFill>
             <a:prstDash val="solid"/>
           </a:ln>
@@ -25780,13 +24853,13 @@
             <a:r>
               <a:rPr lang="en-US" sz="1300" b="1" dirty="0">
                 <a:solidFill>
-                  <a:srgbClr val="0F766E"/>
+                  <a:srgbClr val="4C1D95"/>
                 </a:solidFill>
                 <a:latin typeface="Trebuchet MS" pitchFamily="34" charset="0"/>
                 <a:ea typeface="Trebuchet MS" pitchFamily="34" charset="-122"/>
                 <a:cs typeface="Trebuchet MS" pitchFamily="34" charset="-120"/>
               </a:rPr>
-              <a:t>therm</a:t>
+              <a:t>endo</a:t>
             </a:r>
             <a:endParaRPr lang="en-US" sz="1300" dirty="0"/>
           </a:p>
@@ -25825,7 +24898,7 @@
                 <a:ea typeface="Calibri" pitchFamily="34" charset="-122"/>
                 <a:cs typeface="Calibri" pitchFamily="34" charset="-120"/>
               </a:rPr>
-              <a:t>heat</a:t>
+              <a:t>within, inside</a:t>
             </a:r>
             <a:endParaRPr lang="en-US" sz="850" dirty="0"/>
           </a:p>
@@ -25848,11 +24921,11 @@
             </a:avLst>
           </a:prstGeom>
           <a:solidFill>
-            <a:srgbClr val="FCE7F3"/>
+            <a:srgbClr val="CCFBF1"/>
           </a:solidFill>
           <a:ln w="19050">
             <a:solidFill>
-              <a:srgbClr val="DB2777"/>
+              <a:srgbClr val="0D9488"/>
             </a:solidFill>
             <a:prstDash val="solid"/>
           </a:ln>
@@ -25892,13 +24965,13 @@
             <a:r>
               <a:rPr lang="en-US" sz="1300" b="1" dirty="0">
                 <a:solidFill>
-                  <a:srgbClr val="9D174D"/>
+                  <a:srgbClr val="0F766E"/>
                 </a:solidFill>
                 <a:latin typeface="Trebuchet MS" pitchFamily="34" charset="0"/>
                 <a:ea typeface="Trebuchet MS" pitchFamily="34" charset="-122"/>
                 <a:cs typeface="Trebuchet MS" pitchFamily="34" charset="-120"/>
               </a:rPr>
-              <a:t>o</a:t>
+              <a:t>therm</a:t>
             </a:r>
             <a:endParaRPr lang="en-US" sz="1300" dirty="0"/>
           </a:p>
@@ -25937,7 +25010,7 @@
                 <a:ea typeface="Calibri" pitchFamily="34" charset="-122"/>
                 <a:cs typeface="Calibri" pitchFamily="34" charset="-120"/>
               </a:rPr>
-              <a:t>connecting vowel</a:t>
+              <a:t>heat</a:t>
             </a:r>
             <a:endParaRPr lang="en-US" sz="850" dirty="0"/>
           </a:p>
@@ -25945,46 +25018,7 @@
       </p:sp>
       <p:sp>
         <p:nvSpPr>
-          <p:cNvPr id="22" name="Text 20"/>
-          <p:cNvSpPr/>
-          <p:nvPr/>
-        </p:nvSpPr>
-        <p:spPr>
-          <a:xfrm>
-            <a:off x="4370832" y="2752344"/>
-            <a:ext cx="1828800" cy="182880"/>
-          </a:xfrm>
-          <a:prstGeom prst="rect">
-            <a:avLst/>
-          </a:prstGeom>
-          <a:noFill/>
-          <a:ln/>
-        </p:spPr>
-        <p:txBody>
-          <a:bodyPr wrap="square" lIns="0" tIns="0" rIns="0" bIns="0" rtlCol="0" anchor="t"/>
-          <a:lstStyle/>
-          <a:p>
-            <a:pPr algn="ctr" indent="0" marL="0">
-              <a:buNone/>
-            </a:pPr>
-            <a:r>
-              <a:rPr lang="en-US" sz="700" i="1" dirty="0">
-                <a:solidFill>
-                  <a:srgbClr val="94A3B8"/>
-                </a:solidFill>
-                <a:latin typeface="Calibri" pitchFamily="34" charset="0"/>
-                <a:ea typeface="Calibri" pitchFamily="34" charset="-122"/>
-                <a:cs typeface="Calibri" pitchFamily="34" charset="-120"/>
-              </a:rPr>
-              <a:t>links base to suffix</a:t>
-            </a:r>
-            <a:endParaRPr lang="en-US" sz="700" dirty="0"/>
-          </a:p>
-        </p:txBody>
-      </p:sp>
-      <p:sp>
-        <p:nvSpPr>
-          <p:cNvPr id="23" name="Shape 21"/>
+          <p:cNvPr id="22" name="Shape 20"/>
           <p:cNvSpPr/>
           <p:nvPr/>
         </p:nvSpPr>
@@ -26018,7 +25052,7 @@
       </p:sp>
       <p:sp>
         <p:nvSpPr>
-          <p:cNvPr id="24" name="Text 22"/>
+          <p:cNvPr id="23" name="Text 21"/>
           <p:cNvSpPr/>
           <p:nvPr/>
         </p:nvSpPr>
@@ -26049,7 +25083,7 @@
                 <a:ea typeface="Trebuchet MS" pitchFamily="34" charset="-122"/>
                 <a:cs typeface="Trebuchet MS" pitchFamily="34" charset="-120"/>
               </a:rPr>
-              <a:t>meter</a:t>
+              <a:t>ic</a:t>
             </a:r>
             <a:endParaRPr lang="en-US" sz="1300" dirty="0"/>
           </a:p>
@@ -26057,7 +25091,7 @@
       </p:sp>
       <p:sp>
         <p:nvSpPr>
-          <p:cNvPr id="25" name="Text 23"/>
+          <p:cNvPr id="24" name="Text 22"/>
           <p:cNvSpPr/>
           <p:nvPr/>
         </p:nvSpPr>
@@ -26088,7 +25122,7 @@
                 <a:ea typeface="Calibri" pitchFamily="34" charset="-122"/>
                 <a:cs typeface="Calibri" pitchFamily="34" charset="-120"/>
               </a:rPr>
-              <a:t>measuring tool</a:t>
+              <a:t>relating to, having the quality of</a:t>
             </a:r>
             <a:endParaRPr lang="en-US" sz="850" dirty="0"/>
           </a:p>
@@ -26096,7 +25130,7 @@
       </p:sp>
       <p:sp>
         <p:nvSpPr>
-          <p:cNvPr id="26" name="Shape 24"/>
+          <p:cNvPr id="25" name="Shape 23"/>
           <p:cNvSpPr/>
           <p:nvPr/>
         </p:nvSpPr>
@@ -26123,7 +25157,7 @@
       </p:sp>
       <p:sp>
         <p:nvSpPr>
-          <p:cNvPr id="27" name="Text 25"/>
+          <p:cNvPr id="26" name="Text 24"/>
           <p:cNvSpPr/>
           <p:nvPr/>
         </p:nvSpPr>
@@ -26162,7 +25196,7 @@
       </p:sp>
       <p:sp>
         <p:nvSpPr>
-          <p:cNvPr id="28" name="Shape 26"/>
+          <p:cNvPr id="27" name="Shape 25"/>
           <p:cNvSpPr/>
           <p:nvPr/>
         </p:nvSpPr>
@@ -26189,7 +25223,7 @@
       </p:sp>
       <p:sp>
         <p:nvSpPr>
-          <p:cNvPr id="29" name="Text 27"/>
+          <p:cNvPr id="28" name="Text 26"/>
           <p:cNvSpPr/>
           <p:nvPr/>
         </p:nvSpPr>
@@ -26228,7 +25262,7 @@
       </p:sp>
       <p:sp>
         <p:nvSpPr>
-          <p:cNvPr id="30" name="Shape 28"/>
+          <p:cNvPr id="29" name="Shape 27"/>
           <p:cNvSpPr/>
           <p:nvPr/>
         </p:nvSpPr>
@@ -26255,7 +25289,7 @@
       </p:sp>
       <p:sp>
         <p:nvSpPr>
-          <p:cNvPr id="31" name="Text 29"/>
+          <p:cNvPr id="30" name="Text 28"/>
           <p:cNvSpPr/>
           <p:nvPr/>
         </p:nvSpPr>
@@ -26294,7 +25328,7 @@
       </p:sp>
       <p:sp>
         <p:nvSpPr>
-          <p:cNvPr id="32" name="Shape 30"/>
+          <p:cNvPr id="31" name="Shape 29"/>
           <p:cNvSpPr/>
           <p:nvPr/>
         </p:nvSpPr>
@@ -26321,7 +25355,7 @@
       </p:sp>
       <p:sp>
         <p:nvSpPr>
-          <p:cNvPr id="33" name="Text 31"/>
+          <p:cNvPr id="32" name="Text 30"/>
           <p:cNvSpPr/>
           <p:nvPr/>
         </p:nvSpPr>
@@ -27502,7 +26536,7 @@
                 <a:ea typeface="Trebuchet MS" pitchFamily="34" charset="-122"/>
                 <a:cs typeface="Trebuchet MS" pitchFamily="34" charset="-120"/>
               </a:rPr>
-              <a:t>thermometer</a:t>
+              <a:t>endothermic</a:t>
             </a:r>
             <a:endParaRPr lang="en-US" sz="2800" dirty="0"/>
           </a:p>
@@ -27591,11 +26625,11 @@
             </a:avLst>
           </a:prstGeom>
           <a:solidFill>
-            <a:srgbClr val="CCFBF1"/>
+            <a:srgbClr val="DDD6FE"/>
           </a:solidFill>
           <a:ln w="19050">
             <a:solidFill>
-              <a:srgbClr val="0D9488"/>
+              <a:srgbClr val="7C3AED"/>
             </a:solidFill>
             <a:prstDash val="solid"/>
           </a:ln>
@@ -27635,13 +26669,13 @@
             <a:r>
               <a:rPr lang="en-US" sz="1300" b="1" dirty="0">
                 <a:solidFill>
-                  <a:srgbClr val="0F766E"/>
+                  <a:srgbClr val="4C1D95"/>
                 </a:solidFill>
                 <a:latin typeface="Trebuchet MS" pitchFamily="34" charset="0"/>
                 <a:ea typeface="Trebuchet MS" pitchFamily="34" charset="-122"/>
                 <a:cs typeface="Trebuchet MS" pitchFamily="34" charset="-120"/>
               </a:rPr>
-              <a:t>therm</a:t>
+              <a:t>endo</a:t>
             </a:r>
             <a:endParaRPr lang="en-US" sz="1300" dirty="0"/>
           </a:p>
@@ -27680,7 +26714,7 @@
                 <a:ea typeface="Calibri" pitchFamily="34" charset="-122"/>
                 <a:cs typeface="Calibri" pitchFamily="34" charset="-120"/>
               </a:rPr>
-              <a:t>heat</a:t>
+              <a:t>within, inside</a:t>
             </a:r>
             <a:endParaRPr lang="en-US" sz="850" dirty="0"/>
           </a:p>
@@ -27703,11 +26737,11 @@
             </a:avLst>
           </a:prstGeom>
           <a:solidFill>
-            <a:srgbClr val="FCE7F3"/>
+            <a:srgbClr val="CCFBF1"/>
           </a:solidFill>
           <a:ln w="19050">
             <a:solidFill>
-              <a:srgbClr val="DB2777"/>
+              <a:srgbClr val="0D9488"/>
             </a:solidFill>
             <a:prstDash val="solid"/>
           </a:ln>
@@ -27747,13 +26781,13 @@
             <a:r>
               <a:rPr lang="en-US" sz="1300" b="1" dirty="0">
                 <a:solidFill>
-                  <a:srgbClr val="9D174D"/>
+                  <a:srgbClr val="0F766E"/>
                 </a:solidFill>
                 <a:latin typeface="Trebuchet MS" pitchFamily="34" charset="0"/>
                 <a:ea typeface="Trebuchet MS" pitchFamily="34" charset="-122"/>
                 <a:cs typeface="Trebuchet MS" pitchFamily="34" charset="-120"/>
               </a:rPr>
-              <a:t>o</a:t>
+              <a:t>therm</a:t>
             </a:r>
             <a:endParaRPr lang="en-US" sz="1300" dirty="0"/>
           </a:p>
@@ -27792,7 +26826,7 @@
                 <a:ea typeface="Calibri" pitchFamily="34" charset="-122"/>
                 <a:cs typeface="Calibri" pitchFamily="34" charset="-120"/>
               </a:rPr>
-              <a:t>connecting vowel</a:t>
+              <a:t>heat</a:t>
             </a:r>
             <a:endParaRPr lang="en-US" sz="850" dirty="0"/>
           </a:p>
@@ -27800,46 +26834,7 @@
       </p:sp>
       <p:sp>
         <p:nvSpPr>
-          <p:cNvPr id="22" name="Text 20"/>
-          <p:cNvSpPr/>
-          <p:nvPr/>
-        </p:nvSpPr>
-        <p:spPr>
-          <a:xfrm>
-            <a:off x="4370832" y="2752344"/>
-            <a:ext cx="1828800" cy="182880"/>
-          </a:xfrm>
-          <a:prstGeom prst="rect">
-            <a:avLst/>
-          </a:prstGeom>
-          <a:noFill/>
-          <a:ln/>
-        </p:spPr>
-        <p:txBody>
-          <a:bodyPr wrap="square" lIns="0" tIns="0" rIns="0" bIns="0" rtlCol="0" anchor="t"/>
-          <a:lstStyle/>
-          <a:p>
-            <a:pPr algn="ctr" indent="0" marL="0">
-              <a:buNone/>
-            </a:pPr>
-            <a:r>
-              <a:rPr lang="en-US" sz="700" i="1" dirty="0">
-                <a:solidFill>
-                  <a:srgbClr val="94A3B8"/>
-                </a:solidFill>
-                <a:latin typeface="Calibri" pitchFamily="34" charset="0"/>
-                <a:ea typeface="Calibri" pitchFamily="34" charset="-122"/>
-                <a:cs typeface="Calibri" pitchFamily="34" charset="-120"/>
-              </a:rPr>
-              <a:t>links base to suffix</a:t>
-            </a:r>
-            <a:endParaRPr lang="en-US" sz="700" dirty="0"/>
-          </a:p>
-        </p:txBody>
-      </p:sp>
-      <p:sp>
-        <p:nvSpPr>
-          <p:cNvPr id="23" name="Shape 21"/>
+          <p:cNvPr id="22" name="Shape 20"/>
           <p:cNvSpPr/>
           <p:nvPr/>
         </p:nvSpPr>
@@ -27873,7 +26868,7 @@
       </p:sp>
       <p:sp>
         <p:nvSpPr>
-          <p:cNvPr id="24" name="Text 22"/>
+          <p:cNvPr id="23" name="Text 21"/>
           <p:cNvSpPr/>
           <p:nvPr/>
         </p:nvSpPr>
@@ -27904,7 +26899,7 @@
                 <a:ea typeface="Trebuchet MS" pitchFamily="34" charset="-122"/>
                 <a:cs typeface="Trebuchet MS" pitchFamily="34" charset="-120"/>
               </a:rPr>
-              <a:t>meter</a:t>
+              <a:t>ic</a:t>
             </a:r>
             <a:endParaRPr lang="en-US" sz="1300" dirty="0"/>
           </a:p>
@@ -27912,7 +26907,7 @@
       </p:sp>
       <p:sp>
         <p:nvSpPr>
-          <p:cNvPr id="25" name="Text 23"/>
+          <p:cNvPr id="24" name="Text 22"/>
           <p:cNvSpPr/>
           <p:nvPr/>
         </p:nvSpPr>
@@ -27943,7 +26938,7 @@
                 <a:ea typeface="Calibri" pitchFamily="34" charset="-122"/>
                 <a:cs typeface="Calibri" pitchFamily="34" charset="-120"/>
               </a:rPr>
-              <a:t>measuring tool</a:t>
+              <a:t>relating to, having the quality of</a:t>
             </a:r>
             <a:endParaRPr lang="en-US" sz="850" dirty="0"/>
           </a:p>
@@ -27951,7 +26946,7 @@
       </p:sp>
       <p:sp>
         <p:nvSpPr>
-          <p:cNvPr id="26" name="Shape 24"/>
+          <p:cNvPr id="25" name="Shape 23"/>
           <p:cNvSpPr/>
           <p:nvPr/>
         </p:nvSpPr>
@@ -27978,7 +26973,7 @@
       </p:sp>
       <p:sp>
         <p:nvSpPr>
-          <p:cNvPr id="27" name="Text 25"/>
+          <p:cNvPr id="26" name="Text 24"/>
           <p:cNvSpPr/>
           <p:nvPr/>
         </p:nvSpPr>
@@ -28017,7 +27012,7 @@
       </p:sp>
       <p:sp>
         <p:nvSpPr>
-          <p:cNvPr id="28" name="Shape 26"/>
+          <p:cNvPr id="27" name="Shape 25"/>
           <p:cNvSpPr/>
           <p:nvPr/>
         </p:nvSpPr>
@@ -28044,7 +27039,7 @@
       </p:sp>
       <p:sp>
         <p:nvSpPr>
-          <p:cNvPr id="29" name="Shape 27"/>
+          <p:cNvPr id="28" name="Shape 26"/>
           <p:cNvSpPr/>
           <p:nvPr/>
         </p:nvSpPr>
@@ -28071,7 +27066,7 @@
       </p:sp>
       <p:sp>
         <p:nvSpPr>
-          <p:cNvPr id="30" name="Text 28"/>
+          <p:cNvPr id="29" name="Text 27"/>
           <p:cNvSpPr/>
           <p:nvPr/>
         </p:nvSpPr>
@@ -28102,7 +27097,7 @@
                 <a:ea typeface="Trebuchet MS" pitchFamily="34" charset="-122"/>
                 <a:cs typeface="Trebuchet MS" pitchFamily="34" charset="-120"/>
               </a:rPr>
-              <a:t>ther</a:t>
+              <a:t>en</a:t>
             </a:r>
             <a:endParaRPr lang="en-US" sz="1400" dirty="0"/>
           </a:p>
@@ -28110,7 +27105,7 @@
       </p:sp>
       <p:sp>
         <p:nvSpPr>
-          <p:cNvPr id="31" name="Text 29"/>
+          <p:cNvPr id="30" name="Text 28"/>
           <p:cNvSpPr/>
           <p:nvPr/>
         </p:nvSpPr>
@@ -28149,7 +27144,7 @@
       </p:sp>
       <p:sp>
         <p:nvSpPr>
-          <p:cNvPr id="32" name="Shape 30"/>
+          <p:cNvPr id="31" name="Shape 29"/>
           <p:cNvSpPr/>
           <p:nvPr/>
         </p:nvSpPr>
@@ -28176,7 +27171,7 @@
       </p:sp>
       <p:sp>
         <p:nvSpPr>
-          <p:cNvPr id="33" name="Text 31"/>
+          <p:cNvPr id="32" name="Text 30"/>
           <p:cNvSpPr/>
           <p:nvPr/>
         </p:nvSpPr>
@@ -28207,7 +27202,7 @@
                 <a:ea typeface="Trebuchet MS" pitchFamily="34" charset="-122"/>
                 <a:cs typeface="Trebuchet MS" pitchFamily="34" charset="-120"/>
               </a:rPr>
-              <a:t>mo</a:t>
+              <a:t>do</a:t>
             </a:r>
             <a:endParaRPr lang="en-US" sz="1400" dirty="0"/>
           </a:p>
@@ -28215,7 +27210,7 @@
       </p:sp>
       <p:sp>
         <p:nvSpPr>
-          <p:cNvPr id="34" name="Text 32"/>
+          <p:cNvPr id="33" name="Text 31"/>
           <p:cNvSpPr/>
           <p:nvPr/>
         </p:nvSpPr>
@@ -28254,7 +27249,7 @@
       </p:sp>
       <p:sp>
         <p:nvSpPr>
-          <p:cNvPr id="35" name="Shape 33"/>
+          <p:cNvPr id="34" name="Shape 32"/>
           <p:cNvSpPr/>
           <p:nvPr/>
         </p:nvSpPr>
@@ -28281,7 +27276,7 @@
       </p:sp>
       <p:sp>
         <p:nvSpPr>
-          <p:cNvPr id="36" name="Text 34"/>
+          <p:cNvPr id="35" name="Text 33"/>
           <p:cNvSpPr/>
           <p:nvPr/>
         </p:nvSpPr>
@@ -28312,7 +27307,7 @@
                 <a:ea typeface="Trebuchet MS" pitchFamily="34" charset="-122"/>
                 <a:cs typeface="Trebuchet MS" pitchFamily="34" charset="-120"/>
               </a:rPr>
-              <a:t>me</a:t>
+              <a:t>ther</a:t>
             </a:r>
             <a:endParaRPr lang="en-US" sz="1400" dirty="0"/>
           </a:p>
@@ -28320,7 +27315,7 @@
       </p:sp>
       <p:sp>
         <p:nvSpPr>
-          <p:cNvPr id="37" name="Text 35"/>
+          <p:cNvPr id="36" name="Text 34"/>
           <p:cNvSpPr/>
           <p:nvPr/>
         </p:nvSpPr>
@@ -28359,7 +27354,7 @@
       </p:sp>
       <p:sp>
         <p:nvSpPr>
-          <p:cNvPr id="38" name="Shape 36"/>
+          <p:cNvPr id="37" name="Shape 35"/>
           <p:cNvSpPr/>
           <p:nvPr/>
         </p:nvSpPr>
@@ -28386,7 +27381,7 @@
       </p:sp>
       <p:sp>
         <p:nvSpPr>
-          <p:cNvPr id="39" name="Text 37"/>
+          <p:cNvPr id="38" name="Text 36"/>
           <p:cNvSpPr/>
           <p:nvPr/>
         </p:nvSpPr>
@@ -28417,7 +27412,7 @@
                 <a:ea typeface="Trebuchet MS" pitchFamily="34" charset="-122"/>
                 <a:cs typeface="Trebuchet MS" pitchFamily="34" charset="-120"/>
               </a:rPr>
-              <a:t>ter</a:t>
+              <a:t>mic</a:t>
             </a:r>
             <a:endParaRPr lang="en-US" sz="1400" dirty="0"/>
           </a:p>
@@ -28425,7 +27420,7 @@
       </p:sp>
       <p:sp>
         <p:nvSpPr>
-          <p:cNvPr id="40" name="Shape 38"/>
+          <p:cNvPr id="39" name="Shape 37"/>
           <p:cNvSpPr/>
           <p:nvPr/>
         </p:nvSpPr>
@@ -28452,7 +27447,7 @@
       </p:sp>
       <p:sp>
         <p:nvSpPr>
-          <p:cNvPr id="41" name="Text 39"/>
+          <p:cNvPr id="40" name="Text 38"/>
           <p:cNvSpPr/>
           <p:nvPr/>
         </p:nvSpPr>
@@ -28491,7 +27486,7 @@
       </p:sp>
       <p:sp>
         <p:nvSpPr>
-          <p:cNvPr id="42" name="Shape 40"/>
+          <p:cNvPr id="41" name="Shape 39"/>
           <p:cNvSpPr/>
           <p:nvPr/>
         </p:nvSpPr>
@@ -28518,7 +27513,7 @@
       </p:sp>
       <p:sp>
         <p:nvSpPr>
-          <p:cNvPr id="43" name="Text 41"/>
+          <p:cNvPr id="42" name="Text 40"/>
           <p:cNvSpPr/>
           <p:nvPr/>
         </p:nvSpPr>
@@ -28980,7 +27975,7 @@
                 <a:ea typeface="Trebuchet MS" pitchFamily="34" charset="-122"/>
                 <a:cs typeface="Trebuchet MS" pitchFamily="34" charset="-120"/>
               </a:rPr>
-              <a:t>thermometer</a:t>
+              <a:t>endothermic</a:t>
             </a:r>
             <a:endParaRPr lang="en-US" sz="2800" dirty="0"/>
           </a:p>
@@ -29069,11 +28064,11 @@
             </a:avLst>
           </a:prstGeom>
           <a:solidFill>
-            <a:srgbClr val="CCFBF1"/>
+            <a:srgbClr val="DDD6FE"/>
           </a:solidFill>
           <a:ln w="19050">
             <a:solidFill>
-              <a:srgbClr val="0D9488"/>
+              <a:srgbClr val="7C3AED"/>
             </a:solidFill>
             <a:prstDash val="solid"/>
           </a:ln>
@@ -29113,13 +28108,13 @@
             <a:r>
               <a:rPr lang="en-US" sz="1300" b="1" dirty="0">
                 <a:solidFill>
-                  <a:srgbClr val="0F766E"/>
+                  <a:srgbClr val="4C1D95"/>
                 </a:solidFill>
                 <a:latin typeface="Trebuchet MS" pitchFamily="34" charset="0"/>
                 <a:ea typeface="Trebuchet MS" pitchFamily="34" charset="-122"/>
                 <a:cs typeface="Trebuchet MS" pitchFamily="34" charset="-120"/>
               </a:rPr>
-              <a:t>therm</a:t>
+              <a:t>endo</a:t>
             </a:r>
             <a:endParaRPr lang="en-US" sz="1300" dirty="0"/>
           </a:p>
@@ -29158,7 +28153,7 @@
                 <a:ea typeface="Calibri" pitchFamily="34" charset="-122"/>
                 <a:cs typeface="Calibri" pitchFamily="34" charset="-120"/>
               </a:rPr>
-              <a:t>heat</a:t>
+              <a:t>within, inside</a:t>
             </a:r>
             <a:endParaRPr lang="en-US" sz="850" dirty="0"/>
           </a:p>
@@ -29181,11 +28176,11 @@
             </a:avLst>
           </a:prstGeom>
           <a:solidFill>
-            <a:srgbClr val="FCE7F3"/>
+            <a:srgbClr val="CCFBF1"/>
           </a:solidFill>
           <a:ln w="19050">
             <a:solidFill>
-              <a:srgbClr val="DB2777"/>
+              <a:srgbClr val="0D9488"/>
             </a:solidFill>
             <a:prstDash val="solid"/>
           </a:ln>
@@ -29225,13 +28220,13 @@
             <a:r>
               <a:rPr lang="en-US" sz="1300" b="1" dirty="0">
                 <a:solidFill>
-                  <a:srgbClr val="9D174D"/>
+                  <a:srgbClr val="0F766E"/>
                 </a:solidFill>
                 <a:latin typeface="Trebuchet MS" pitchFamily="34" charset="0"/>
                 <a:ea typeface="Trebuchet MS" pitchFamily="34" charset="-122"/>
                 <a:cs typeface="Trebuchet MS" pitchFamily="34" charset="-120"/>
               </a:rPr>
-              <a:t>o</a:t>
+              <a:t>therm</a:t>
             </a:r>
             <a:endParaRPr lang="en-US" sz="1300" dirty="0"/>
           </a:p>
@@ -29270,7 +28265,7 @@
                 <a:ea typeface="Calibri" pitchFamily="34" charset="-122"/>
                 <a:cs typeface="Calibri" pitchFamily="34" charset="-120"/>
               </a:rPr>
-              <a:t>connecting vowel</a:t>
+              <a:t>heat</a:t>
             </a:r>
             <a:endParaRPr lang="en-US" sz="850" dirty="0"/>
           </a:p>
@@ -29278,46 +28273,7 @@
       </p:sp>
       <p:sp>
         <p:nvSpPr>
-          <p:cNvPr id="22" name="Text 20"/>
-          <p:cNvSpPr/>
-          <p:nvPr/>
-        </p:nvSpPr>
-        <p:spPr>
-          <a:xfrm>
-            <a:off x="4370832" y="2752344"/>
-            <a:ext cx="1828800" cy="182880"/>
-          </a:xfrm>
-          <a:prstGeom prst="rect">
-            <a:avLst/>
-          </a:prstGeom>
-          <a:noFill/>
-          <a:ln/>
-        </p:spPr>
-        <p:txBody>
-          <a:bodyPr wrap="square" lIns="0" tIns="0" rIns="0" bIns="0" rtlCol="0" anchor="t"/>
-          <a:lstStyle/>
-          <a:p>
-            <a:pPr algn="ctr" indent="0" marL="0">
-              <a:buNone/>
-            </a:pPr>
-            <a:r>
-              <a:rPr lang="en-US" sz="700" i="1" dirty="0">
-                <a:solidFill>
-                  <a:srgbClr val="94A3B8"/>
-                </a:solidFill>
-                <a:latin typeface="Calibri" pitchFamily="34" charset="0"/>
-                <a:ea typeface="Calibri" pitchFamily="34" charset="-122"/>
-                <a:cs typeface="Calibri" pitchFamily="34" charset="-120"/>
-              </a:rPr>
-              <a:t>links base to suffix</a:t>
-            </a:r>
-            <a:endParaRPr lang="en-US" sz="700" dirty="0"/>
-          </a:p>
-        </p:txBody>
-      </p:sp>
-      <p:sp>
-        <p:nvSpPr>
-          <p:cNvPr id="23" name="Shape 21"/>
+          <p:cNvPr id="22" name="Shape 20"/>
           <p:cNvSpPr/>
           <p:nvPr/>
         </p:nvSpPr>
@@ -29351,7 +28307,7 @@
       </p:sp>
       <p:sp>
         <p:nvSpPr>
-          <p:cNvPr id="24" name="Text 22"/>
+          <p:cNvPr id="23" name="Text 21"/>
           <p:cNvSpPr/>
           <p:nvPr/>
         </p:nvSpPr>
@@ -29382,7 +28338,7 @@
                 <a:ea typeface="Trebuchet MS" pitchFamily="34" charset="-122"/>
                 <a:cs typeface="Trebuchet MS" pitchFamily="34" charset="-120"/>
               </a:rPr>
-              <a:t>meter</a:t>
+              <a:t>ic</a:t>
             </a:r>
             <a:endParaRPr lang="en-US" sz="1300" dirty="0"/>
           </a:p>
@@ -29390,7 +28346,7 @@
       </p:sp>
       <p:sp>
         <p:nvSpPr>
-          <p:cNvPr id="25" name="Text 23"/>
+          <p:cNvPr id="24" name="Text 22"/>
           <p:cNvSpPr/>
           <p:nvPr/>
         </p:nvSpPr>
@@ -29421,7 +28377,7 @@
                 <a:ea typeface="Calibri" pitchFamily="34" charset="-122"/>
                 <a:cs typeface="Calibri" pitchFamily="34" charset="-120"/>
               </a:rPr>
-              <a:t>measuring tool</a:t>
+              <a:t>relating to, having the quality of</a:t>
             </a:r>
             <a:endParaRPr lang="en-US" sz="850" dirty="0"/>
           </a:p>
@@ -29429,7 +28385,7 @@
       </p:sp>
       <p:sp>
         <p:nvSpPr>
-          <p:cNvPr id="26" name="Shape 24"/>
+          <p:cNvPr id="25" name="Shape 23"/>
           <p:cNvSpPr/>
           <p:nvPr/>
         </p:nvSpPr>
@@ -29456,7 +28412,7 @@
       </p:sp>
       <p:sp>
         <p:nvSpPr>
-          <p:cNvPr id="27" name="Text 25"/>
+          <p:cNvPr id="26" name="Text 24"/>
           <p:cNvSpPr/>
           <p:nvPr/>
         </p:nvSpPr>
@@ -29495,7 +28451,7 @@
       </p:sp>
       <p:sp>
         <p:nvSpPr>
-          <p:cNvPr id="28" name="Shape 26"/>
+          <p:cNvPr id="27" name="Shape 25"/>
           <p:cNvSpPr/>
           <p:nvPr/>
         </p:nvSpPr>
@@ -29522,7 +28478,7 @@
       </p:sp>
       <p:sp>
         <p:nvSpPr>
-          <p:cNvPr id="29" name="Shape 27"/>
+          <p:cNvPr id="28" name="Shape 26"/>
           <p:cNvSpPr/>
           <p:nvPr/>
         </p:nvSpPr>
@@ -29549,7 +28505,7 @@
       </p:sp>
       <p:sp>
         <p:nvSpPr>
-          <p:cNvPr id="30" name="Text 28"/>
+          <p:cNvPr id="29" name="Text 27"/>
           <p:cNvSpPr/>
           <p:nvPr/>
         </p:nvSpPr>
@@ -29580,7 +28536,7 @@
                 <a:ea typeface="Trebuchet MS" pitchFamily="34" charset="-122"/>
                 <a:cs typeface="Trebuchet MS" pitchFamily="34" charset="-120"/>
               </a:rPr>
-              <a:t>ther</a:t>
+              <a:t>en</a:t>
             </a:r>
             <a:endParaRPr lang="en-US" sz="1400" dirty="0"/>
           </a:p>
@@ -29588,7 +28544,7 @@
       </p:sp>
       <p:sp>
         <p:nvSpPr>
-          <p:cNvPr id="31" name="Text 29"/>
+          <p:cNvPr id="30" name="Text 28"/>
           <p:cNvSpPr/>
           <p:nvPr/>
         </p:nvSpPr>
@@ -29627,7 +28583,7 @@
       </p:sp>
       <p:sp>
         <p:nvSpPr>
-          <p:cNvPr id="32" name="Shape 30"/>
+          <p:cNvPr id="31" name="Shape 29"/>
           <p:cNvSpPr/>
           <p:nvPr/>
         </p:nvSpPr>
@@ -29654,7 +28610,7 @@
       </p:sp>
       <p:sp>
         <p:nvSpPr>
-          <p:cNvPr id="33" name="Text 31"/>
+          <p:cNvPr id="32" name="Text 30"/>
           <p:cNvSpPr/>
           <p:nvPr/>
         </p:nvSpPr>
@@ -29685,7 +28641,7 @@
                 <a:ea typeface="Trebuchet MS" pitchFamily="34" charset="-122"/>
                 <a:cs typeface="Trebuchet MS" pitchFamily="34" charset="-120"/>
               </a:rPr>
-              <a:t>mo</a:t>
+              <a:t>do</a:t>
             </a:r>
             <a:endParaRPr lang="en-US" sz="1400" dirty="0"/>
           </a:p>
@@ -29693,7 +28649,7 @@
       </p:sp>
       <p:sp>
         <p:nvSpPr>
-          <p:cNvPr id="34" name="Text 32"/>
+          <p:cNvPr id="33" name="Text 31"/>
           <p:cNvSpPr/>
           <p:nvPr/>
         </p:nvSpPr>
@@ -29732,7 +28688,7 @@
       </p:sp>
       <p:sp>
         <p:nvSpPr>
-          <p:cNvPr id="35" name="Shape 33"/>
+          <p:cNvPr id="34" name="Shape 32"/>
           <p:cNvSpPr/>
           <p:nvPr/>
         </p:nvSpPr>
@@ -29759,7 +28715,7 @@
       </p:sp>
       <p:sp>
         <p:nvSpPr>
-          <p:cNvPr id="36" name="Text 34"/>
+          <p:cNvPr id="35" name="Text 33"/>
           <p:cNvSpPr/>
           <p:nvPr/>
         </p:nvSpPr>
@@ -29790,7 +28746,7 @@
                 <a:ea typeface="Trebuchet MS" pitchFamily="34" charset="-122"/>
                 <a:cs typeface="Trebuchet MS" pitchFamily="34" charset="-120"/>
               </a:rPr>
-              <a:t>me</a:t>
+              <a:t>ther</a:t>
             </a:r>
             <a:endParaRPr lang="en-US" sz="1400" dirty="0"/>
           </a:p>
@@ -29798,7 +28754,7 @@
       </p:sp>
       <p:sp>
         <p:nvSpPr>
-          <p:cNvPr id="37" name="Text 35"/>
+          <p:cNvPr id="36" name="Text 34"/>
           <p:cNvSpPr/>
           <p:nvPr/>
         </p:nvSpPr>
@@ -29837,7 +28793,7 @@
       </p:sp>
       <p:sp>
         <p:nvSpPr>
-          <p:cNvPr id="38" name="Shape 36"/>
+          <p:cNvPr id="37" name="Shape 35"/>
           <p:cNvSpPr/>
           <p:nvPr/>
         </p:nvSpPr>
@@ -29864,7 +28820,7 @@
       </p:sp>
       <p:sp>
         <p:nvSpPr>
-          <p:cNvPr id="39" name="Text 37"/>
+          <p:cNvPr id="38" name="Text 36"/>
           <p:cNvSpPr/>
           <p:nvPr/>
         </p:nvSpPr>
@@ -29895,7 +28851,7 @@
                 <a:ea typeface="Trebuchet MS" pitchFamily="34" charset="-122"/>
                 <a:cs typeface="Trebuchet MS" pitchFamily="34" charset="-120"/>
               </a:rPr>
-              <a:t>ter</a:t>
+              <a:t>mic</a:t>
             </a:r>
             <a:endParaRPr lang="en-US" sz="1400" dirty="0"/>
           </a:p>
@@ -29903,7 +28859,7 @@
       </p:sp>
       <p:sp>
         <p:nvSpPr>
-          <p:cNvPr id="40" name="Shape 38"/>
+          <p:cNvPr id="39" name="Shape 37"/>
           <p:cNvSpPr/>
           <p:nvPr/>
         </p:nvSpPr>
@@ -29930,7 +28886,7 @@
       </p:sp>
       <p:sp>
         <p:nvSpPr>
-          <p:cNvPr id="41" name="Text 39"/>
+          <p:cNvPr id="40" name="Text 38"/>
           <p:cNvSpPr/>
           <p:nvPr/>
         </p:nvSpPr>
@@ -29969,22 +28925,49 @@
       </p:sp>
       <p:sp>
         <p:nvSpPr>
+          <p:cNvPr id="41" name="Shape 39"/>
+          <p:cNvSpPr/>
+          <p:nvPr/>
+        </p:nvSpPr>
+        <p:spPr>
+          <a:xfrm>
+            <a:off x="1874520" y="4096512"/>
+            <a:ext cx="6903720" cy="804672"/>
+          </a:xfrm>
+          <a:prstGeom prst="rect">
+            <a:avLst>
+              <a:gd name="adj" fmla="val 6818"/>
+            </a:avLst>
+          </a:prstGeom>
+          <a:solidFill>
+            <a:srgbClr val="FCE7F3"/>
+          </a:solidFill>
+          <a:ln w="12700">
+            <a:solidFill>
+              <a:srgbClr val="DB2777"/>
+            </a:solidFill>
+            <a:prstDash val="solid"/>
+          </a:ln>
+        </p:spPr>
+      </p:sp>
+      <p:sp>
+        <p:nvSpPr>
           <p:cNvPr id="42" name="Shape 40"/>
           <p:cNvSpPr/>
           <p:nvPr/>
         </p:nvSpPr>
         <p:spPr>
           <a:xfrm>
-            <a:off x="1874520" y="4096512"/>
-            <a:ext cx="6903720" cy="658368"/>
+            <a:off x="2023872" y="4169664"/>
+            <a:ext cx="685800" cy="384048"/>
           </a:xfrm>
           <a:prstGeom prst="rect">
             <a:avLst>
-              <a:gd name="adj" fmla="val 8333"/>
+              <a:gd name="adj" fmla="val 9524"/>
             </a:avLst>
           </a:prstGeom>
           <a:solidFill>
-            <a:srgbClr val="FCE7F3"/>
+            <a:srgbClr val="FFFFFF"/>
           </a:solidFill>
           <a:ln w="12700">
             <a:solidFill>
@@ -29996,41 +28979,14 @@
       </p:sp>
       <p:sp>
         <p:nvSpPr>
-          <p:cNvPr id="43" name="Shape 41"/>
+          <p:cNvPr id="43" name="Text 41"/>
           <p:cNvSpPr/>
           <p:nvPr/>
         </p:nvSpPr>
         <p:spPr>
           <a:xfrm>
             <a:off x="2023872" y="4169664"/>
-            <a:ext cx="685800" cy="475488"/>
-          </a:xfrm>
-          <a:prstGeom prst="rect">
-            <a:avLst>
-              <a:gd name="adj" fmla="val 7692"/>
-            </a:avLst>
-          </a:prstGeom>
-          <a:solidFill>
-            <a:srgbClr val="FFFFFF"/>
-          </a:solidFill>
-          <a:ln w="12700">
-            <a:solidFill>
-              <a:srgbClr val="DB2777"/>
-            </a:solidFill>
-            <a:prstDash val="solid"/>
-          </a:ln>
-        </p:spPr>
-      </p:sp>
-      <p:sp>
-        <p:nvSpPr>
-          <p:cNvPr id="44" name="Text 42"/>
-          <p:cNvSpPr/>
-          <p:nvPr/>
-        </p:nvSpPr>
-        <p:spPr>
-          <a:xfrm>
-            <a:off x="2023872" y="4169664"/>
-            <a:ext cx="685800" cy="475488"/>
+            <a:ext cx="685800" cy="384048"/>
           </a:xfrm>
           <a:prstGeom prst="rect">
             <a:avLst/>
@@ -30054,7 +29010,7 @@
                 <a:ea typeface="Trebuchet MS" pitchFamily="34" charset="-122"/>
                 <a:cs typeface="Trebuchet MS" pitchFamily="34" charset="-120"/>
               </a:rPr>
-              <a:t>th</a:t>
+              <a:t>e</a:t>
             </a:r>
             <a:endParaRPr lang="en-US" sz="900" dirty="0"/>
           </a:p>
@@ -30062,18 +29018,18 @@
       </p:sp>
       <p:sp>
         <p:nvSpPr>
-          <p:cNvPr id="45" name="Shape 43"/>
+          <p:cNvPr id="44" name="Shape 42"/>
           <p:cNvSpPr/>
           <p:nvPr/>
         </p:nvSpPr>
         <p:spPr>
           <a:xfrm>
             <a:off x="2831592" y="4169664"/>
-            <a:ext cx="685800" cy="475488"/>
+            <a:ext cx="685800" cy="384048"/>
           </a:xfrm>
           <a:prstGeom prst="rect">
             <a:avLst>
-              <a:gd name="adj" fmla="val 7692"/>
+              <a:gd name="adj" fmla="val 9524"/>
             </a:avLst>
           </a:prstGeom>
           <a:solidFill>
@@ -30089,14 +29045,14 @@
       </p:sp>
       <p:sp>
         <p:nvSpPr>
-          <p:cNvPr id="46" name="Text 44"/>
+          <p:cNvPr id="45" name="Text 43"/>
           <p:cNvSpPr/>
           <p:nvPr/>
         </p:nvSpPr>
         <p:spPr>
           <a:xfrm>
             <a:off x="2831592" y="4169664"/>
-            <a:ext cx="685800" cy="475488"/>
+            <a:ext cx="685800" cy="384048"/>
           </a:xfrm>
           <a:prstGeom prst="rect">
             <a:avLst/>
@@ -30120,7 +29076,7 @@
                 <a:ea typeface="Trebuchet MS" pitchFamily="34" charset="-122"/>
                 <a:cs typeface="Trebuchet MS" pitchFamily="34" charset="-120"/>
               </a:rPr>
-              <a:t>er</a:t>
+              <a:t>n</a:t>
             </a:r>
             <a:endParaRPr lang="en-US" sz="900" dirty="0"/>
           </a:p>
@@ -30128,18 +29084,18 @@
       </p:sp>
       <p:sp>
         <p:nvSpPr>
-          <p:cNvPr id="47" name="Shape 45"/>
+          <p:cNvPr id="46" name="Shape 44"/>
           <p:cNvSpPr/>
           <p:nvPr/>
         </p:nvSpPr>
         <p:spPr>
           <a:xfrm>
             <a:off x="3639312" y="4169664"/>
-            <a:ext cx="685800" cy="475488"/>
+            <a:ext cx="685800" cy="384048"/>
           </a:xfrm>
           <a:prstGeom prst="rect">
             <a:avLst>
-              <a:gd name="adj" fmla="val 7692"/>
+              <a:gd name="adj" fmla="val 9524"/>
             </a:avLst>
           </a:prstGeom>
           <a:solidFill>
@@ -30155,14 +29111,14 @@
       </p:sp>
       <p:sp>
         <p:nvSpPr>
-          <p:cNvPr id="48" name="Text 46"/>
+          <p:cNvPr id="47" name="Text 45"/>
           <p:cNvSpPr/>
           <p:nvPr/>
         </p:nvSpPr>
         <p:spPr>
           <a:xfrm>
             <a:off x="3639312" y="4169664"/>
-            <a:ext cx="685800" cy="475488"/>
+            <a:ext cx="685800" cy="384048"/>
           </a:xfrm>
           <a:prstGeom prst="rect">
             <a:avLst/>
@@ -30186,7 +29142,7 @@
                 <a:ea typeface="Trebuchet MS" pitchFamily="34" charset="-122"/>
                 <a:cs typeface="Trebuchet MS" pitchFamily="34" charset="-120"/>
               </a:rPr>
-              <a:t>m</a:t>
+              <a:t>d</a:t>
             </a:r>
             <a:endParaRPr lang="en-US" sz="900" dirty="0"/>
           </a:p>
@@ -30194,18 +29150,18 @@
       </p:sp>
       <p:sp>
         <p:nvSpPr>
-          <p:cNvPr id="49" name="Shape 47"/>
+          <p:cNvPr id="48" name="Shape 46"/>
           <p:cNvSpPr/>
           <p:nvPr/>
         </p:nvSpPr>
         <p:spPr>
           <a:xfrm>
             <a:off x="4447032" y="4169664"/>
-            <a:ext cx="685800" cy="475488"/>
+            <a:ext cx="685800" cy="384048"/>
           </a:xfrm>
           <a:prstGeom prst="rect">
             <a:avLst>
-              <a:gd name="adj" fmla="val 7692"/>
+              <a:gd name="adj" fmla="val 9524"/>
             </a:avLst>
           </a:prstGeom>
           <a:solidFill>
@@ -30221,14 +29177,14 @@
       </p:sp>
       <p:sp>
         <p:nvSpPr>
-          <p:cNvPr id="50" name="Text 48"/>
+          <p:cNvPr id="49" name="Text 47"/>
           <p:cNvSpPr/>
           <p:nvPr/>
         </p:nvSpPr>
         <p:spPr>
           <a:xfrm>
             <a:off x="4447032" y="4169664"/>
-            <a:ext cx="685800" cy="475488"/>
+            <a:ext cx="685800" cy="384048"/>
           </a:xfrm>
           <a:prstGeom prst="rect">
             <a:avLst/>
@@ -30260,18 +29216,18 @@
       </p:sp>
       <p:sp>
         <p:nvSpPr>
-          <p:cNvPr id="51" name="Shape 49"/>
+          <p:cNvPr id="50" name="Shape 48"/>
           <p:cNvSpPr/>
           <p:nvPr/>
         </p:nvSpPr>
         <p:spPr>
           <a:xfrm>
             <a:off x="5254752" y="4169664"/>
-            <a:ext cx="685800" cy="475488"/>
+            <a:ext cx="685800" cy="384048"/>
           </a:xfrm>
           <a:prstGeom prst="rect">
             <a:avLst>
-              <a:gd name="adj" fmla="val 7692"/>
+              <a:gd name="adj" fmla="val 9524"/>
             </a:avLst>
           </a:prstGeom>
           <a:solidFill>
@@ -30287,14 +29243,14 @@
       </p:sp>
       <p:sp>
         <p:nvSpPr>
-          <p:cNvPr id="52" name="Text 50"/>
+          <p:cNvPr id="51" name="Text 49"/>
           <p:cNvSpPr/>
           <p:nvPr/>
         </p:nvSpPr>
         <p:spPr>
           <a:xfrm>
             <a:off x="5254752" y="4169664"/>
-            <a:ext cx="685800" cy="475488"/>
+            <a:ext cx="685800" cy="384048"/>
           </a:xfrm>
           <a:prstGeom prst="rect">
             <a:avLst/>
@@ -30318,7 +29274,7 @@
                 <a:ea typeface="Trebuchet MS" pitchFamily="34" charset="-122"/>
                 <a:cs typeface="Trebuchet MS" pitchFamily="34" charset="-120"/>
               </a:rPr>
-              <a:t>m</a:t>
+              <a:t>th</a:t>
             </a:r>
             <a:endParaRPr lang="en-US" sz="900" dirty="0"/>
           </a:p>
@@ -30326,18 +29282,18 @@
       </p:sp>
       <p:sp>
         <p:nvSpPr>
-          <p:cNvPr id="53" name="Shape 51"/>
+          <p:cNvPr id="52" name="Shape 50"/>
           <p:cNvSpPr/>
           <p:nvPr/>
         </p:nvSpPr>
         <p:spPr>
           <a:xfrm>
             <a:off x="6062472" y="4169664"/>
-            <a:ext cx="685800" cy="475488"/>
+            <a:ext cx="685800" cy="384048"/>
           </a:xfrm>
           <a:prstGeom prst="rect">
             <a:avLst>
-              <a:gd name="adj" fmla="val 7692"/>
+              <a:gd name="adj" fmla="val 9524"/>
             </a:avLst>
           </a:prstGeom>
           <a:solidFill>
@@ -30353,14 +29309,14 @@
       </p:sp>
       <p:sp>
         <p:nvSpPr>
-          <p:cNvPr id="54" name="Text 52"/>
+          <p:cNvPr id="53" name="Text 51"/>
           <p:cNvSpPr/>
           <p:nvPr/>
         </p:nvSpPr>
         <p:spPr>
           <a:xfrm>
             <a:off x="6062472" y="4169664"/>
-            <a:ext cx="685800" cy="475488"/>
+            <a:ext cx="685800" cy="384048"/>
           </a:xfrm>
           <a:prstGeom prst="rect">
             <a:avLst/>
@@ -30384,7 +29340,7 @@
                 <a:ea typeface="Trebuchet MS" pitchFamily="34" charset="-122"/>
                 <a:cs typeface="Trebuchet MS" pitchFamily="34" charset="-120"/>
               </a:rPr>
-              <a:t>e</a:t>
+              <a:t>er</a:t>
             </a:r>
             <a:endParaRPr lang="en-US" sz="900" dirty="0"/>
           </a:p>
@@ -30392,18 +29348,18 @@
       </p:sp>
       <p:sp>
         <p:nvSpPr>
-          <p:cNvPr id="55" name="Shape 53"/>
+          <p:cNvPr id="54" name="Shape 52"/>
           <p:cNvSpPr/>
           <p:nvPr/>
         </p:nvSpPr>
         <p:spPr>
           <a:xfrm>
             <a:off x="6870192" y="4169664"/>
-            <a:ext cx="685800" cy="475488"/>
+            <a:ext cx="685800" cy="384048"/>
           </a:xfrm>
           <a:prstGeom prst="rect">
             <a:avLst>
-              <a:gd name="adj" fmla="val 7692"/>
+              <a:gd name="adj" fmla="val 9524"/>
             </a:avLst>
           </a:prstGeom>
           <a:solidFill>
@@ -30419,14 +29375,14 @@
       </p:sp>
       <p:sp>
         <p:nvSpPr>
-          <p:cNvPr id="56" name="Text 54"/>
+          <p:cNvPr id="55" name="Text 53"/>
           <p:cNvSpPr/>
           <p:nvPr/>
         </p:nvSpPr>
         <p:spPr>
           <a:xfrm>
             <a:off x="6870192" y="4169664"/>
-            <a:ext cx="685800" cy="475488"/>
+            <a:ext cx="685800" cy="384048"/>
           </a:xfrm>
           <a:prstGeom prst="rect">
             <a:avLst/>
@@ -30450,7 +29406,7 @@
                 <a:ea typeface="Trebuchet MS" pitchFamily="34" charset="-122"/>
                 <a:cs typeface="Trebuchet MS" pitchFamily="34" charset="-120"/>
               </a:rPr>
-              <a:t>t</a:t>
+              <a:t>m</a:t>
             </a:r>
             <a:endParaRPr lang="en-US" sz="900" dirty="0"/>
           </a:p>
@@ -30458,18 +29414,18 @@
       </p:sp>
       <p:sp>
         <p:nvSpPr>
-          <p:cNvPr id="57" name="Shape 55"/>
+          <p:cNvPr id="56" name="Shape 54"/>
           <p:cNvSpPr/>
           <p:nvPr/>
         </p:nvSpPr>
         <p:spPr>
           <a:xfrm>
             <a:off x="7677912" y="4169664"/>
-            <a:ext cx="685800" cy="475488"/>
+            <a:ext cx="685800" cy="384048"/>
           </a:xfrm>
           <a:prstGeom prst="rect">
             <a:avLst>
-              <a:gd name="adj" fmla="val 7692"/>
+              <a:gd name="adj" fmla="val 9524"/>
             </a:avLst>
           </a:prstGeom>
           <a:solidFill>
@@ -30485,14 +29441,14 @@
       </p:sp>
       <p:sp>
         <p:nvSpPr>
-          <p:cNvPr id="58" name="Text 56"/>
+          <p:cNvPr id="57" name="Text 55"/>
           <p:cNvSpPr/>
           <p:nvPr/>
         </p:nvSpPr>
         <p:spPr>
           <a:xfrm>
             <a:off x="7677912" y="4169664"/>
-            <a:ext cx="685800" cy="475488"/>
+            <a:ext cx="685800" cy="384048"/>
           </a:xfrm>
           <a:prstGeom prst="rect">
             <a:avLst/>
@@ -30516,9 +29472,48 @@
                 <a:ea typeface="Trebuchet MS" pitchFamily="34" charset="-122"/>
                 <a:cs typeface="Trebuchet MS" pitchFamily="34" charset="-120"/>
               </a:rPr>
-              <a:t>er</a:t>
+              <a:t>ic</a:t>
             </a:r>
             <a:endParaRPr lang="en-US" sz="900" dirty="0"/>
+          </a:p>
+        </p:txBody>
+      </p:sp>
+      <p:sp>
+        <p:nvSpPr>
+          <p:cNvPr id="58" name="Text 56"/>
+          <p:cNvSpPr/>
+          <p:nvPr/>
+        </p:nvSpPr>
+        <p:spPr>
+          <a:xfrm>
+            <a:off x="7677912" y="4572000"/>
+            <a:ext cx="685800" cy="219456"/>
+          </a:xfrm>
+          <a:prstGeom prst="rect">
+            <a:avLst/>
+          </a:prstGeom>
+          <a:noFill/>
+          <a:ln/>
+        </p:spPr>
+        <p:txBody>
+          <a:bodyPr wrap="square" lIns="0" tIns="0" rIns="0" bIns="0" rtlCol="0" anchor="t"/>
+          <a:lstStyle/>
+          <a:p>
+            <a:pPr algn="ctr" indent="0" marL="0">
+              <a:buNone/>
+            </a:pPr>
+            <a:r>
+              <a:rPr lang="en-US" sz="750" i="1" dirty="0">
+                <a:solidFill>
+                  <a:srgbClr val="94A3B8"/>
+                </a:solidFill>
+                <a:latin typeface="Calibri" pitchFamily="34" charset="0"/>
+                <a:ea typeface="Calibri" pitchFamily="34" charset="-122"/>
+                <a:cs typeface="Calibri" pitchFamily="34" charset="-120"/>
+              </a:rPr>
+              <a:t>/ik/</a:t>
+            </a:r>
+            <a:endParaRPr lang="en-US" sz="750" dirty="0"/>
           </a:p>
         </p:txBody>
       </p:sp>
@@ -30947,7 +29942,7 @@
                 <a:ea typeface="Trebuchet MS" pitchFamily="34" charset="-122"/>
                 <a:cs typeface="Trebuchet MS" pitchFamily="34" charset="-120"/>
               </a:rPr>
-              <a:t>thermal</a:t>
+              <a:t>thermostat</a:t>
             </a:r>
             <a:endParaRPr lang="en-US" sz="2800" dirty="0"/>
           </a:p>
@@ -31774,7 +30769,7 @@
                 <a:ea typeface="Trebuchet MS" pitchFamily="34" charset="-122"/>
                 <a:cs typeface="Trebuchet MS" pitchFamily="34" charset="-120"/>
               </a:rPr>
-              <a:t>thermal</a:t>
+              <a:t>thermostat</a:t>
             </a:r>
             <a:endParaRPr lang="en-US" sz="2800" dirty="0"/>
           </a:p>
@@ -31854,7 +30849,7 @@
         </p:nvSpPr>
         <p:spPr>
           <a:xfrm>
-            <a:off x="2938272" y="2258568"/>
+            <a:off x="2221992" y="2258568"/>
             <a:ext cx="1828800" cy="292608"/>
           </a:xfrm>
           <a:prstGeom prst="rect">
@@ -31888,7 +30883,7 @@
         </p:nvSpPr>
         <p:spPr>
           <a:xfrm>
-            <a:off x="2938272" y="2258568"/>
+            <a:off x="2221992" y="2258568"/>
             <a:ext cx="1828800" cy="292608"/>
           </a:xfrm>
           <a:prstGeom prst="rect">
@@ -31927,7 +30922,7 @@
         </p:nvSpPr>
         <p:spPr>
           <a:xfrm>
-            <a:off x="2938272" y="2569464"/>
+            <a:off x="2221992" y="2569464"/>
             <a:ext cx="1828800" cy="201168"/>
           </a:xfrm>
           <a:prstGeom prst="rect">
@@ -31966,7 +30961,7 @@
         </p:nvSpPr>
         <p:spPr>
           <a:xfrm>
-            <a:off x="5803392" y="2258568"/>
+            <a:off x="4370832" y="2258568"/>
             <a:ext cx="1828800" cy="292608"/>
           </a:xfrm>
           <a:prstGeom prst="rect">
@@ -32000,7 +30995,7 @@
         </p:nvSpPr>
         <p:spPr>
           <a:xfrm>
-            <a:off x="5803392" y="2258568"/>
+            <a:off x="4370832" y="2258568"/>
             <a:ext cx="1828800" cy="292608"/>
           </a:xfrm>
           <a:prstGeom prst="rect">
@@ -32025,7 +31020,7 @@
                 <a:ea typeface="Trebuchet MS" pitchFamily="34" charset="-122"/>
                 <a:cs typeface="Trebuchet MS" pitchFamily="34" charset="-120"/>
               </a:rPr>
-              <a:t>al</a:t>
+              <a:t>o</a:t>
             </a:r>
             <a:endParaRPr lang="en-US" sz="1300" dirty="0"/>
           </a:p>
@@ -32039,7 +31034,7 @@
         </p:nvSpPr>
         <p:spPr>
           <a:xfrm>
-            <a:off x="5803392" y="2569464"/>
+            <a:off x="4370832" y="2569464"/>
             <a:ext cx="1828800" cy="201168"/>
           </a:xfrm>
           <a:prstGeom prst="rect">
@@ -32064,7 +31059,7 @@
                 <a:ea typeface="Calibri" pitchFamily="34" charset="-122"/>
                 <a:cs typeface="Calibri" pitchFamily="34" charset="-120"/>
               </a:rPr>
-              <a:t>relating to</a:t>
+              <a:t>connecting vowel</a:t>
             </a:r>
             <a:endParaRPr lang="en-US" sz="850" dirty="0"/>
           </a:p>
@@ -32072,7 +31067,158 @@
       </p:sp>
       <p:sp>
         <p:nvSpPr>
-          <p:cNvPr id="22" name="Shape 20"/>
+          <p:cNvPr id="22" name="Text 20"/>
+          <p:cNvSpPr/>
+          <p:nvPr/>
+        </p:nvSpPr>
+        <p:spPr>
+          <a:xfrm>
+            <a:off x="4370832" y="2752344"/>
+            <a:ext cx="1828800" cy="182880"/>
+          </a:xfrm>
+          <a:prstGeom prst="rect">
+            <a:avLst/>
+          </a:prstGeom>
+          <a:noFill/>
+          <a:ln/>
+        </p:spPr>
+        <p:txBody>
+          <a:bodyPr wrap="square" lIns="0" tIns="0" rIns="0" bIns="0" rtlCol="0" anchor="t"/>
+          <a:lstStyle/>
+          <a:p>
+            <a:pPr algn="ctr" indent="0" marL="0">
+              <a:buNone/>
+            </a:pPr>
+            <a:r>
+              <a:rPr lang="en-US" sz="700" i="1" dirty="0">
+                <a:solidFill>
+                  <a:srgbClr val="94A3B8"/>
+                </a:solidFill>
+                <a:latin typeface="Calibri" pitchFamily="34" charset="0"/>
+                <a:ea typeface="Calibri" pitchFamily="34" charset="-122"/>
+                <a:cs typeface="Calibri" pitchFamily="34" charset="-120"/>
+              </a:rPr>
+              <a:t>links root to suffix</a:t>
+            </a:r>
+            <a:endParaRPr lang="en-US" sz="700" dirty="0"/>
+          </a:p>
+        </p:txBody>
+      </p:sp>
+      <p:sp>
+        <p:nvSpPr>
+          <p:cNvPr id="23" name="Shape 21"/>
+          <p:cNvSpPr/>
+          <p:nvPr/>
+        </p:nvSpPr>
+        <p:spPr>
+          <a:xfrm>
+            <a:off x="6519672" y="2258568"/>
+            <a:ext cx="1828800" cy="292608"/>
+          </a:xfrm>
+          <a:prstGeom prst="rect">
+            <a:avLst>
+              <a:gd name="adj" fmla="val 25000"/>
+            </a:avLst>
+          </a:prstGeom>
+          <a:solidFill>
+            <a:srgbClr val="FCE7F3"/>
+          </a:solidFill>
+          <a:ln w="19050">
+            <a:solidFill>
+              <a:srgbClr val="DB2777"/>
+            </a:solidFill>
+            <a:prstDash val="solid"/>
+          </a:ln>
+          <a:effectLst>
+            <a:outerShdw sx="100000" sy="100000" kx="0" ky="0" algn="bl" rotWithShape="0" blurRad="101600" dist="38100" dir="8100000">
+              <a:srgbClr val="000000">
+                <a:alpha val="12000"/>
+              </a:srgbClr>
+            </a:outerShdw>
+          </a:effectLst>
+        </p:spPr>
+      </p:sp>
+      <p:sp>
+        <p:nvSpPr>
+          <p:cNvPr id="24" name="Text 22"/>
+          <p:cNvSpPr/>
+          <p:nvPr/>
+        </p:nvSpPr>
+        <p:spPr>
+          <a:xfrm>
+            <a:off x="6519672" y="2258568"/>
+            <a:ext cx="1828800" cy="292608"/>
+          </a:xfrm>
+          <a:prstGeom prst="rect">
+            <a:avLst/>
+          </a:prstGeom>
+          <a:noFill/>
+          <a:ln/>
+        </p:spPr>
+        <p:txBody>
+          <a:bodyPr wrap="square" lIns="0" tIns="0" rIns="0" bIns="0" rtlCol="0" anchor="ctr"/>
+          <a:lstStyle/>
+          <a:p>
+            <a:pPr algn="ctr" indent="0" marL="0">
+              <a:buNone/>
+            </a:pPr>
+            <a:r>
+              <a:rPr lang="en-US" sz="1300" b="1" dirty="0">
+                <a:solidFill>
+                  <a:srgbClr val="9D174D"/>
+                </a:solidFill>
+                <a:latin typeface="Trebuchet MS" pitchFamily="34" charset="0"/>
+                <a:ea typeface="Trebuchet MS" pitchFamily="34" charset="-122"/>
+                <a:cs typeface="Trebuchet MS" pitchFamily="34" charset="-120"/>
+              </a:rPr>
+              <a:t>stat</a:t>
+            </a:r>
+            <a:endParaRPr lang="en-US" sz="1300" dirty="0"/>
+          </a:p>
+        </p:txBody>
+      </p:sp>
+      <p:sp>
+        <p:nvSpPr>
+          <p:cNvPr id="25" name="Text 23"/>
+          <p:cNvSpPr/>
+          <p:nvPr/>
+        </p:nvSpPr>
+        <p:spPr>
+          <a:xfrm>
+            <a:off x="6519672" y="2569464"/>
+            <a:ext cx="1828800" cy="201168"/>
+          </a:xfrm>
+          <a:prstGeom prst="rect">
+            <a:avLst/>
+          </a:prstGeom>
+          <a:noFill/>
+          <a:ln/>
+        </p:spPr>
+        <p:txBody>
+          <a:bodyPr wrap="square" lIns="0" tIns="0" rIns="0" bIns="0" rtlCol="0" anchor="t"/>
+          <a:lstStyle/>
+          <a:p>
+            <a:pPr algn="ctr" indent="0" marL="0">
+              <a:buNone/>
+            </a:pPr>
+            <a:r>
+              <a:rPr lang="en-US" sz="850" dirty="0">
+                <a:solidFill>
+                  <a:srgbClr val="475569"/>
+                </a:solidFill>
+                <a:latin typeface="Calibri" pitchFamily="34" charset="0"/>
+                <a:ea typeface="Calibri" pitchFamily="34" charset="-122"/>
+                <a:cs typeface="Calibri" pitchFamily="34" charset="-120"/>
+              </a:rPr>
+              <a:t>keeping steady, stopping</a:t>
+            </a:r>
+            <a:endParaRPr lang="en-US" sz="850" dirty="0"/>
+          </a:p>
+        </p:txBody>
+      </p:sp>
+      <p:sp>
+        <p:nvSpPr>
+          <p:cNvPr id="26" name="Shape 24"/>
           <p:cNvSpPr/>
           <p:nvPr/>
         </p:nvSpPr>
@@ -32099,7 +31245,7 @@
       </p:sp>
       <p:sp>
         <p:nvSpPr>
-          <p:cNvPr id="23" name="Text 21"/>
+          <p:cNvPr id="27" name="Text 25"/>
           <p:cNvSpPr/>
           <p:nvPr/>
         </p:nvSpPr>
@@ -32138,7 +31284,7 @@
       </p:sp>
       <p:sp>
         <p:nvSpPr>
-          <p:cNvPr id="24" name="Shape 22"/>
+          <p:cNvPr id="28" name="Shape 26"/>
           <p:cNvSpPr/>
           <p:nvPr/>
         </p:nvSpPr>
@@ -32165,7 +31311,7 @@
       </p:sp>
       <p:sp>
         <p:nvSpPr>
-          <p:cNvPr id="25" name="Text 23"/>
+          <p:cNvPr id="29" name="Text 27"/>
           <p:cNvSpPr/>
           <p:nvPr/>
         </p:nvSpPr>
@@ -32204,7 +31350,7 @@
       </p:sp>
       <p:sp>
         <p:nvSpPr>
-          <p:cNvPr id="26" name="Shape 24"/>
+          <p:cNvPr id="30" name="Shape 28"/>
           <p:cNvSpPr/>
           <p:nvPr/>
         </p:nvSpPr>
@@ -32231,7 +31377,7 @@
       </p:sp>
       <p:sp>
         <p:nvSpPr>
-          <p:cNvPr id="27" name="Text 25"/>
+          <p:cNvPr id="31" name="Text 29"/>
           <p:cNvSpPr/>
           <p:nvPr/>
         </p:nvSpPr>
@@ -32270,7 +31416,7 @@
       </p:sp>
       <p:sp>
         <p:nvSpPr>
-          <p:cNvPr id="28" name="Shape 26"/>
+          <p:cNvPr id="32" name="Shape 30"/>
           <p:cNvSpPr/>
           <p:nvPr/>
         </p:nvSpPr>
@@ -32297,7 +31443,7 @@
       </p:sp>
       <p:sp>
         <p:nvSpPr>
-          <p:cNvPr id="29" name="Text 27"/>
+          <p:cNvPr id="33" name="Text 31"/>
           <p:cNvSpPr/>
           <p:nvPr/>
         </p:nvSpPr>
@@ -32759,7 +31905,7 @@
                 <a:ea typeface="Trebuchet MS" pitchFamily="34" charset="-122"/>
                 <a:cs typeface="Trebuchet MS" pitchFamily="34" charset="-120"/>
               </a:rPr>
-              <a:t>thermal</a:t>
+              <a:t>thermostat</a:t>
             </a:r>
             <a:endParaRPr lang="en-US" sz="2800" dirty="0"/>
           </a:p>
@@ -32839,7 +31985,7 @@
         </p:nvSpPr>
         <p:spPr>
           <a:xfrm>
-            <a:off x="2938272" y="2258568"/>
+            <a:off x="2221992" y="2258568"/>
             <a:ext cx="1828800" cy="292608"/>
           </a:xfrm>
           <a:prstGeom prst="rect">
@@ -32873,7 +32019,7 @@
         </p:nvSpPr>
         <p:spPr>
           <a:xfrm>
-            <a:off x="2938272" y="2258568"/>
+            <a:off x="2221992" y="2258568"/>
             <a:ext cx="1828800" cy="292608"/>
           </a:xfrm>
           <a:prstGeom prst="rect">
@@ -32912,7 +32058,7 @@
         </p:nvSpPr>
         <p:spPr>
           <a:xfrm>
-            <a:off x="2938272" y="2569464"/>
+            <a:off x="2221992" y="2569464"/>
             <a:ext cx="1828800" cy="201168"/>
           </a:xfrm>
           <a:prstGeom prst="rect">
@@ -32951,7 +32097,7 @@
         </p:nvSpPr>
         <p:spPr>
           <a:xfrm>
-            <a:off x="5803392" y="2258568"/>
+            <a:off x="4370832" y="2258568"/>
             <a:ext cx="1828800" cy="292608"/>
           </a:xfrm>
           <a:prstGeom prst="rect">
@@ -32985,7 +32131,7 @@
         </p:nvSpPr>
         <p:spPr>
           <a:xfrm>
-            <a:off x="5803392" y="2258568"/>
+            <a:off x="4370832" y="2258568"/>
             <a:ext cx="1828800" cy="292608"/>
           </a:xfrm>
           <a:prstGeom prst="rect">
@@ -33010,7 +32156,7 @@
                 <a:ea typeface="Trebuchet MS" pitchFamily="34" charset="-122"/>
                 <a:cs typeface="Trebuchet MS" pitchFamily="34" charset="-120"/>
               </a:rPr>
-              <a:t>al</a:t>
+              <a:t>o</a:t>
             </a:r>
             <a:endParaRPr lang="en-US" sz="1300" dirty="0"/>
           </a:p>
@@ -33024,7 +32170,7 @@
         </p:nvSpPr>
         <p:spPr>
           <a:xfrm>
-            <a:off x="5803392" y="2569464"/>
+            <a:off x="4370832" y="2569464"/>
             <a:ext cx="1828800" cy="201168"/>
           </a:xfrm>
           <a:prstGeom prst="rect">
@@ -33049,7 +32195,7 @@
                 <a:ea typeface="Calibri" pitchFamily="34" charset="-122"/>
                 <a:cs typeface="Calibri" pitchFamily="34" charset="-120"/>
               </a:rPr>
-              <a:t>relating to</a:t>
+              <a:t>connecting vowel</a:t>
             </a:r>
             <a:endParaRPr lang="en-US" sz="850" dirty="0"/>
           </a:p>
@@ -33057,7 +32203,158 @@
       </p:sp>
       <p:sp>
         <p:nvSpPr>
-          <p:cNvPr id="22" name="Shape 20"/>
+          <p:cNvPr id="22" name="Text 20"/>
+          <p:cNvSpPr/>
+          <p:nvPr/>
+        </p:nvSpPr>
+        <p:spPr>
+          <a:xfrm>
+            <a:off x="4370832" y="2752344"/>
+            <a:ext cx="1828800" cy="182880"/>
+          </a:xfrm>
+          <a:prstGeom prst="rect">
+            <a:avLst/>
+          </a:prstGeom>
+          <a:noFill/>
+          <a:ln/>
+        </p:spPr>
+        <p:txBody>
+          <a:bodyPr wrap="square" lIns="0" tIns="0" rIns="0" bIns="0" rtlCol="0" anchor="t"/>
+          <a:lstStyle/>
+          <a:p>
+            <a:pPr algn="ctr" indent="0" marL="0">
+              <a:buNone/>
+            </a:pPr>
+            <a:r>
+              <a:rPr lang="en-US" sz="700" i="1" dirty="0">
+                <a:solidFill>
+                  <a:srgbClr val="94A3B8"/>
+                </a:solidFill>
+                <a:latin typeface="Calibri" pitchFamily="34" charset="0"/>
+                <a:ea typeface="Calibri" pitchFamily="34" charset="-122"/>
+                <a:cs typeface="Calibri" pitchFamily="34" charset="-120"/>
+              </a:rPr>
+              <a:t>links root to suffix</a:t>
+            </a:r>
+            <a:endParaRPr lang="en-US" sz="700" dirty="0"/>
+          </a:p>
+        </p:txBody>
+      </p:sp>
+      <p:sp>
+        <p:nvSpPr>
+          <p:cNvPr id="23" name="Shape 21"/>
+          <p:cNvSpPr/>
+          <p:nvPr/>
+        </p:nvSpPr>
+        <p:spPr>
+          <a:xfrm>
+            <a:off x="6519672" y="2258568"/>
+            <a:ext cx="1828800" cy="292608"/>
+          </a:xfrm>
+          <a:prstGeom prst="rect">
+            <a:avLst>
+              <a:gd name="adj" fmla="val 25000"/>
+            </a:avLst>
+          </a:prstGeom>
+          <a:solidFill>
+            <a:srgbClr val="FCE7F3"/>
+          </a:solidFill>
+          <a:ln w="19050">
+            <a:solidFill>
+              <a:srgbClr val="DB2777"/>
+            </a:solidFill>
+            <a:prstDash val="solid"/>
+          </a:ln>
+          <a:effectLst>
+            <a:outerShdw sx="100000" sy="100000" kx="0" ky="0" algn="bl" rotWithShape="0" blurRad="101600" dist="38100" dir="8100000">
+              <a:srgbClr val="000000">
+                <a:alpha val="12000"/>
+              </a:srgbClr>
+            </a:outerShdw>
+          </a:effectLst>
+        </p:spPr>
+      </p:sp>
+      <p:sp>
+        <p:nvSpPr>
+          <p:cNvPr id="24" name="Text 22"/>
+          <p:cNvSpPr/>
+          <p:nvPr/>
+        </p:nvSpPr>
+        <p:spPr>
+          <a:xfrm>
+            <a:off x="6519672" y="2258568"/>
+            <a:ext cx="1828800" cy="292608"/>
+          </a:xfrm>
+          <a:prstGeom prst="rect">
+            <a:avLst/>
+          </a:prstGeom>
+          <a:noFill/>
+          <a:ln/>
+        </p:spPr>
+        <p:txBody>
+          <a:bodyPr wrap="square" lIns="0" tIns="0" rIns="0" bIns="0" rtlCol="0" anchor="ctr"/>
+          <a:lstStyle/>
+          <a:p>
+            <a:pPr algn="ctr" indent="0" marL="0">
+              <a:buNone/>
+            </a:pPr>
+            <a:r>
+              <a:rPr lang="en-US" sz="1300" b="1" dirty="0">
+                <a:solidFill>
+                  <a:srgbClr val="9D174D"/>
+                </a:solidFill>
+                <a:latin typeface="Trebuchet MS" pitchFamily="34" charset="0"/>
+                <a:ea typeface="Trebuchet MS" pitchFamily="34" charset="-122"/>
+                <a:cs typeface="Trebuchet MS" pitchFamily="34" charset="-120"/>
+              </a:rPr>
+              <a:t>stat</a:t>
+            </a:r>
+            <a:endParaRPr lang="en-US" sz="1300" dirty="0"/>
+          </a:p>
+        </p:txBody>
+      </p:sp>
+      <p:sp>
+        <p:nvSpPr>
+          <p:cNvPr id="25" name="Text 23"/>
+          <p:cNvSpPr/>
+          <p:nvPr/>
+        </p:nvSpPr>
+        <p:spPr>
+          <a:xfrm>
+            <a:off x="6519672" y="2569464"/>
+            <a:ext cx="1828800" cy="201168"/>
+          </a:xfrm>
+          <a:prstGeom prst="rect">
+            <a:avLst/>
+          </a:prstGeom>
+          <a:noFill/>
+          <a:ln/>
+        </p:spPr>
+        <p:txBody>
+          <a:bodyPr wrap="square" lIns="0" tIns="0" rIns="0" bIns="0" rtlCol="0" anchor="t"/>
+          <a:lstStyle/>
+          <a:p>
+            <a:pPr algn="ctr" indent="0" marL="0">
+              <a:buNone/>
+            </a:pPr>
+            <a:r>
+              <a:rPr lang="en-US" sz="850" dirty="0">
+                <a:solidFill>
+                  <a:srgbClr val="475569"/>
+                </a:solidFill>
+                <a:latin typeface="Calibri" pitchFamily="34" charset="0"/>
+                <a:ea typeface="Calibri" pitchFamily="34" charset="-122"/>
+                <a:cs typeface="Calibri" pitchFamily="34" charset="-120"/>
+              </a:rPr>
+              <a:t>keeping steady, stopping</a:t>
+            </a:r>
+            <a:endParaRPr lang="en-US" sz="850" dirty="0"/>
+          </a:p>
+        </p:txBody>
+      </p:sp>
+      <p:sp>
+        <p:nvSpPr>
+          <p:cNvPr id="26" name="Shape 24"/>
           <p:cNvSpPr/>
           <p:nvPr/>
         </p:nvSpPr>
@@ -33084,7 +32381,7 @@
       </p:sp>
       <p:sp>
         <p:nvSpPr>
-          <p:cNvPr id="23" name="Text 21"/>
+          <p:cNvPr id="27" name="Text 25"/>
           <p:cNvSpPr/>
           <p:nvPr/>
         </p:nvSpPr>
@@ -33123,7 +32420,7 @@
       </p:sp>
       <p:sp>
         <p:nvSpPr>
-          <p:cNvPr id="24" name="Shape 22"/>
+          <p:cNvPr id="28" name="Shape 26"/>
           <p:cNvSpPr/>
           <p:nvPr/>
         </p:nvSpPr>
@@ -33150,13 +32447,13 @@
       </p:sp>
       <p:sp>
         <p:nvSpPr>
-          <p:cNvPr id="25" name="Shape 23"/>
-          <p:cNvSpPr/>
-          <p:nvPr/>
-        </p:nvSpPr>
-        <p:spPr>
-          <a:xfrm>
-            <a:off x="2999232" y="3364992"/>
+          <p:cNvPr id="29" name="Shape 27"/>
+          <p:cNvSpPr/>
+          <p:nvPr/>
+        </p:nvSpPr>
+        <p:spPr>
+          <a:xfrm>
+            <a:off x="2313432" y="3364992"/>
             <a:ext cx="1645920" cy="475488"/>
           </a:xfrm>
           <a:prstGeom prst="rect">
@@ -33177,13 +32474,13 @@
       </p:sp>
       <p:sp>
         <p:nvSpPr>
-          <p:cNvPr id="26" name="Text 24"/>
-          <p:cNvSpPr/>
-          <p:nvPr/>
-        </p:nvSpPr>
-        <p:spPr>
-          <a:xfrm>
-            <a:off x="2999232" y="3364992"/>
+          <p:cNvPr id="30" name="Text 28"/>
+          <p:cNvSpPr/>
+          <p:nvPr/>
+        </p:nvSpPr>
+        <p:spPr>
+          <a:xfrm>
+            <a:off x="2313432" y="3364992"/>
             <a:ext cx="1645920" cy="475488"/>
           </a:xfrm>
           <a:prstGeom prst="rect">
@@ -33216,14 +32513,14 @@
       </p:sp>
       <p:sp>
         <p:nvSpPr>
-          <p:cNvPr id="27" name="Text 25"/>
-          <p:cNvSpPr/>
-          <p:nvPr/>
-        </p:nvSpPr>
-        <p:spPr>
-          <a:xfrm>
-            <a:off x="4645152" y="3364992"/>
-            <a:ext cx="1097280" cy="475488"/>
+          <p:cNvPr id="31" name="Text 29"/>
+          <p:cNvSpPr/>
+          <p:nvPr/>
+        </p:nvSpPr>
+        <p:spPr>
+          <a:xfrm>
+            <a:off x="3959352" y="3364992"/>
+            <a:ext cx="411480" cy="475488"/>
           </a:xfrm>
           <a:prstGeom prst="rect">
             <a:avLst/>
@@ -33255,13 +32552,13 @@
       </p:sp>
       <p:sp>
         <p:nvSpPr>
-          <p:cNvPr id="28" name="Shape 26"/>
-          <p:cNvSpPr/>
-          <p:nvPr/>
-        </p:nvSpPr>
-        <p:spPr>
-          <a:xfrm>
-            <a:off x="5742432" y="3364992"/>
+          <p:cNvPr id="32" name="Shape 30"/>
+          <p:cNvSpPr/>
+          <p:nvPr/>
+        </p:nvSpPr>
+        <p:spPr>
+          <a:xfrm>
+            <a:off x="4370832" y="3364992"/>
             <a:ext cx="1645920" cy="475488"/>
           </a:xfrm>
           <a:prstGeom prst="rect">
@@ -33282,13 +32579,13 @@
       </p:sp>
       <p:sp>
         <p:nvSpPr>
-          <p:cNvPr id="29" name="Text 27"/>
-          <p:cNvSpPr/>
-          <p:nvPr/>
-        </p:nvSpPr>
-        <p:spPr>
-          <a:xfrm>
-            <a:off x="5742432" y="3364992"/>
+          <p:cNvPr id="33" name="Text 31"/>
+          <p:cNvSpPr/>
+          <p:nvPr/>
+        </p:nvSpPr>
+        <p:spPr>
+          <a:xfrm>
+            <a:off x="4370832" y="3364992"/>
             <a:ext cx="1645920" cy="475488"/>
           </a:xfrm>
           <a:prstGeom prst="rect">
@@ -33313,7 +32610,7 @@
                 <a:ea typeface="Trebuchet MS" pitchFamily="34" charset="-122"/>
                 <a:cs typeface="Trebuchet MS" pitchFamily="34" charset="-120"/>
               </a:rPr>
-              <a:t>mal</a:t>
+              <a:t>mo</a:t>
             </a:r>
             <a:endParaRPr lang="en-US" sz="1400" dirty="0"/>
           </a:p>
@@ -33321,7 +32618,112 @@
       </p:sp>
       <p:sp>
         <p:nvSpPr>
-          <p:cNvPr id="30" name="Shape 28"/>
+          <p:cNvPr id="34" name="Text 32"/>
+          <p:cNvSpPr/>
+          <p:nvPr/>
+        </p:nvSpPr>
+        <p:spPr>
+          <a:xfrm>
+            <a:off x="6016752" y="3364992"/>
+            <a:ext cx="411480" cy="475488"/>
+          </a:xfrm>
+          <a:prstGeom prst="rect">
+            <a:avLst/>
+          </a:prstGeom>
+          <a:noFill/>
+          <a:ln/>
+        </p:spPr>
+        <p:txBody>
+          <a:bodyPr wrap="square" lIns="0" tIns="0" rIns="0" bIns="0" rtlCol="0" anchor="ctr"/>
+          <a:lstStyle/>
+          <a:p>
+            <a:pPr algn="ctr" indent="0" marL="0">
+              <a:buNone/>
+            </a:pPr>
+            <a:r>
+              <a:rPr lang="en-US" sz="1600" b="1" dirty="0">
+                <a:solidFill>
+                  <a:srgbClr val="0D9488"/>
+                </a:solidFill>
+                <a:latin typeface="Trebuchet MS" pitchFamily="34" charset="0"/>
+                <a:ea typeface="Trebuchet MS" pitchFamily="34" charset="-122"/>
+                <a:cs typeface="Trebuchet MS" pitchFamily="34" charset="-120"/>
+              </a:rPr>
+              <a:t>·</a:t>
+            </a:r>
+            <a:endParaRPr lang="en-US" sz="1600" dirty="0"/>
+          </a:p>
+        </p:txBody>
+      </p:sp>
+      <p:sp>
+        <p:nvSpPr>
+          <p:cNvPr id="35" name="Shape 33"/>
+          <p:cNvSpPr/>
+          <p:nvPr/>
+        </p:nvSpPr>
+        <p:spPr>
+          <a:xfrm>
+            <a:off x="6428232" y="3364992"/>
+            <a:ext cx="1645920" cy="475488"/>
+          </a:xfrm>
+          <a:prstGeom prst="rect">
+            <a:avLst>
+              <a:gd name="adj" fmla="val 9615"/>
+            </a:avLst>
+          </a:prstGeom>
+          <a:solidFill>
+            <a:srgbClr val="FFFFFF"/>
+          </a:solidFill>
+          <a:ln w="12700">
+            <a:solidFill>
+              <a:srgbClr val="0D9488"/>
+            </a:solidFill>
+            <a:prstDash val="solid"/>
+          </a:ln>
+        </p:spPr>
+      </p:sp>
+      <p:sp>
+        <p:nvSpPr>
+          <p:cNvPr id="36" name="Text 34"/>
+          <p:cNvSpPr/>
+          <p:nvPr/>
+        </p:nvSpPr>
+        <p:spPr>
+          <a:xfrm>
+            <a:off x="6428232" y="3364992"/>
+            <a:ext cx="1645920" cy="475488"/>
+          </a:xfrm>
+          <a:prstGeom prst="rect">
+            <a:avLst/>
+          </a:prstGeom>
+          <a:noFill/>
+          <a:ln/>
+        </p:spPr>
+        <p:txBody>
+          <a:bodyPr wrap="square" lIns="0" tIns="0" rIns="0" bIns="0" rtlCol="0" anchor="ctr"/>
+          <a:lstStyle/>
+          <a:p>
+            <a:pPr algn="ctr" indent="0" marL="0">
+              <a:buNone/>
+            </a:pPr>
+            <a:r>
+              <a:rPr lang="en-US" sz="1400" b="1" dirty="0">
+                <a:solidFill>
+                  <a:srgbClr val="0D9488"/>
+                </a:solidFill>
+                <a:latin typeface="Trebuchet MS" pitchFamily="34" charset="0"/>
+                <a:ea typeface="Trebuchet MS" pitchFamily="34" charset="-122"/>
+                <a:cs typeface="Trebuchet MS" pitchFamily="34" charset="-120"/>
+              </a:rPr>
+              <a:t>stat</a:t>
+            </a:r>
+            <a:endParaRPr lang="en-US" sz="1400" dirty="0"/>
+          </a:p>
+        </p:txBody>
+      </p:sp>
+      <p:sp>
+        <p:nvSpPr>
+          <p:cNvPr id="37" name="Shape 35"/>
           <p:cNvSpPr/>
           <p:nvPr/>
         </p:nvSpPr>
@@ -33348,7 +32750,7 @@
       </p:sp>
       <p:sp>
         <p:nvSpPr>
-          <p:cNvPr id="31" name="Text 29"/>
+          <p:cNvPr id="38" name="Text 36"/>
           <p:cNvSpPr/>
           <p:nvPr/>
         </p:nvSpPr>
@@ -33387,7 +32789,7 @@
       </p:sp>
       <p:sp>
         <p:nvSpPr>
-          <p:cNvPr id="32" name="Shape 30"/>
+          <p:cNvPr id="39" name="Shape 37"/>
           <p:cNvSpPr/>
           <p:nvPr/>
         </p:nvSpPr>
@@ -33414,7 +32816,7 @@
       </p:sp>
       <p:sp>
         <p:nvSpPr>
-          <p:cNvPr id="33" name="Text 31"/>
+          <p:cNvPr id="40" name="Text 38"/>
           <p:cNvSpPr/>
           <p:nvPr/>
         </p:nvSpPr>
@@ -33876,7 +33278,7 @@
                 <a:ea typeface="Trebuchet MS" pitchFamily="34" charset="-122"/>
                 <a:cs typeface="Trebuchet MS" pitchFamily="34" charset="-120"/>
               </a:rPr>
-              <a:t>thermal</a:t>
+              <a:t>thermostat</a:t>
             </a:r>
             <a:endParaRPr lang="en-US" sz="2800" dirty="0"/>
           </a:p>
@@ -33956,7 +33358,7 @@
         </p:nvSpPr>
         <p:spPr>
           <a:xfrm>
-            <a:off x="2938272" y="2258568"/>
+            <a:off x="2221992" y="2258568"/>
             <a:ext cx="1828800" cy="292608"/>
           </a:xfrm>
           <a:prstGeom prst="rect">
@@ -33990,7 +33392,7 @@
         </p:nvSpPr>
         <p:spPr>
           <a:xfrm>
-            <a:off x="2938272" y="2258568"/>
+            <a:off x="2221992" y="2258568"/>
             <a:ext cx="1828800" cy="292608"/>
           </a:xfrm>
           <a:prstGeom prst="rect">
@@ -34029,7 +33431,7 @@
         </p:nvSpPr>
         <p:spPr>
           <a:xfrm>
-            <a:off x="2938272" y="2569464"/>
+            <a:off x="2221992" y="2569464"/>
             <a:ext cx="1828800" cy="201168"/>
           </a:xfrm>
           <a:prstGeom prst="rect">
@@ -34068,7 +33470,7 @@
         </p:nvSpPr>
         <p:spPr>
           <a:xfrm>
-            <a:off x="5803392" y="2258568"/>
+            <a:off x="4370832" y="2258568"/>
             <a:ext cx="1828800" cy="292608"/>
           </a:xfrm>
           <a:prstGeom prst="rect">
@@ -34102,7 +33504,7 @@
         </p:nvSpPr>
         <p:spPr>
           <a:xfrm>
-            <a:off x="5803392" y="2258568"/>
+            <a:off x="4370832" y="2258568"/>
             <a:ext cx="1828800" cy="292608"/>
           </a:xfrm>
           <a:prstGeom prst="rect">
@@ -34127,7 +33529,7 @@
                 <a:ea typeface="Trebuchet MS" pitchFamily="34" charset="-122"/>
                 <a:cs typeface="Trebuchet MS" pitchFamily="34" charset="-120"/>
               </a:rPr>
-              <a:t>al</a:t>
+              <a:t>o</a:t>
             </a:r>
             <a:endParaRPr lang="en-US" sz="1300" dirty="0"/>
           </a:p>
@@ -34141,7 +33543,7 @@
         </p:nvSpPr>
         <p:spPr>
           <a:xfrm>
-            <a:off x="5803392" y="2569464"/>
+            <a:off x="4370832" y="2569464"/>
             <a:ext cx="1828800" cy="201168"/>
           </a:xfrm>
           <a:prstGeom prst="rect">
@@ -34166,7 +33568,7 @@
                 <a:ea typeface="Calibri" pitchFamily="34" charset="-122"/>
                 <a:cs typeface="Calibri" pitchFamily="34" charset="-120"/>
               </a:rPr>
-              <a:t>relating to</a:t>
+              <a:t>connecting vowel</a:t>
             </a:r>
             <a:endParaRPr lang="en-US" sz="850" dirty="0"/>
           </a:p>
@@ -34174,7 +33576,158 @@
       </p:sp>
       <p:sp>
         <p:nvSpPr>
-          <p:cNvPr id="22" name="Shape 20"/>
+          <p:cNvPr id="22" name="Text 20"/>
+          <p:cNvSpPr/>
+          <p:nvPr/>
+        </p:nvSpPr>
+        <p:spPr>
+          <a:xfrm>
+            <a:off x="4370832" y="2752344"/>
+            <a:ext cx="1828800" cy="182880"/>
+          </a:xfrm>
+          <a:prstGeom prst="rect">
+            <a:avLst/>
+          </a:prstGeom>
+          <a:noFill/>
+          <a:ln/>
+        </p:spPr>
+        <p:txBody>
+          <a:bodyPr wrap="square" lIns="0" tIns="0" rIns="0" bIns="0" rtlCol="0" anchor="t"/>
+          <a:lstStyle/>
+          <a:p>
+            <a:pPr algn="ctr" indent="0" marL="0">
+              <a:buNone/>
+            </a:pPr>
+            <a:r>
+              <a:rPr lang="en-US" sz="700" i="1" dirty="0">
+                <a:solidFill>
+                  <a:srgbClr val="94A3B8"/>
+                </a:solidFill>
+                <a:latin typeface="Calibri" pitchFamily="34" charset="0"/>
+                <a:ea typeface="Calibri" pitchFamily="34" charset="-122"/>
+                <a:cs typeface="Calibri" pitchFamily="34" charset="-120"/>
+              </a:rPr>
+              <a:t>links root to suffix</a:t>
+            </a:r>
+            <a:endParaRPr lang="en-US" sz="700" dirty="0"/>
+          </a:p>
+        </p:txBody>
+      </p:sp>
+      <p:sp>
+        <p:nvSpPr>
+          <p:cNvPr id="23" name="Shape 21"/>
+          <p:cNvSpPr/>
+          <p:nvPr/>
+        </p:nvSpPr>
+        <p:spPr>
+          <a:xfrm>
+            <a:off x="6519672" y="2258568"/>
+            <a:ext cx="1828800" cy="292608"/>
+          </a:xfrm>
+          <a:prstGeom prst="rect">
+            <a:avLst>
+              <a:gd name="adj" fmla="val 25000"/>
+            </a:avLst>
+          </a:prstGeom>
+          <a:solidFill>
+            <a:srgbClr val="FCE7F3"/>
+          </a:solidFill>
+          <a:ln w="19050">
+            <a:solidFill>
+              <a:srgbClr val="DB2777"/>
+            </a:solidFill>
+            <a:prstDash val="solid"/>
+          </a:ln>
+          <a:effectLst>
+            <a:outerShdw sx="100000" sy="100000" kx="0" ky="0" algn="bl" rotWithShape="0" blurRad="101600" dist="38100" dir="8100000">
+              <a:srgbClr val="000000">
+                <a:alpha val="12000"/>
+              </a:srgbClr>
+            </a:outerShdw>
+          </a:effectLst>
+        </p:spPr>
+      </p:sp>
+      <p:sp>
+        <p:nvSpPr>
+          <p:cNvPr id="24" name="Text 22"/>
+          <p:cNvSpPr/>
+          <p:nvPr/>
+        </p:nvSpPr>
+        <p:spPr>
+          <a:xfrm>
+            <a:off x="6519672" y="2258568"/>
+            <a:ext cx="1828800" cy="292608"/>
+          </a:xfrm>
+          <a:prstGeom prst="rect">
+            <a:avLst/>
+          </a:prstGeom>
+          <a:noFill/>
+          <a:ln/>
+        </p:spPr>
+        <p:txBody>
+          <a:bodyPr wrap="square" lIns="0" tIns="0" rIns="0" bIns="0" rtlCol="0" anchor="ctr"/>
+          <a:lstStyle/>
+          <a:p>
+            <a:pPr algn="ctr" indent="0" marL="0">
+              <a:buNone/>
+            </a:pPr>
+            <a:r>
+              <a:rPr lang="en-US" sz="1300" b="1" dirty="0">
+                <a:solidFill>
+                  <a:srgbClr val="9D174D"/>
+                </a:solidFill>
+                <a:latin typeface="Trebuchet MS" pitchFamily="34" charset="0"/>
+                <a:ea typeface="Trebuchet MS" pitchFamily="34" charset="-122"/>
+                <a:cs typeface="Trebuchet MS" pitchFamily="34" charset="-120"/>
+              </a:rPr>
+              <a:t>stat</a:t>
+            </a:r>
+            <a:endParaRPr lang="en-US" sz="1300" dirty="0"/>
+          </a:p>
+        </p:txBody>
+      </p:sp>
+      <p:sp>
+        <p:nvSpPr>
+          <p:cNvPr id="25" name="Text 23"/>
+          <p:cNvSpPr/>
+          <p:nvPr/>
+        </p:nvSpPr>
+        <p:spPr>
+          <a:xfrm>
+            <a:off x="6519672" y="2569464"/>
+            <a:ext cx="1828800" cy="201168"/>
+          </a:xfrm>
+          <a:prstGeom prst="rect">
+            <a:avLst/>
+          </a:prstGeom>
+          <a:noFill/>
+          <a:ln/>
+        </p:spPr>
+        <p:txBody>
+          <a:bodyPr wrap="square" lIns="0" tIns="0" rIns="0" bIns="0" rtlCol="0" anchor="t"/>
+          <a:lstStyle/>
+          <a:p>
+            <a:pPr algn="ctr" indent="0" marL="0">
+              <a:buNone/>
+            </a:pPr>
+            <a:r>
+              <a:rPr lang="en-US" sz="850" dirty="0">
+                <a:solidFill>
+                  <a:srgbClr val="475569"/>
+                </a:solidFill>
+                <a:latin typeface="Calibri" pitchFamily="34" charset="0"/>
+                <a:ea typeface="Calibri" pitchFamily="34" charset="-122"/>
+                <a:cs typeface="Calibri" pitchFamily="34" charset="-120"/>
+              </a:rPr>
+              <a:t>keeping steady, stopping</a:t>
+            </a:r>
+            <a:endParaRPr lang="en-US" sz="850" dirty="0"/>
+          </a:p>
+        </p:txBody>
+      </p:sp>
+      <p:sp>
+        <p:nvSpPr>
+          <p:cNvPr id="26" name="Shape 24"/>
           <p:cNvSpPr/>
           <p:nvPr/>
         </p:nvSpPr>
@@ -34201,7 +33754,7 @@
       </p:sp>
       <p:sp>
         <p:nvSpPr>
-          <p:cNvPr id="23" name="Text 21"/>
+          <p:cNvPr id="27" name="Text 25"/>
           <p:cNvSpPr/>
           <p:nvPr/>
         </p:nvSpPr>
@@ -34240,7 +33793,7 @@
       </p:sp>
       <p:sp>
         <p:nvSpPr>
-          <p:cNvPr id="24" name="Shape 22"/>
+          <p:cNvPr id="28" name="Shape 26"/>
           <p:cNvSpPr/>
           <p:nvPr/>
         </p:nvSpPr>
@@ -34267,13 +33820,13 @@
       </p:sp>
       <p:sp>
         <p:nvSpPr>
-          <p:cNvPr id="25" name="Shape 23"/>
-          <p:cNvSpPr/>
-          <p:nvPr/>
-        </p:nvSpPr>
-        <p:spPr>
-          <a:xfrm>
-            <a:off x="2999232" y="3364992"/>
+          <p:cNvPr id="29" name="Shape 27"/>
+          <p:cNvSpPr/>
+          <p:nvPr/>
+        </p:nvSpPr>
+        <p:spPr>
+          <a:xfrm>
+            <a:off x="2313432" y="3364992"/>
             <a:ext cx="1645920" cy="475488"/>
           </a:xfrm>
           <a:prstGeom prst="rect">
@@ -34294,13 +33847,13 @@
       </p:sp>
       <p:sp>
         <p:nvSpPr>
-          <p:cNvPr id="26" name="Text 24"/>
-          <p:cNvSpPr/>
-          <p:nvPr/>
-        </p:nvSpPr>
-        <p:spPr>
-          <a:xfrm>
-            <a:off x="2999232" y="3364992"/>
+          <p:cNvPr id="30" name="Text 28"/>
+          <p:cNvSpPr/>
+          <p:nvPr/>
+        </p:nvSpPr>
+        <p:spPr>
+          <a:xfrm>
+            <a:off x="2313432" y="3364992"/>
             <a:ext cx="1645920" cy="475488"/>
           </a:xfrm>
           <a:prstGeom prst="rect">
@@ -34333,14 +33886,14 @@
       </p:sp>
       <p:sp>
         <p:nvSpPr>
-          <p:cNvPr id="27" name="Text 25"/>
-          <p:cNvSpPr/>
-          <p:nvPr/>
-        </p:nvSpPr>
-        <p:spPr>
-          <a:xfrm>
-            <a:off x="4645152" y="3364992"/>
-            <a:ext cx="1097280" cy="475488"/>
+          <p:cNvPr id="31" name="Text 29"/>
+          <p:cNvSpPr/>
+          <p:nvPr/>
+        </p:nvSpPr>
+        <p:spPr>
+          <a:xfrm>
+            <a:off x="3959352" y="3364992"/>
+            <a:ext cx="411480" cy="475488"/>
           </a:xfrm>
           <a:prstGeom prst="rect">
             <a:avLst/>
@@ -34372,13 +33925,13 @@
       </p:sp>
       <p:sp>
         <p:nvSpPr>
-          <p:cNvPr id="28" name="Shape 26"/>
-          <p:cNvSpPr/>
-          <p:nvPr/>
-        </p:nvSpPr>
-        <p:spPr>
-          <a:xfrm>
-            <a:off x="5742432" y="3364992"/>
+          <p:cNvPr id="32" name="Shape 30"/>
+          <p:cNvSpPr/>
+          <p:nvPr/>
+        </p:nvSpPr>
+        <p:spPr>
+          <a:xfrm>
+            <a:off x="4370832" y="3364992"/>
             <a:ext cx="1645920" cy="475488"/>
           </a:xfrm>
           <a:prstGeom prst="rect">
@@ -34399,13 +33952,13 @@
       </p:sp>
       <p:sp>
         <p:nvSpPr>
-          <p:cNvPr id="29" name="Text 27"/>
-          <p:cNvSpPr/>
-          <p:nvPr/>
-        </p:nvSpPr>
-        <p:spPr>
-          <a:xfrm>
-            <a:off x="5742432" y="3364992"/>
+          <p:cNvPr id="33" name="Text 31"/>
+          <p:cNvSpPr/>
+          <p:nvPr/>
+        </p:nvSpPr>
+        <p:spPr>
+          <a:xfrm>
+            <a:off x="4370832" y="3364992"/>
             <a:ext cx="1645920" cy="475488"/>
           </a:xfrm>
           <a:prstGeom prst="rect">
@@ -34430,7 +33983,7 @@
                 <a:ea typeface="Trebuchet MS" pitchFamily="34" charset="-122"/>
                 <a:cs typeface="Trebuchet MS" pitchFamily="34" charset="-120"/>
               </a:rPr>
-              <a:t>mal</a:t>
+              <a:t>mo</a:t>
             </a:r>
             <a:endParaRPr lang="en-US" sz="1400" dirty="0"/>
           </a:p>
@@ -34438,7 +33991,112 @@
       </p:sp>
       <p:sp>
         <p:nvSpPr>
-          <p:cNvPr id="30" name="Shape 28"/>
+          <p:cNvPr id="34" name="Text 32"/>
+          <p:cNvSpPr/>
+          <p:nvPr/>
+        </p:nvSpPr>
+        <p:spPr>
+          <a:xfrm>
+            <a:off x="6016752" y="3364992"/>
+            <a:ext cx="411480" cy="475488"/>
+          </a:xfrm>
+          <a:prstGeom prst="rect">
+            <a:avLst/>
+          </a:prstGeom>
+          <a:noFill/>
+          <a:ln/>
+        </p:spPr>
+        <p:txBody>
+          <a:bodyPr wrap="square" lIns="0" tIns="0" rIns="0" bIns="0" rtlCol="0" anchor="ctr"/>
+          <a:lstStyle/>
+          <a:p>
+            <a:pPr algn="ctr" indent="0" marL="0">
+              <a:buNone/>
+            </a:pPr>
+            <a:r>
+              <a:rPr lang="en-US" sz="1600" b="1" dirty="0">
+                <a:solidFill>
+                  <a:srgbClr val="0D9488"/>
+                </a:solidFill>
+                <a:latin typeface="Trebuchet MS" pitchFamily="34" charset="0"/>
+                <a:ea typeface="Trebuchet MS" pitchFamily="34" charset="-122"/>
+                <a:cs typeface="Trebuchet MS" pitchFamily="34" charset="-120"/>
+              </a:rPr>
+              <a:t>·</a:t>
+            </a:r>
+            <a:endParaRPr lang="en-US" sz="1600" dirty="0"/>
+          </a:p>
+        </p:txBody>
+      </p:sp>
+      <p:sp>
+        <p:nvSpPr>
+          <p:cNvPr id="35" name="Shape 33"/>
+          <p:cNvSpPr/>
+          <p:nvPr/>
+        </p:nvSpPr>
+        <p:spPr>
+          <a:xfrm>
+            <a:off x="6428232" y="3364992"/>
+            <a:ext cx="1645920" cy="475488"/>
+          </a:xfrm>
+          <a:prstGeom prst="rect">
+            <a:avLst>
+              <a:gd name="adj" fmla="val 9615"/>
+            </a:avLst>
+          </a:prstGeom>
+          <a:solidFill>
+            <a:srgbClr val="FFFFFF"/>
+          </a:solidFill>
+          <a:ln w="12700">
+            <a:solidFill>
+              <a:srgbClr val="0D9488"/>
+            </a:solidFill>
+            <a:prstDash val="solid"/>
+          </a:ln>
+        </p:spPr>
+      </p:sp>
+      <p:sp>
+        <p:nvSpPr>
+          <p:cNvPr id="36" name="Text 34"/>
+          <p:cNvSpPr/>
+          <p:nvPr/>
+        </p:nvSpPr>
+        <p:spPr>
+          <a:xfrm>
+            <a:off x="6428232" y="3364992"/>
+            <a:ext cx="1645920" cy="475488"/>
+          </a:xfrm>
+          <a:prstGeom prst="rect">
+            <a:avLst/>
+          </a:prstGeom>
+          <a:noFill/>
+          <a:ln/>
+        </p:spPr>
+        <p:txBody>
+          <a:bodyPr wrap="square" lIns="0" tIns="0" rIns="0" bIns="0" rtlCol="0" anchor="ctr"/>
+          <a:lstStyle/>
+          <a:p>
+            <a:pPr algn="ctr" indent="0" marL="0">
+              <a:buNone/>
+            </a:pPr>
+            <a:r>
+              <a:rPr lang="en-US" sz="1400" b="1" dirty="0">
+                <a:solidFill>
+                  <a:srgbClr val="0D9488"/>
+                </a:solidFill>
+                <a:latin typeface="Trebuchet MS" pitchFamily="34" charset="0"/>
+                <a:ea typeface="Trebuchet MS" pitchFamily="34" charset="-122"/>
+                <a:cs typeface="Trebuchet MS" pitchFamily="34" charset="-120"/>
+              </a:rPr>
+              <a:t>stat</a:t>
+            </a:r>
+            <a:endParaRPr lang="en-US" sz="1400" dirty="0"/>
+          </a:p>
+        </p:txBody>
+      </p:sp>
+      <p:sp>
+        <p:nvSpPr>
+          <p:cNvPr id="37" name="Shape 35"/>
           <p:cNvSpPr/>
           <p:nvPr/>
         </p:nvSpPr>
@@ -34465,7 +34123,7 @@
       </p:sp>
       <p:sp>
         <p:nvSpPr>
-          <p:cNvPr id="31" name="Text 29"/>
+          <p:cNvPr id="38" name="Text 36"/>
           <p:cNvSpPr/>
           <p:nvPr/>
         </p:nvSpPr>
@@ -34504,7 +34162,7 @@
       </p:sp>
       <p:sp>
         <p:nvSpPr>
-          <p:cNvPr id="32" name="Shape 30"/>
+          <p:cNvPr id="39" name="Shape 37"/>
           <p:cNvSpPr/>
           <p:nvPr/>
         </p:nvSpPr>
@@ -34531,13 +34189,13 @@
       </p:sp>
       <p:sp>
         <p:nvSpPr>
-          <p:cNvPr id="33" name="Shape 31"/>
-          <p:cNvSpPr/>
-          <p:nvPr/>
-        </p:nvSpPr>
-        <p:spPr>
-          <a:xfrm>
-            <a:off x="2670048" y="4169664"/>
+          <p:cNvPr id="40" name="Shape 38"/>
+          <p:cNvSpPr/>
+          <p:nvPr/>
+        </p:nvSpPr>
+        <p:spPr>
+          <a:xfrm>
+            <a:off x="2023872" y="4169664"/>
             <a:ext cx="685800" cy="475488"/>
           </a:xfrm>
           <a:prstGeom prst="rect">
@@ -34558,13 +34216,13 @@
       </p:sp>
       <p:sp>
         <p:nvSpPr>
-          <p:cNvPr id="34" name="Text 32"/>
-          <p:cNvSpPr/>
-          <p:nvPr/>
-        </p:nvSpPr>
-        <p:spPr>
-          <a:xfrm>
-            <a:off x="2670048" y="4169664"/>
+          <p:cNvPr id="41" name="Text 39"/>
+          <p:cNvSpPr/>
+          <p:nvPr/>
+        </p:nvSpPr>
+        <p:spPr>
+          <a:xfrm>
+            <a:off x="2023872" y="4169664"/>
             <a:ext cx="685800" cy="475488"/>
           </a:xfrm>
           <a:prstGeom prst="rect">
@@ -34597,13 +34255,13 @@
       </p:sp>
       <p:sp>
         <p:nvSpPr>
-          <p:cNvPr id="35" name="Shape 33"/>
-          <p:cNvSpPr/>
-          <p:nvPr/>
-        </p:nvSpPr>
-        <p:spPr>
-          <a:xfrm>
-            <a:off x="4123944" y="4169664"/>
+          <p:cNvPr id="42" name="Shape 40"/>
+          <p:cNvSpPr/>
+          <p:nvPr/>
+        </p:nvSpPr>
+        <p:spPr>
+          <a:xfrm>
+            <a:off x="2831592" y="4169664"/>
             <a:ext cx="685800" cy="475488"/>
           </a:xfrm>
           <a:prstGeom prst="rect">
@@ -34624,13 +34282,13 @@
       </p:sp>
       <p:sp>
         <p:nvSpPr>
-          <p:cNvPr id="36" name="Text 34"/>
-          <p:cNvSpPr/>
-          <p:nvPr/>
-        </p:nvSpPr>
-        <p:spPr>
-          <a:xfrm>
-            <a:off x="4123944" y="4169664"/>
+          <p:cNvPr id="43" name="Text 41"/>
+          <p:cNvSpPr/>
+          <p:nvPr/>
+        </p:nvSpPr>
+        <p:spPr>
+          <a:xfrm>
+            <a:off x="2831592" y="4169664"/>
             <a:ext cx="685800" cy="475488"/>
           </a:xfrm>
           <a:prstGeom prst="rect">
@@ -34663,13 +34321,13 @@
       </p:sp>
       <p:sp>
         <p:nvSpPr>
-          <p:cNvPr id="37" name="Shape 35"/>
-          <p:cNvSpPr/>
-          <p:nvPr/>
-        </p:nvSpPr>
-        <p:spPr>
-          <a:xfrm>
-            <a:off x="5577840" y="4169664"/>
+          <p:cNvPr id="44" name="Shape 42"/>
+          <p:cNvSpPr/>
+          <p:nvPr/>
+        </p:nvSpPr>
+        <p:spPr>
+          <a:xfrm>
+            <a:off x="3639312" y="4169664"/>
             <a:ext cx="685800" cy="475488"/>
           </a:xfrm>
           <a:prstGeom prst="rect">
@@ -34690,13 +34348,13 @@
       </p:sp>
       <p:sp>
         <p:nvSpPr>
-          <p:cNvPr id="38" name="Text 36"/>
-          <p:cNvSpPr/>
-          <p:nvPr/>
-        </p:nvSpPr>
-        <p:spPr>
-          <a:xfrm>
-            <a:off x="5577840" y="4169664"/>
+          <p:cNvPr id="45" name="Text 43"/>
+          <p:cNvSpPr/>
+          <p:nvPr/>
+        </p:nvSpPr>
+        <p:spPr>
+          <a:xfrm>
+            <a:off x="3639312" y="4169664"/>
             <a:ext cx="685800" cy="475488"/>
           </a:xfrm>
           <a:prstGeom prst="rect">
@@ -34729,13 +34387,13 @@
       </p:sp>
       <p:sp>
         <p:nvSpPr>
-          <p:cNvPr id="39" name="Shape 37"/>
-          <p:cNvSpPr/>
-          <p:nvPr/>
-        </p:nvSpPr>
-        <p:spPr>
-          <a:xfrm>
-            <a:off x="7031736" y="4169664"/>
+          <p:cNvPr id="46" name="Shape 44"/>
+          <p:cNvSpPr/>
+          <p:nvPr/>
+        </p:nvSpPr>
+        <p:spPr>
+          <a:xfrm>
+            <a:off x="4447032" y="4169664"/>
             <a:ext cx="685800" cy="475488"/>
           </a:xfrm>
           <a:prstGeom prst="rect">
@@ -34756,13 +34414,13 @@
       </p:sp>
       <p:sp>
         <p:nvSpPr>
-          <p:cNvPr id="40" name="Text 38"/>
-          <p:cNvSpPr/>
-          <p:nvPr/>
-        </p:nvSpPr>
-        <p:spPr>
-          <a:xfrm>
-            <a:off x="7031736" y="4169664"/>
+          <p:cNvPr id="47" name="Text 45"/>
+          <p:cNvSpPr/>
+          <p:nvPr/>
+        </p:nvSpPr>
+        <p:spPr>
+          <a:xfrm>
+            <a:off x="4447032" y="4169664"/>
             <a:ext cx="685800" cy="475488"/>
           </a:xfrm>
           <a:prstGeom prst="rect">
@@ -34787,7 +34445,271 @@
                 <a:ea typeface="Trebuchet MS" pitchFamily="34" charset="-122"/>
                 <a:cs typeface="Trebuchet MS" pitchFamily="34" charset="-120"/>
               </a:rPr>
-              <a:t>al</a:t>
+              <a:t>o</a:t>
+            </a:r>
+            <a:endParaRPr lang="en-US" sz="900" dirty="0"/>
+          </a:p>
+        </p:txBody>
+      </p:sp>
+      <p:sp>
+        <p:nvSpPr>
+          <p:cNvPr id="48" name="Shape 46"/>
+          <p:cNvSpPr/>
+          <p:nvPr/>
+        </p:nvSpPr>
+        <p:spPr>
+          <a:xfrm>
+            <a:off x="5254752" y="4169664"/>
+            <a:ext cx="685800" cy="475488"/>
+          </a:xfrm>
+          <a:prstGeom prst="rect">
+            <a:avLst>
+              <a:gd name="adj" fmla="val 7692"/>
+            </a:avLst>
+          </a:prstGeom>
+          <a:solidFill>
+            <a:srgbClr val="FFFFFF"/>
+          </a:solidFill>
+          <a:ln w="12700">
+            <a:solidFill>
+              <a:srgbClr val="DB2777"/>
+            </a:solidFill>
+            <a:prstDash val="solid"/>
+          </a:ln>
+        </p:spPr>
+      </p:sp>
+      <p:sp>
+        <p:nvSpPr>
+          <p:cNvPr id="49" name="Text 47"/>
+          <p:cNvSpPr/>
+          <p:nvPr/>
+        </p:nvSpPr>
+        <p:spPr>
+          <a:xfrm>
+            <a:off x="5254752" y="4169664"/>
+            <a:ext cx="685800" cy="475488"/>
+          </a:xfrm>
+          <a:prstGeom prst="rect">
+            <a:avLst/>
+          </a:prstGeom>
+          <a:noFill/>
+          <a:ln/>
+        </p:spPr>
+        <p:txBody>
+          <a:bodyPr wrap="square" lIns="0" tIns="0" rIns="0" bIns="0" rtlCol="0" anchor="ctr"/>
+          <a:lstStyle/>
+          <a:p>
+            <a:pPr algn="ctr" indent="0" marL="0">
+              <a:buNone/>
+            </a:pPr>
+            <a:r>
+              <a:rPr lang="en-US" sz="900" b="1" dirty="0">
+                <a:solidFill>
+                  <a:srgbClr val="9D174D"/>
+                </a:solidFill>
+                <a:latin typeface="Trebuchet MS" pitchFamily="34" charset="0"/>
+                <a:ea typeface="Trebuchet MS" pitchFamily="34" charset="-122"/>
+                <a:cs typeface="Trebuchet MS" pitchFamily="34" charset="-120"/>
+              </a:rPr>
+              <a:t>s</a:t>
+            </a:r>
+            <a:endParaRPr lang="en-US" sz="900" dirty="0"/>
+          </a:p>
+        </p:txBody>
+      </p:sp>
+      <p:sp>
+        <p:nvSpPr>
+          <p:cNvPr id="50" name="Shape 48"/>
+          <p:cNvSpPr/>
+          <p:nvPr/>
+        </p:nvSpPr>
+        <p:spPr>
+          <a:xfrm>
+            <a:off x="6062472" y="4169664"/>
+            <a:ext cx="685800" cy="475488"/>
+          </a:xfrm>
+          <a:prstGeom prst="rect">
+            <a:avLst>
+              <a:gd name="adj" fmla="val 7692"/>
+            </a:avLst>
+          </a:prstGeom>
+          <a:solidFill>
+            <a:srgbClr val="FFFFFF"/>
+          </a:solidFill>
+          <a:ln w="12700">
+            <a:solidFill>
+              <a:srgbClr val="DB2777"/>
+            </a:solidFill>
+            <a:prstDash val="solid"/>
+          </a:ln>
+        </p:spPr>
+      </p:sp>
+      <p:sp>
+        <p:nvSpPr>
+          <p:cNvPr id="51" name="Text 49"/>
+          <p:cNvSpPr/>
+          <p:nvPr/>
+        </p:nvSpPr>
+        <p:spPr>
+          <a:xfrm>
+            <a:off x="6062472" y="4169664"/>
+            <a:ext cx="685800" cy="475488"/>
+          </a:xfrm>
+          <a:prstGeom prst="rect">
+            <a:avLst/>
+          </a:prstGeom>
+          <a:noFill/>
+          <a:ln/>
+        </p:spPr>
+        <p:txBody>
+          <a:bodyPr wrap="square" lIns="0" tIns="0" rIns="0" bIns="0" rtlCol="0" anchor="ctr"/>
+          <a:lstStyle/>
+          <a:p>
+            <a:pPr algn="ctr" indent="0" marL="0">
+              <a:buNone/>
+            </a:pPr>
+            <a:r>
+              <a:rPr lang="en-US" sz="900" b="1" dirty="0">
+                <a:solidFill>
+                  <a:srgbClr val="9D174D"/>
+                </a:solidFill>
+                <a:latin typeface="Trebuchet MS" pitchFamily="34" charset="0"/>
+                <a:ea typeface="Trebuchet MS" pitchFamily="34" charset="-122"/>
+                <a:cs typeface="Trebuchet MS" pitchFamily="34" charset="-120"/>
+              </a:rPr>
+              <a:t>t</a:t>
+            </a:r>
+            <a:endParaRPr lang="en-US" sz="900" dirty="0"/>
+          </a:p>
+        </p:txBody>
+      </p:sp>
+      <p:sp>
+        <p:nvSpPr>
+          <p:cNvPr id="52" name="Shape 50"/>
+          <p:cNvSpPr/>
+          <p:nvPr/>
+        </p:nvSpPr>
+        <p:spPr>
+          <a:xfrm>
+            <a:off x="6870192" y="4169664"/>
+            <a:ext cx="685800" cy="475488"/>
+          </a:xfrm>
+          <a:prstGeom prst="rect">
+            <a:avLst>
+              <a:gd name="adj" fmla="val 7692"/>
+            </a:avLst>
+          </a:prstGeom>
+          <a:solidFill>
+            <a:srgbClr val="FFFFFF"/>
+          </a:solidFill>
+          <a:ln w="12700">
+            <a:solidFill>
+              <a:srgbClr val="DB2777"/>
+            </a:solidFill>
+            <a:prstDash val="solid"/>
+          </a:ln>
+        </p:spPr>
+      </p:sp>
+      <p:sp>
+        <p:nvSpPr>
+          <p:cNvPr id="53" name="Text 51"/>
+          <p:cNvSpPr/>
+          <p:nvPr/>
+        </p:nvSpPr>
+        <p:spPr>
+          <a:xfrm>
+            <a:off x="6870192" y="4169664"/>
+            <a:ext cx="685800" cy="475488"/>
+          </a:xfrm>
+          <a:prstGeom prst="rect">
+            <a:avLst/>
+          </a:prstGeom>
+          <a:noFill/>
+          <a:ln/>
+        </p:spPr>
+        <p:txBody>
+          <a:bodyPr wrap="square" lIns="0" tIns="0" rIns="0" bIns="0" rtlCol="0" anchor="ctr"/>
+          <a:lstStyle/>
+          <a:p>
+            <a:pPr algn="ctr" indent="0" marL="0">
+              <a:buNone/>
+            </a:pPr>
+            <a:r>
+              <a:rPr lang="en-US" sz="900" b="1" dirty="0">
+                <a:solidFill>
+                  <a:srgbClr val="9D174D"/>
+                </a:solidFill>
+                <a:latin typeface="Trebuchet MS" pitchFamily="34" charset="0"/>
+                <a:ea typeface="Trebuchet MS" pitchFamily="34" charset="-122"/>
+                <a:cs typeface="Trebuchet MS" pitchFamily="34" charset="-120"/>
+              </a:rPr>
+              <a:t>a</a:t>
+            </a:r>
+            <a:endParaRPr lang="en-US" sz="900" dirty="0"/>
+          </a:p>
+        </p:txBody>
+      </p:sp>
+      <p:sp>
+        <p:nvSpPr>
+          <p:cNvPr id="54" name="Shape 52"/>
+          <p:cNvSpPr/>
+          <p:nvPr/>
+        </p:nvSpPr>
+        <p:spPr>
+          <a:xfrm>
+            <a:off x="7677912" y="4169664"/>
+            <a:ext cx="685800" cy="475488"/>
+          </a:xfrm>
+          <a:prstGeom prst="rect">
+            <a:avLst>
+              <a:gd name="adj" fmla="val 7692"/>
+            </a:avLst>
+          </a:prstGeom>
+          <a:solidFill>
+            <a:srgbClr val="FFFFFF"/>
+          </a:solidFill>
+          <a:ln w="12700">
+            <a:solidFill>
+              <a:srgbClr val="DB2777"/>
+            </a:solidFill>
+            <a:prstDash val="solid"/>
+          </a:ln>
+        </p:spPr>
+      </p:sp>
+      <p:sp>
+        <p:nvSpPr>
+          <p:cNvPr id="55" name="Text 53"/>
+          <p:cNvSpPr/>
+          <p:nvPr/>
+        </p:nvSpPr>
+        <p:spPr>
+          <a:xfrm>
+            <a:off x="7677912" y="4169664"/>
+            <a:ext cx="685800" cy="475488"/>
+          </a:xfrm>
+          <a:prstGeom prst="rect">
+            <a:avLst/>
+          </a:prstGeom>
+          <a:noFill/>
+          <a:ln/>
+        </p:spPr>
+        <p:txBody>
+          <a:bodyPr wrap="square" lIns="0" tIns="0" rIns="0" bIns="0" rtlCol="0" anchor="ctr"/>
+          <a:lstStyle/>
+          <a:p>
+            <a:pPr algn="ctr" indent="0" marL="0">
+              <a:buNone/>
+            </a:pPr>
+            <a:r>
+              <a:rPr lang="en-US" sz="900" b="1" dirty="0">
+                <a:solidFill>
+                  <a:srgbClr val="9D174D"/>
+                </a:solidFill>
+                <a:latin typeface="Trebuchet MS" pitchFamily="34" charset="0"/>
+                <a:ea typeface="Trebuchet MS" pitchFamily="34" charset="-122"/>
+                <a:cs typeface="Trebuchet MS" pitchFamily="34" charset="-120"/>
+              </a:rPr>
+              <a:t>t</a:t>
             </a:r>
             <a:endParaRPr lang="en-US" sz="900" dirty="0"/>
           </a:p>
@@ -37047,7 +36969,7 @@
                 <a:ea typeface="Trebuchet MS" pitchFamily="34" charset="-122"/>
                 <a:cs typeface="Trebuchet MS" pitchFamily="34" charset="-120"/>
               </a:rPr>
-              <a:t>ec-</a:t>
+              <a:t>endo-</a:t>
             </a:r>
             <a:endParaRPr lang="en-US" sz="1300" dirty="0"/>
           </a:p>
@@ -37200,7 +37122,7 @@
                 <a:ea typeface="Trebuchet MS" pitchFamily="34" charset="-122"/>
                 <a:cs typeface="Trebuchet MS" pitchFamily="34" charset="-120"/>
               </a:rPr>
-              <a:t>en-</a:t>
+              <a:t>eco-</a:t>
             </a:r>
             <a:endParaRPr lang="en-US" sz="1300" dirty="0"/>
           </a:p>
@@ -37289,7 +37211,7 @@
                 <a:ea typeface="Trebuchet MS" pitchFamily="34" charset="-122"/>
                 <a:cs typeface="Trebuchet MS" pitchFamily="34" charset="-120"/>
               </a:rPr>
-              <a:t>-ostat</a:t>
+              <a:t>-stat</a:t>
             </a:r>
             <a:endParaRPr lang="en-US" sz="1300" dirty="0"/>
           </a:p>
@@ -37460,7 +37382,7 @@
                 <a:ea typeface="Trebuchet MS" pitchFamily="34" charset="-122"/>
                 <a:cs typeface="Trebuchet MS" pitchFamily="34" charset="-120"/>
               </a:rPr>
-              <a:t>thermostat</a:t>
+              <a:t>thermos</a:t>
             </a:r>
             <a:endParaRPr lang="en-US" sz="1200" dirty="0"/>
           </a:p>
@@ -37592,7 +37514,7 @@
                 <a:ea typeface="Trebuchet MS" pitchFamily="34" charset="-122"/>
                 <a:cs typeface="Trebuchet MS" pitchFamily="34" charset="-120"/>
               </a:rPr>
-              <a:t>geothermal</a:t>
+              <a:t>thermostat</a:t>
             </a:r>
             <a:endParaRPr lang="en-US" sz="1200" dirty="0"/>
           </a:p>
@@ -37658,7 +37580,7 @@
                 <a:ea typeface="Trebuchet MS" pitchFamily="34" charset="-122"/>
                 <a:cs typeface="Trebuchet MS" pitchFamily="34" charset="-120"/>
               </a:rPr>
-              <a:t>hypothermia</a:t>
+              <a:t>geothermal</a:t>
             </a:r>
             <a:endParaRPr lang="en-US" sz="1200" dirty="0"/>
           </a:p>
@@ -37724,7 +37646,7 @@
                 <a:ea typeface="Trebuchet MS" pitchFamily="34" charset="-122"/>
                 <a:cs typeface="Trebuchet MS" pitchFamily="34" charset="-120"/>
               </a:rPr>
-              <a:t>hyperthermia</a:t>
+              <a:t>hypothermia</a:t>
             </a:r>
             <a:endParaRPr lang="en-US" sz="1200" dirty="0"/>
           </a:p>
@@ -37790,7 +37712,7 @@
                 <a:ea typeface="Trebuchet MS" pitchFamily="34" charset="-122"/>
                 <a:cs typeface="Trebuchet MS" pitchFamily="34" charset="-120"/>
               </a:rPr>
-              <a:t>thermos</a:t>
+              <a:t>hyperthermia</a:t>
             </a:r>
             <a:endParaRPr lang="en-US" sz="1200" dirty="0"/>
           </a:p>
@@ -37856,7 +37778,7 @@
                 <a:ea typeface="Trebuchet MS" pitchFamily="34" charset="-122"/>
                 <a:cs typeface="Trebuchet MS" pitchFamily="34" charset="-120"/>
               </a:rPr>
-              <a:t>ectotherm</a:t>
+              <a:t>endothermic</a:t>
             </a:r>
             <a:endParaRPr lang="en-US" sz="1200" dirty="0"/>
           </a:p>
@@ -39044,7 +38966,7 @@
                 <a:ea typeface="Calibri" pitchFamily="34" charset="-122"/>
                 <a:cs typeface="Calibri" pitchFamily="34" charset="-120"/>
               </a:rPr>
-              <a:t>1.  The root 'therm' comes from Greek and means heat.</a:t>
+              <a:t>1.  Hypothermia is a dangerous condition where the body becomes too cold.</a:t>
             </a:r>
             <a:endParaRPr lang="en-US" sz="1300" dirty="0"/>
           </a:p>
@@ -39183,7 +39105,7 @@
                 <a:ea typeface="Calibri" pitchFamily="34" charset="-122"/>
                 <a:cs typeface="Calibri" pitchFamily="34" charset="-120"/>
               </a:rPr>
-              <a:t>2.  A thermometer is used to measure how much rain has fallen.</a:t>
+              <a:t>2.  Geothermal energy comes from heat produced by the sun's surface.</a:t>
             </a:r>
             <a:endParaRPr lang="en-US" sz="1300" dirty="0"/>
           </a:p>
@@ -39322,7 +39244,7 @@
                 <a:ea typeface="Calibri" pitchFamily="34" charset="-122"/>
                 <a:cs typeface="Calibri" pitchFamily="34" charset="-120"/>
               </a:rPr>
-              <a:t>3.  Hypothermia happens when a person's body gets dangerously cold.</a:t>
+              <a:t>3.  A thermometer is used to measure how much light there is in a room.</a:t>
             </a:r>
             <a:endParaRPr lang="en-US" sz="1300" dirty="0"/>
           </a:p>
@@ -39345,11 +39267,11 @@
             </a:avLst>
           </a:prstGeom>
           <a:solidFill>
-            <a:srgbClr val="DCFCE7"/>
-          </a:solidFill>
-          <a:ln w="12700">
-            <a:solidFill>
-              <a:srgbClr val="16A34A"/>
+            <a:srgbClr val="FEE2E2"/>
+          </a:solidFill>
+          <a:ln w="12700">
+            <a:solidFill>
+              <a:srgbClr val="DC2626"/>
             </a:solidFill>
             <a:prstDash val="solid"/>
           </a:ln>
@@ -39382,13 +39304,13 @@
             <a:r>
               <a:rPr lang="en-US" sz="1100" b="1" dirty="0">
                 <a:solidFill>
-                  <a:srgbClr val="16A34A"/>
+                  <a:srgbClr val="DC2626"/>
                 </a:solidFill>
                 <a:latin typeface="Trebuchet MS" pitchFamily="34" charset="0"/>
                 <a:ea typeface="Trebuchet MS" pitchFamily="34" charset="-122"/>
                 <a:cs typeface="Trebuchet MS" pitchFamily="34" charset="-120"/>
               </a:rPr>
-              <a:t>TRUE</a:t>
+              <a:t>FALSE</a:t>
             </a:r>
             <a:endParaRPr lang="en-US" sz="1100" dirty="0"/>
           </a:p>
@@ -39461,7 +39383,7 @@
                 <a:ea typeface="Calibri" pitchFamily="34" charset="-122"/>
                 <a:cs typeface="Calibri" pitchFamily="34" charset="-120"/>
               </a:rPr>
-              <a:t>4.  Geothermal energy uses heat from inside the Earth.</a:t>
+              <a:t>4.  The root 'therm' comes from a Greek word meaning heat.</a:t>
             </a:r>
             <a:endParaRPr lang="en-US" sz="1300" dirty="0"/>
           </a:p>
@@ -39600,7 +39522,7 @@
                 <a:ea typeface="Calibri" pitchFamily="34" charset="-122"/>
                 <a:cs typeface="Calibri" pitchFamily="34" charset="-120"/>
               </a:rPr>
-              <a:t>5.  The root 'therm' comes from Latin and means water.</a:t>
+              <a:t>5.  The word 'thermal' has the root 'therm' in it.</a:t>
             </a:r>
             <a:endParaRPr lang="en-US" sz="1300" dirty="0"/>
           </a:p>
@@ -39623,11 +39545,11 @@
             </a:avLst>
           </a:prstGeom>
           <a:solidFill>
-            <a:srgbClr val="FEE2E2"/>
-          </a:solidFill>
-          <a:ln w="12700">
-            <a:solidFill>
-              <a:srgbClr val="DC2626"/>
+            <a:srgbClr val="DCFCE7"/>
+          </a:solidFill>
+          <a:ln w="12700">
+            <a:solidFill>
+              <a:srgbClr val="16A34A"/>
             </a:solidFill>
             <a:prstDash val="solid"/>
           </a:ln>
@@ -39660,13 +39582,13 @@
             <a:r>
               <a:rPr lang="en-US" sz="1100" b="1" dirty="0">
                 <a:solidFill>
-                  <a:srgbClr val="DC2626"/>
+                  <a:srgbClr val="16A34A"/>
                 </a:solidFill>
                 <a:latin typeface="Trebuchet MS" pitchFamily="34" charset="0"/>
                 <a:ea typeface="Trebuchet MS" pitchFamily="34" charset="-122"/>
                 <a:cs typeface="Trebuchet MS" pitchFamily="34" charset="-120"/>
               </a:rPr>
-              <a:t>FALSE</a:t>
+              <a:t>TRUE</a:t>
             </a:r>
             <a:endParaRPr lang="en-US" sz="1100" dirty="0"/>
           </a:p>
@@ -40305,7 +40227,7 @@
                 <a:ea typeface="Trebuchet MS" pitchFamily="34" charset="-122"/>
                 <a:cs typeface="Trebuchet MS" pitchFamily="34" charset="-120"/>
               </a:rPr>
-              <a:t>thermostat</a:t>
+              <a:t>thermos</a:t>
             </a:r>
             <a:endParaRPr lang="en-US" sz="1300" dirty="0"/>
           </a:p>
@@ -40437,7 +40359,7 @@
                 <a:ea typeface="Trebuchet MS" pitchFamily="34" charset="-122"/>
                 <a:cs typeface="Trebuchet MS" pitchFamily="34" charset="-120"/>
               </a:rPr>
-              <a:t>geothermal</a:t>
+              <a:t>thermostat</a:t>
             </a:r>
             <a:endParaRPr lang="en-US" sz="1300" dirty="0"/>
           </a:p>
@@ -40503,7 +40425,7 @@
                 <a:ea typeface="Trebuchet MS" pitchFamily="34" charset="-122"/>
                 <a:cs typeface="Trebuchet MS" pitchFamily="34" charset="-120"/>
               </a:rPr>
-              <a:t>hypothermia</a:t>
+              <a:t>geothermal</a:t>
             </a:r>
             <a:endParaRPr lang="en-US" sz="1300" dirty="0"/>
           </a:p>
@@ -40569,7 +40491,7 @@
                 <a:ea typeface="Trebuchet MS" pitchFamily="34" charset="-122"/>
                 <a:cs typeface="Trebuchet MS" pitchFamily="34" charset="-120"/>
               </a:rPr>
-              <a:t>hyperthermia</a:t>
+              <a:t>hypothermia</a:t>
             </a:r>
             <a:endParaRPr lang="en-US" sz="1300" dirty="0"/>
           </a:p>
@@ -40635,7 +40557,7 @@
                 <a:ea typeface="Trebuchet MS" pitchFamily="34" charset="-122"/>
                 <a:cs typeface="Trebuchet MS" pitchFamily="34" charset="-120"/>
               </a:rPr>
-              <a:t>thermos</a:t>
+              <a:t>hyperthermia</a:t>
             </a:r>
             <a:endParaRPr lang="en-US" sz="1300" dirty="0"/>
           </a:p>
@@ -41726,7 +41648,7 @@
                 <a:ea typeface="Trebuchet MS" pitchFamily="34" charset="-122"/>
                 <a:cs typeface="Trebuchet MS" pitchFamily="34" charset="-120"/>
               </a:rPr>
-              <a:t>ec-</a:t>
+              <a:t>endo-</a:t>
             </a:r>
             <a:endParaRPr lang="en-US" sz="1300" dirty="0"/>
           </a:p>
@@ -41879,7 +41801,7 @@
                 <a:ea typeface="Trebuchet MS" pitchFamily="34" charset="-122"/>
                 <a:cs typeface="Trebuchet MS" pitchFamily="34" charset="-120"/>
               </a:rPr>
-              <a:t>en-</a:t>
+              <a:t>eco-</a:t>
             </a:r>
             <a:endParaRPr lang="en-US" sz="1300" dirty="0"/>
           </a:p>
@@ -41968,7 +41890,7 @@
                 <a:ea typeface="Trebuchet MS" pitchFamily="34" charset="-122"/>
                 <a:cs typeface="Trebuchet MS" pitchFamily="34" charset="-120"/>
               </a:rPr>
-              <a:t>-ostat</a:t>
+              <a:t>-stat</a:t>
             </a:r>
             <a:endParaRPr lang="en-US" sz="1300" dirty="0"/>
           </a:p>
@@ -42879,7 +42801,7 @@
                 <a:ea typeface="Calibri" pitchFamily="34" charset="-122"/>
                 <a:cs typeface="Calibri" pitchFamily="34" charset="-120"/>
               </a:rPr>
-              <a:t>A tool that measures how hot or cold something is.</a:t>
+              <a:t>A tool used to measure how hot or cold something is, like your body temperature.</a:t>
             </a:r>
             <a:endParaRPr lang="en-US" sz="1200" dirty="0"/>
           </a:p>
@@ -42952,7 +42874,7 @@
                 <a:ea typeface="Trebuchet MS" pitchFamily="34" charset="-122"/>
                 <a:cs typeface="Trebuchet MS" pitchFamily="34" charset="-120"/>
               </a:rPr>
-              <a:t>thermostat</a:t>
+              <a:t>thermos</a:t>
             </a:r>
             <a:endParaRPr lang="en-US" sz="1200" dirty="0"/>
           </a:p>
@@ -43018,7 +42940,7 @@
                 <a:ea typeface="Calibri" pitchFamily="34" charset="-122"/>
                 <a:cs typeface="Calibri" pitchFamily="34" charset="-120"/>
               </a:rPr>
-              <a:t>Related to heat, like thermal underwear that keeps you warm.</a:t>
+              <a:t>Relating to heat, such as thermal clothing that keeps you warm in cold weather.</a:t>
             </a:r>
             <a:endParaRPr lang="en-US" sz="1200" dirty="0"/>
           </a:p>
@@ -43157,7 +43079,7 @@
                 <a:ea typeface="Calibri" pitchFamily="34" charset="-122"/>
                 <a:cs typeface="Calibri" pitchFamily="34" charset="-120"/>
               </a:rPr>
-              <a:t>A dangerous condition when a person's body becomes too hot.</a:t>
+              <a:t>A dangerous condition where your body gets too cold and cannot warm itself back up.</a:t>
             </a:r>
             <a:endParaRPr lang="en-US" sz="1200" dirty="0"/>
           </a:p>
@@ -43230,7 +43152,7 @@
                 <a:ea typeface="Trebuchet MS" pitchFamily="34" charset="-122"/>
                 <a:cs typeface="Trebuchet MS" pitchFamily="34" charset="-120"/>
               </a:rPr>
-              <a:t>geothermal</a:t>
+              <a:t>thermostat</a:t>
             </a:r>
             <a:endParaRPr lang="en-US" sz="1200" dirty="0"/>
           </a:p>
@@ -43296,7 +43218,7 @@
                 <a:ea typeface="Calibri" pitchFamily="34" charset="-122"/>
                 <a:cs typeface="Calibri" pitchFamily="34" charset="-120"/>
               </a:rPr>
-              <a:t>Heat that comes from deep inside the Earth.</a:t>
+              <a:t>A device that controls the temperature in a room or building by turning heating or cooling on and off.</a:t>
             </a:r>
             <a:endParaRPr lang="en-US" sz="1200" dirty="0"/>
           </a:p>
@@ -43369,7 +43291,7 @@
                 <a:ea typeface="Trebuchet MS" pitchFamily="34" charset="-122"/>
                 <a:cs typeface="Trebuchet MS" pitchFamily="34" charset="-120"/>
               </a:rPr>
-              <a:t>hypothermia</a:t>
+              <a:t>geothermal</a:t>
             </a:r>
             <a:endParaRPr lang="en-US" sz="1200" dirty="0"/>
           </a:p>
@@ -43435,7 +43357,7 @@
                 <a:ea typeface="Calibri" pitchFamily="34" charset="-122"/>
                 <a:cs typeface="Calibri" pitchFamily="34" charset="-120"/>
               </a:rPr>
-              <a:t>A dangerous condition when a person's body becomes too cold.</a:t>
+              <a:t>Heat that comes from deep inside the Earth, sometimes used to make electricity.</a:t>
             </a:r>
             <a:endParaRPr lang="en-US" sz="1200" dirty="0"/>
           </a:p>
@@ -43508,7 +43430,7 @@
                 <a:ea typeface="Trebuchet MS" pitchFamily="34" charset="-122"/>
                 <a:cs typeface="Trebuchet MS" pitchFamily="34" charset="-120"/>
               </a:rPr>
-              <a:t>hyperthermia</a:t>
+              <a:t>hypothermia</a:t>
             </a:r>
             <a:endParaRPr lang="en-US" sz="1200" dirty="0"/>
           </a:p>
@@ -43574,7 +43496,7 @@
                 <a:ea typeface="Calibri" pitchFamily="34" charset="-122"/>
                 <a:cs typeface="Calibri" pitchFamily="34" charset="-120"/>
               </a:rPr>
-              <a:t>A special bottle that keeps drinks hot or cold for a long time.</a:t>
+              <a:t>A dangerous condition where your body gets too hot, usually caused by extreme heat.</a:t>
             </a:r>
             <a:endParaRPr lang="en-US" sz="1200" dirty="0"/>
           </a:p>
@@ -43647,7 +43569,7 @@
                 <a:ea typeface="Trebuchet MS" pitchFamily="34" charset="-122"/>
                 <a:cs typeface="Trebuchet MS" pitchFamily="34" charset="-120"/>
               </a:rPr>
-              <a:t>thermos</a:t>
+              <a:t>hyperthermia</a:t>
             </a:r>
             <a:endParaRPr lang="en-US" sz="1200" dirty="0"/>
           </a:p>
@@ -43713,7 +43635,7 @@
                 <a:ea typeface="Calibri" pitchFamily="34" charset="-122"/>
                 <a:cs typeface="Calibri" pitchFamily="34" charset="-120"/>
               </a:rPr>
-              <a:t>A device that controls the temperature in a room or building.</a:t>
+              <a:t>A special container that keeps drinks hot or cold for a long time.</a:t>
             </a:r>
             <a:endParaRPr lang="en-US" sz="1200" dirty="0"/>
           </a:p>
@@ -44208,7 +44130,7 @@
                 <a:ea typeface="Calibri" pitchFamily="34" charset="-122"/>
                 <a:cs typeface="Calibri" pitchFamily="34" charset="-120"/>
               </a:rPr>
-              <a:t>The nurse used a thermometer to check if the patient had a fever.</a:t>
+              <a:t>The nurse used a thermometer to check if the student had a fever.</a:t>
             </a:r>
             <a:endParaRPr lang="en-US" sz="1500" dirty="0"/>
           </a:p>
@@ -44372,7 +44294,7 @@
                 <a:ea typeface="Calibri" pitchFamily="34" charset="-122"/>
                 <a:cs typeface="Calibri" pitchFamily="34" charset="-120"/>
               </a:rPr>
-              <a:t>We use geothermal energy in some parts of Australia to heat water using natural heat from the ground.</a:t>
+              <a:t>Geothermal energy uses heat from deep inside the Earth to generate electricity.</a:t>
             </a:r>
             <a:endParaRPr lang="en-US" sz="1500" dirty="0"/>
           </a:p>

--- a/output/wordlabs-therm-3day.pptx
+++ b/output/wordlabs-therm-3day.pptx
@@ -23014,7 +23014,7 @@
         </p:nvSpPr>
         <p:spPr>
           <a:xfrm>
-            <a:off x="2124837" y="4169664"/>
+            <a:off x="2023872" y="4169664"/>
             <a:ext cx="685800" cy="475488"/>
           </a:xfrm>
           <a:prstGeom prst="rect">
@@ -23041,7 +23041,7 @@
         </p:nvSpPr>
         <p:spPr>
           <a:xfrm>
-            <a:off x="2124837" y="4169664"/>
+            <a:off x="2023872" y="4169664"/>
             <a:ext cx="685800" cy="475488"/>
           </a:xfrm>
           <a:prstGeom prst="rect">
@@ -23080,7 +23080,7 @@
         </p:nvSpPr>
         <p:spPr>
           <a:xfrm>
-            <a:off x="3033522" y="4169664"/>
+            <a:off x="2831592" y="4169664"/>
             <a:ext cx="685800" cy="475488"/>
           </a:xfrm>
           <a:prstGeom prst="rect">
@@ -23107,7 +23107,7 @@
         </p:nvSpPr>
         <p:spPr>
           <a:xfrm>
-            <a:off x="3033522" y="4169664"/>
+            <a:off x="2831592" y="4169664"/>
             <a:ext cx="685800" cy="475488"/>
           </a:xfrm>
           <a:prstGeom prst="rect">
@@ -23132,7 +23132,7 @@
                 <a:ea typeface="Trebuchet MS" pitchFamily="34" charset="-122"/>
                 <a:cs typeface="Trebuchet MS" pitchFamily="34" charset="-120"/>
               </a:rPr>
-              <a:t>ee</a:t>
+              <a:t>e</a:t>
             </a:r>
             <a:endParaRPr lang="en-US" sz="900" dirty="0"/>
           </a:p>
@@ -23146,7 +23146,7 @@
         </p:nvSpPr>
         <p:spPr>
           <a:xfrm>
-            <a:off x="3942207" y="4169664"/>
+            <a:off x="3639312" y="4169664"/>
             <a:ext cx="685800" cy="475488"/>
           </a:xfrm>
           <a:prstGeom prst="rect">
@@ -23173,7 +23173,7 @@
         </p:nvSpPr>
         <p:spPr>
           <a:xfrm>
-            <a:off x="3942207" y="4169664"/>
+            <a:off x="3639312" y="4169664"/>
             <a:ext cx="685800" cy="475488"/>
           </a:xfrm>
           <a:prstGeom prst="rect">
@@ -23212,7 +23212,7 @@
         </p:nvSpPr>
         <p:spPr>
           <a:xfrm>
-            <a:off x="4850892" y="4169664"/>
+            <a:off x="4447032" y="4169664"/>
             <a:ext cx="685800" cy="475488"/>
           </a:xfrm>
           <a:prstGeom prst="rect">
@@ -23239,7 +23239,7 @@
         </p:nvSpPr>
         <p:spPr>
           <a:xfrm>
-            <a:off x="4850892" y="4169664"/>
+            <a:off x="4447032" y="4169664"/>
             <a:ext cx="685800" cy="475488"/>
           </a:xfrm>
           <a:prstGeom prst="rect">
@@ -23278,7 +23278,7 @@
         </p:nvSpPr>
         <p:spPr>
           <a:xfrm>
-            <a:off x="5759577" y="4169664"/>
+            <a:off x="5254752" y="4169664"/>
             <a:ext cx="685800" cy="475488"/>
           </a:xfrm>
           <a:prstGeom prst="rect">
@@ -23305,7 +23305,7 @@
         </p:nvSpPr>
         <p:spPr>
           <a:xfrm>
-            <a:off x="5759577" y="4169664"/>
+            <a:off x="5254752" y="4169664"/>
             <a:ext cx="685800" cy="475488"/>
           </a:xfrm>
           <a:prstGeom prst="rect">
@@ -23344,7 +23344,7 @@
         </p:nvSpPr>
         <p:spPr>
           <a:xfrm>
-            <a:off x="6668262" y="4169664"/>
+            <a:off x="6062472" y="4169664"/>
             <a:ext cx="685800" cy="475488"/>
           </a:xfrm>
           <a:prstGeom prst="rect">
@@ -23371,7 +23371,7 @@
         </p:nvSpPr>
         <p:spPr>
           <a:xfrm>
-            <a:off x="6668262" y="4169664"/>
+            <a:off x="6062472" y="4169664"/>
             <a:ext cx="685800" cy="475488"/>
           </a:xfrm>
           <a:prstGeom prst="rect">
@@ -23410,7 +23410,7 @@
         </p:nvSpPr>
         <p:spPr>
           <a:xfrm>
-            <a:off x="7576947" y="4169664"/>
+            <a:off x="6870192" y="4169664"/>
             <a:ext cx="685800" cy="475488"/>
           </a:xfrm>
           <a:prstGeom prst="rect">
@@ -23437,7 +23437,7 @@
         </p:nvSpPr>
         <p:spPr>
           <a:xfrm>
-            <a:off x="7576947" y="4169664"/>
+            <a:off x="6870192" y="4169664"/>
             <a:ext cx="685800" cy="475488"/>
           </a:xfrm>
           <a:prstGeom prst="rect">
@@ -23462,7 +23462,73 @@
                 <a:ea typeface="Trebuchet MS" pitchFamily="34" charset="-122"/>
                 <a:cs typeface="Trebuchet MS" pitchFamily="34" charset="-120"/>
               </a:rPr>
-              <a:t>al</a:t>
+              <a:t>a</a:t>
+            </a:r>
+            <a:endParaRPr lang="en-US" sz="900" dirty="0"/>
+          </a:p>
+        </p:txBody>
+      </p:sp>
+      <p:sp>
+        <p:nvSpPr>
+          <p:cNvPr id="56" name="Shape 54"/>
+          <p:cNvSpPr/>
+          <p:nvPr/>
+        </p:nvSpPr>
+        <p:spPr>
+          <a:xfrm>
+            <a:off x="7677912" y="4169664"/>
+            <a:ext cx="685800" cy="475488"/>
+          </a:xfrm>
+          <a:prstGeom prst="rect">
+            <a:avLst>
+              <a:gd name="adj" fmla="val 7692"/>
+            </a:avLst>
+          </a:prstGeom>
+          <a:solidFill>
+            <a:srgbClr val="FFFFFF"/>
+          </a:solidFill>
+          <a:ln w="12700">
+            <a:solidFill>
+              <a:srgbClr val="DB2777"/>
+            </a:solidFill>
+            <a:prstDash val="solid"/>
+          </a:ln>
+        </p:spPr>
+      </p:sp>
+      <p:sp>
+        <p:nvSpPr>
+          <p:cNvPr id="57" name="Text 55"/>
+          <p:cNvSpPr/>
+          <p:nvPr/>
+        </p:nvSpPr>
+        <p:spPr>
+          <a:xfrm>
+            <a:off x="7677912" y="4169664"/>
+            <a:ext cx="685800" cy="475488"/>
+          </a:xfrm>
+          <a:prstGeom prst="rect">
+            <a:avLst/>
+          </a:prstGeom>
+          <a:noFill/>
+          <a:ln/>
+        </p:spPr>
+        <p:txBody>
+          <a:bodyPr wrap="square" lIns="0" tIns="0" rIns="0" bIns="0" rtlCol="0" anchor="ctr"/>
+          <a:lstStyle/>
+          <a:p>
+            <a:pPr algn="ctr" indent="0" marL="0">
+              <a:buNone/>
+            </a:pPr>
+            <a:r>
+              <a:rPr lang="en-US" sz="900" b="1" dirty="0">
+                <a:solidFill>
+                  <a:srgbClr val="9D174D"/>
+                </a:solidFill>
+                <a:latin typeface="Trebuchet MS" pitchFamily="34" charset="0"/>
+                <a:ea typeface="Trebuchet MS" pitchFamily="34" charset="-122"/>
+                <a:cs typeface="Trebuchet MS" pitchFamily="34" charset="-120"/>
+              </a:rPr>
+              <a:t>l</a:t>
             </a:r>
             <a:endParaRPr lang="en-US" sz="900" dirty="0"/>
           </a:p>
@@ -38966,7 +39032,7 @@
                 <a:ea typeface="Calibri" pitchFamily="34" charset="-122"/>
                 <a:cs typeface="Calibri" pitchFamily="34" charset="-120"/>
               </a:rPr>
-              <a:t>1.  Hypothermia is a dangerous condition where the body becomes too cold.</a:t>
+              <a:t>1.  The word 'thermal' has the root 'therm' in it.</a:t>
             </a:r>
             <a:endParaRPr lang="en-US" sz="1300" dirty="0"/>
           </a:p>
@@ -39105,7 +39171,7 @@
                 <a:ea typeface="Calibri" pitchFamily="34" charset="-122"/>
                 <a:cs typeface="Calibri" pitchFamily="34" charset="-120"/>
               </a:rPr>
-              <a:t>2.  Geothermal energy comes from heat produced by the sun's surface.</a:t>
+              <a:t>2.  Hypothermia is a dangerous condition where the body becomes too cold.</a:t>
             </a:r>
             <a:endParaRPr lang="en-US" sz="1300" dirty="0"/>
           </a:p>
@@ -39128,11 +39194,11 @@
             </a:avLst>
           </a:prstGeom>
           <a:solidFill>
-            <a:srgbClr val="FEE2E2"/>
-          </a:solidFill>
-          <a:ln w="12700">
-            <a:solidFill>
-              <a:srgbClr val="DC2626"/>
+            <a:srgbClr val="DCFCE7"/>
+          </a:solidFill>
+          <a:ln w="12700">
+            <a:solidFill>
+              <a:srgbClr val="16A34A"/>
             </a:solidFill>
             <a:prstDash val="solid"/>
           </a:ln>
@@ -39165,13 +39231,13 @@
             <a:r>
               <a:rPr lang="en-US" sz="1100" b="1" dirty="0">
                 <a:solidFill>
-                  <a:srgbClr val="DC2626"/>
+                  <a:srgbClr val="16A34A"/>
                 </a:solidFill>
                 <a:latin typeface="Trebuchet MS" pitchFamily="34" charset="0"/>
                 <a:ea typeface="Trebuchet MS" pitchFamily="34" charset="-122"/>
                 <a:cs typeface="Trebuchet MS" pitchFamily="34" charset="-120"/>
               </a:rPr>
-              <a:t>FALSE</a:t>
+              <a:t>TRUE</a:t>
             </a:r>
             <a:endParaRPr lang="en-US" sz="1100" dirty="0"/>
           </a:p>
@@ -39244,7 +39310,7 @@
                 <a:ea typeface="Calibri" pitchFamily="34" charset="-122"/>
                 <a:cs typeface="Calibri" pitchFamily="34" charset="-120"/>
               </a:rPr>
-              <a:t>3.  A thermometer is used to measure how much light there is in a room.</a:t>
+              <a:t>3.  Geothermal energy comes from heat produced by the sun's surface.</a:t>
             </a:r>
             <a:endParaRPr lang="en-US" sz="1300" dirty="0"/>
           </a:p>
@@ -39383,7 +39449,7 @@
                 <a:ea typeface="Calibri" pitchFamily="34" charset="-122"/>
                 <a:cs typeface="Calibri" pitchFamily="34" charset="-120"/>
               </a:rPr>
-              <a:t>4.  The root 'therm' comes from a Greek word meaning heat.</a:t>
+              <a:t>4.  A thermometer is used to measure how much light there is in a room.</a:t>
             </a:r>
             <a:endParaRPr lang="en-US" sz="1300" dirty="0"/>
           </a:p>
@@ -39406,11 +39472,11 @@
             </a:avLst>
           </a:prstGeom>
           <a:solidFill>
-            <a:srgbClr val="DCFCE7"/>
-          </a:solidFill>
-          <a:ln w="12700">
-            <a:solidFill>
-              <a:srgbClr val="16A34A"/>
+            <a:srgbClr val="FEE2E2"/>
+          </a:solidFill>
+          <a:ln w="12700">
+            <a:solidFill>
+              <a:srgbClr val="DC2626"/>
             </a:solidFill>
             <a:prstDash val="solid"/>
           </a:ln>
@@ -39443,13 +39509,13 @@
             <a:r>
               <a:rPr lang="en-US" sz="1100" b="1" dirty="0">
                 <a:solidFill>
-                  <a:srgbClr val="16A34A"/>
+                  <a:srgbClr val="DC2626"/>
                 </a:solidFill>
                 <a:latin typeface="Trebuchet MS" pitchFamily="34" charset="0"/>
                 <a:ea typeface="Trebuchet MS" pitchFamily="34" charset="-122"/>
                 <a:cs typeface="Trebuchet MS" pitchFamily="34" charset="-120"/>
               </a:rPr>
-              <a:t>TRUE</a:t>
+              <a:t>FALSE</a:t>
             </a:r>
             <a:endParaRPr lang="en-US" sz="1100" dirty="0"/>
           </a:p>
@@ -39522,7 +39588,7 @@
                 <a:ea typeface="Calibri" pitchFamily="34" charset="-122"/>
                 <a:cs typeface="Calibri" pitchFamily="34" charset="-120"/>
               </a:rPr>
-              <a:t>5.  The word 'thermal' has the root 'therm' in it.</a:t>
+              <a:t>5.  The root 'therm' comes from a Greek word meaning heat.</a:t>
             </a:r>
             <a:endParaRPr lang="en-US" sz="1300" dirty="0"/>
           </a:p>
